--- a/thesis/presentation/MSA_Detector_Defense_improved_v2.pptx
+++ b/thesis/presentation/MSA_Detector_Defense_improved_v2.pptx
@@ -20,9 +20,14 @@
     <p:sldId id="268" r:id="rId14"/>
     <p:sldId id="269" r:id="rId15"/>
     <p:sldId id="270" r:id="rId16"/>
+    <p:sldId id="271" r:id="rId17"/>
+    <p:sldId id="272" r:id="rId18"/>
+    <p:sldId id="273" r:id="rId19"/>
+    <p:sldId id="274" r:id="rId20"/>
+    <p:sldId id="275" r:id="rId21"/>
   </p:sldIdLst>
   <p:notesMasterIdLst>
-    <p:notesMasterId r:id="rId17"/>
+    <p:notesMasterId r:id="rId22"/>
   </p:notesMasterIdLst>
   <p:sldSz cx="9144000" cy="5143500"/>
   <p:notesSz cx="5143500" cy="9144000"/>
@@ -1461,6 +1466,362 @@
 </p:notes>
 </file>
 
+<file path=ppt/notesSlides/notesSlide16.xml><?xml version="1.0" encoding="utf-8"?>
+<p:notes xmlns:a="http://schemas.openxmlformats.org/drawingml/2006/main" xmlns:r="http://schemas.openxmlformats.org/officeDocument/2006/relationships" xmlns:p="http://schemas.openxmlformats.org/presentationml/2006/main">
+  <p:cSld>
+    <p:spTree>
+      <p:nvGrpSpPr>
+        <p:cNvPr id="1" name=""/>
+        <p:cNvGrpSpPr/>
+        <p:nvPr/>
+      </p:nvGrpSpPr>
+      <p:grpSpPr>
+        <a:xfrm>
+          <a:off x="0" y="0"/>
+          <a:ext cx="0" cy="0"/>
+          <a:chOff x="0" y="0"/>
+          <a:chExt cx="0" cy="0"/>
+        </a:xfrm>
+      </p:grpSpPr>
+      <p:sp>
+        <p:nvSpPr>
+          <p:cNvPr id="2" name="Slide Image Placeholder 1"/>
+          <p:cNvSpPr>
+            <a:spLocks noGrp="1" noRot="1" noChangeAspect="1"/>
+          </p:cNvSpPr>
+          <p:nvPr>
+            <p:ph type="sldImg"/>
+          </p:nvPr>
+        </p:nvSpPr>
+        <p:spPr/>
+      </p:sp>
+      <p:sp>
+        <p:nvSpPr>
+          <p:cNvPr id="3" name="Notes Placeholder 2"/>
+          <p:cNvSpPr>
+            <a:spLocks noGrp="1"/>
+          </p:cNvSpPr>
+          <p:nvPr>
+            <p:ph type="body" idx="1"/>
+          </p:nvPr>
+        </p:nvSpPr>
+        <p:spPr/>
+        <p:txBody>
+          <a:bodyPr/>
+          <a:lstStyle/>
+          <a:p>
+            <a:r>
+              <a:rPr lang="en-US" dirty="0"/>
+              <a:t>Backup slide only.
+Use this if someone asks what you mean by microservice, architectural anti-pattern, service boundary, or evidence-based reporting. Keep the answer short: define the term, then connect it to the implementation.</a:t>
+            </a:r>
+            <a:endParaRPr lang="en-US" dirty="0"/>
+          </a:p>
+        </p:txBody>
+      </p:sp>
+      <p:sp>
+        <p:nvSpPr>
+          <p:cNvPr id="4" name="Slide Number Placeholder 3"/>
+          <p:cNvSpPr>
+            <a:spLocks noGrp="1"/>
+          </p:cNvSpPr>
+          <p:nvPr>
+            <p:ph type="sldNum" sz="quarter" idx="10"/>
+          </p:nvPr>
+        </p:nvSpPr>
+        <p:spPr/>
+        <p:txBody>
+          <a:bodyPr/>
+          <a:lstStyle/>
+          <a:p>
+            <a:fld id="{F7021451-1387-4CA6-816F-3879F97B5CBC}" type="slidenum">
+              <a:rPr lang="en-US"/>
+              <a:t>16</a:t>
+            </a:fld>
+            <a:endParaRPr lang="en-US"/>
+          </a:p>
+        </p:txBody>
+      </p:sp>
+    </p:spTree>
+    <p:extLst>
+      <p:ext uri="{BB962C8B-B14F-4D97-AF65-F5344CB8AC3E}">
+        <p14:creationId xmlns:p14="http://schemas.microsoft.com/office/powerpoint/2010/main" val="1024086991"/>
+      </p:ext>
+    </p:extLst>
+  </p:cSld>
+  <p:clrMapOvr>
+    <a:masterClrMapping/>
+  </p:clrMapOvr>
+</p:notes>
+</file>
+
+<file path=ppt/notesSlides/notesSlide17.xml><?xml version="1.0" encoding="utf-8"?>
+<p:notes xmlns:a="http://schemas.openxmlformats.org/drawingml/2006/main" xmlns:r="http://schemas.openxmlformats.org/officeDocument/2006/relationships" xmlns:p="http://schemas.openxmlformats.org/presentationml/2006/main">
+  <p:cSld>
+    <p:spTree>
+      <p:nvGrpSpPr>
+        <p:cNvPr id="1" name=""/>
+        <p:cNvGrpSpPr/>
+        <p:nvPr/>
+      </p:nvGrpSpPr>
+      <p:grpSpPr>
+        <a:xfrm>
+          <a:off x="0" y="0"/>
+          <a:ext cx="0" cy="0"/>
+          <a:chOff x="0" y="0"/>
+          <a:chExt cx="0" cy="0"/>
+        </a:xfrm>
+      </p:grpSpPr>
+      <p:sp>
+        <p:nvSpPr>
+          <p:cNvPr id="2" name="Slide Image Placeholder 1"/>
+          <p:cNvSpPr>
+            <a:spLocks noGrp="1" noRot="1" noChangeAspect="1"/>
+          </p:cNvSpPr>
+          <p:nvPr>
+            <p:ph type="sldImg"/>
+          </p:nvPr>
+        </p:nvSpPr>
+        <p:spPr/>
+      </p:sp>
+      <p:sp>
+        <p:nvSpPr>
+          <p:cNvPr id="3" name="Notes Placeholder 2"/>
+          <p:cNvSpPr>
+            <a:spLocks noGrp="1"/>
+          </p:cNvSpPr>
+          <p:nvPr>
+            <p:ph type="body" idx="1"/>
+          </p:nvPr>
+        </p:nvSpPr>
+        <p:spPr/>
+        <p:txBody>
+          <a:bodyPr/>
+          <a:lstStyle/>
+          <a:p>
+            <a:r>
+              <a:rPr lang="en-US" dirty="0"/>
+              <a:t>Backup slide only.
+Use this for questions such as 'how is cohesion measured?', 'what does edge weight mean?', or 'how do you avoid punishing larger codebases?'. The key answer is that raw counts are normalised when size would otherwise bias the result.</a:t>
+            </a:r>
+            <a:endParaRPr lang="en-US" dirty="0"/>
+          </a:p>
+        </p:txBody>
+      </p:sp>
+      <p:sp>
+        <p:nvSpPr>
+          <p:cNvPr id="4" name="Slide Number Placeholder 3"/>
+          <p:cNvSpPr>
+            <a:spLocks noGrp="1"/>
+          </p:cNvSpPr>
+          <p:nvPr>
+            <p:ph type="sldNum" sz="quarter" idx="10"/>
+          </p:nvPr>
+        </p:nvSpPr>
+        <p:spPr/>
+        <p:txBody>
+          <a:bodyPr/>
+          <a:lstStyle/>
+          <a:p>
+            <a:fld id="{F7021451-1387-4CA6-816F-3879F97B5CBC}" type="slidenum">
+              <a:rPr lang="en-US"/>
+              <a:t>17</a:t>
+            </a:fld>
+            <a:endParaRPr lang="en-US"/>
+          </a:p>
+        </p:txBody>
+      </p:sp>
+    </p:spTree>
+    <p:extLst>
+      <p:ext uri="{BB962C8B-B14F-4D97-AF65-F5344CB8AC3E}">
+        <p14:creationId xmlns:p14="http://schemas.microsoft.com/office/powerpoint/2010/main" val="1024086991"/>
+      </p:ext>
+    </p:extLst>
+  </p:cSld>
+  <p:clrMapOvr>
+    <a:masterClrMapping/>
+  </p:clrMapOvr>
+</p:notes>
+</file>
+
+<file path=ppt/notesSlides/notesSlide18.xml><?xml version="1.0" encoding="utf-8"?>
+<p:notes xmlns:a="http://schemas.openxmlformats.org/drawingml/2006/main" xmlns:r="http://schemas.openxmlformats.org/officeDocument/2006/relationships" xmlns:p="http://schemas.openxmlformats.org/presentationml/2006/main">
+  <p:cSld>
+    <p:spTree>
+      <p:nvGrpSpPr>
+        <p:cNvPr id="1" name=""/>
+        <p:cNvGrpSpPr/>
+        <p:nvPr/>
+      </p:nvGrpSpPr>
+      <p:grpSpPr>
+        <a:xfrm>
+          <a:off x="0" y="0"/>
+          <a:ext cx="0" cy="0"/>
+          <a:chOff x="0" y="0"/>
+          <a:chExt cx="0" cy="0"/>
+        </a:xfrm>
+      </p:grpSpPr>
+      <p:sp>
+        <p:nvSpPr>
+          <p:cNvPr id="2" name="Slide Image Placeholder 1"/>
+          <p:cNvSpPr>
+            <a:spLocks noGrp="1" noRot="1" noChangeAspect="1"/>
+          </p:cNvSpPr>
+          <p:nvPr>
+            <p:ph type="sldImg"/>
+          </p:nvPr>
+        </p:nvSpPr>
+        <p:spPr/>
+      </p:sp>
+      <p:sp>
+        <p:nvSpPr>
+          <p:cNvPr id="3" name="Notes Placeholder 2"/>
+          <p:cNvSpPr>
+            <a:spLocks noGrp="1"/>
+          </p:cNvSpPr>
+          <p:nvPr>
+            <p:ph type="body" idx="1"/>
+          </p:nvPr>
+        </p:nvSpPr>
+        <p:spPr/>
+        <p:txBody>
+          <a:bodyPr/>
+          <a:lstStyle/>
+          <a:p>
+            <a:r>
+              <a:rPr lang="en-US" dirty="0"/>
+              <a:t>Backup slide only.
+Use this if someone asks whether the score is reproducible. Emphasise that each category is capped independently, so a bad category cannot consume points from another category. Also acknowledge that weights are engineering judgement and should be calibrated on industrial data in future work.</a:t>
+            </a:r>
+            <a:endParaRPr lang="en-US" dirty="0"/>
+          </a:p>
+        </p:txBody>
+      </p:sp>
+      <p:sp>
+        <p:nvSpPr>
+          <p:cNvPr id="4" name="Slide Number Placeholder 3"/>
+          <p:cNvSpPr>
+            <a:spLocks noGrp="1"/>
+          </p:cNvSpPr>
+          <p:nvPr>
+            <p:ph type="sldNum" sz="quarter" idx="10"/>
+          </p:nvPr>
+        </p:nvSpPr>
+        <p:spPr/>
+        <p:txBody>
+          <a:bodyPr/>
+          <a:lstStyle/>
+          <a:p>
+            <a:fld id="{F7021451-1387-4CA6-816F-3879F97B5CBC}" type="slidenum">
+              <a:rPr lang="en-US"/>
+              <a:t>18</a:t>
+            </a:fld>
+            <a:endParaRPr lang="en-US"/>
+          </a:p>
+        </p:txBody>
+      </p:sp>
+    </p:spTree>
+    <p:extLst>
+      <p:ext uri="{BB962C8B-B14F-4D97-AF65-F5344CB8AC3E}">
+        <p14:creationId xmlns:p14="http://schemas.microsoft.com/office/powerpoint/2010/main" val="1024086991"/>
+      </p:ext>
+    </p:extLst>
+  </p:cSld>
+  <p:clrMapOvr>
+    <a:masterClrMapping/>
+  </p:clrMapOvr>
+</p:notes>
+</file>
+
+<file path=ppt/notesSlides/notesSlide19.xml><?xml version="1.0" encoding="utf-8"?>
+<p:notes xmlns:a="http://schemas.openxmlformats.org/drawingml/2006/main" xmlns:r="http://schemas.openxmlformats.org/officeDocument/2006/relationships" xmlns:p="http://schemas.openxmlformats.org/presentationml/2006/main">
+  <p:cSld>
+    <p:spTree>
+      <p:nvGrpSpPr>
+        <p:cNvPr id="1" name=""/>
+        <p:cNvGrpSpPr/>
+        <p:nvPr/>
+      </p:nvGrpSpPr>
+      <p:grpSpPr>
+        <a:xfrm>
+          <a:off x="0" y="0"/>
+          <a:ext cx="0" cy="0"/>
+          <a:chOff x="0" y="0"/>
+          <a:chExt cx="0" cy="0"/>
+        </a:xfrm>
+      </p:grpSpPr>
+      <p:sp>
+        <p:nvSpPr>
+          <p:cNvPr id="2" name="Slide Image Placeholder 1"/>
+          <p:cNvSpPr>
+            <a:spLocks noGrp="1" noRot="1" noChangeAspect="1"/>
+          </p:cNvSpPr>
+          <p:nvPr>
+            <p:ph type="sldImg"/>
+          </p:nvPr>
+        </p:nvSpPr>
+        <p:spPr/>
+      </p:sp>
+      <p:sp>
+        <p:nvSpPr>
+          <p:cNvPr id="3" name="Notes Placeholder 2"/>
+          <p:cNvSpPr>
+            <a:spLocks noGrp="1"/>
+          </p:cNvSpPr>
+          <p:nvPr>
+            <p:ph type="body" idx="1"/>
+          </p:nvPr>
+        </p:nvSpPr>
+        <p:spPr/>
+        <p:txBody>
+          <a:bodyPr/>
+          <a:lstStyle/>
+          <a:p>
+            <a:r>
+              <a:rPr lang="en-US" dirty="0"/>
+              <a:t>Backup slide only.
+Use this if someone asks 'what exactly triggers detector X?'. Avoid reading the full table. Point to the detector they asked about, state the signal and threshold, then explain that thresholds are configurable and would be calibrated for production use.</a:t>
+            </a:r>
+            <a:endParaRPr lang="en-US" dirty="0"/>
+          </a:p>
+        </p:txBody>
+      </p:sp>
+      <p:sp>
+        <p:nvSpPr>
+          <p:cNvPr id="4" name="Slide Number Placeholder 3"/>
+          <p:cNvSpPr>
+            <a:spLocks noGrp="1"/>
+          </p:cNvSpPr>
+          <p:nvPr>
+            <p:ph type="sldNum" sz="quarter" idx="10"/>
+          </p:nvPr>
+        </p:nvSpPr>
+        <p:spPr/>
+        <p:txBody>
+          <a:bodyPr/>
+          <a:lstStyle/>
+          <a:p>
+            <a:fld id="{F7021451-1387-4CA6-816F-3879F97B5CBC}" type="slidenum">
+              <a:rPr lang="en-US"/>
+              <a:t>19</a:t>
+            </a:fld>
+            <a:endParaRPr lang="en-US"/>
+          </a:p>
+        </p:txBody>
+      </p:sp>
+    </p:spTree>
+    <p:extLst>
+      <p:ext uri="{BB962C8B-B14F-4D97-AF65-F5344CB8AC3E}">
+        <p14:creationId xmlns:p14="http://schemas.microsoft.com/office/powerpoint/2010/main" val="1024086991"/>
+      </p:ext>
+    </p:extLst>
+  </p:cSld>
+  <p:clrMapOvr>
+    <a:masterClrMapping/>
+  </p:clrMapOvr>
+</p:notes>
+</file>
+
 <file path=ppt/notesSlides/notesSlide2.xml><?xml version="1.0" encoding="utf-8"?>
 <p:notes xmlns:a="http://schemas.openxmlformats.org/drawingml/2006/main" xmlns:r="http://schemas.openxmlformats.org/officeDocument/2006/relationships" xmlns:p="http://schemas.openxmlformats.org/presentationml/2006/main">
   <p:cSld>
@@ -1538,6 +1899,95 @@
             <a:fld id="{F7021451-1387-4CA6-816F-3879F97B5CBC}" type="slidenum">
               <a:rPr lang="en-US"/>
               <a:t>2</a:t>
+            </a:fld>
+            <a:endParaRPr lang="en-US"/>
+          </a:p>
+        </p:txBody>
+      </p:sp>
+    </p:spTree>
+    <p:extLst>
+      <p:ext uri="{BB962C8B-B14F-4D97-AF65-F5344CB8AC3E}">
+        <p14:creationId xmlns:p14="http://schemas.microsoft.com/office/powerpoint/2010/main" val="1024086991"/>
+      </p:ext>
+    </p:extLst>
+  </p:cSld>
+  <p:clrMapOvr>
+    <a:masterClrMapping/>
+  </p:clrMapOvr>
+</p:notes>
+</file>
+
+<file path=ppt/notesSlides/notesSlide20.xml><?xml version="1.0" encoding="utf-8"?>
+<p:notes xmlns:a="http://schemas.openxmlformats.org/drawingml/2006/main" xmlns:r="http://schemas.openxmlformats.org/officeDocument/2006/relationships" xmlns:p="http://schemas.openxmlformats.org/presentationml/2006/main">
+  <p:cSld>
+    <p:spTree>
+      <p:nvGrpSpPr>
+        <p:cNvPr id="1" name=""/>
+        <p:cNvGrpSpPr/>
+        <p:nvPr/>
+      </p:nvGrpSpPr>
+      <p:grpSpPr>
+        <a:xfrm>
+          <a:off x="0" y="0"/>
+          <a:ext cx="0" cy="0"/>
+          <a:chOff x="0" y="0"/>
+          <a:chExt cx="0" cy="0"/>
+        </a:xfrm>
+      </p:grpSpPr>
+      <p:sp>
+        <p:nvSpPr>
+          <p:cNvPr id="2" name="Slide Image Placeholder 1"/>
+          <p:cNvSpPr>
+            <a:spLocks noGrp="1" noRot="1" noChangeAspect="1"/>
+          </p:cNvSpPr>
+          <p:nvPr>
+            <p:ph type="sldImg"/>
+          </p:nvPr>
+        </p:nvSpPr>
+        <p:spPr/>
+      </p:sp>
+      <p:sp>
+        <p:nvSpPr>
+          <p:cNvPr id="3" name="Notes Placeholder 2"/>
+          <p:cNvSpPr>
+            <a:spLocks noGrp="1"/>
+          </p:cNvSpPr>
+          <p:nvPr>
+            <p:ph type="body" idx="1"/>
+          </p:nvPr>
+        </p:nvSpPr>
+        <p:spPr/>
+        <p:txBody>
+          <a:bodyPr/>
+          <a:lstStyle/>
+          <a:p>
+            <a:r>
+              <a:rPr lang="en-US" dirty="0"/>
+              <a:t>Backup slide only.
+Use this if someone asks about Tarjan, cycles, graph construction, or why graph analysis is relevant. The concise answer is that microservice anti-patterns are often not visible inside one service; they emerge from the shape of dependencies between services.</a:t>
+            </a:r>
+            <a:endParaRPr lang="en-US" dirty="0"/>
+          </a:p>
+        </p:txBody>
+      </p:sp>
+      <p:sp>
+        <p:nvSpPr>
+          <p:cNvPr id="4" name="Slide Number Placeholder 3"/>
+          <p:cNvSpPr>
+            <a:spLocks noGrp="1"/>
+          </p:cNvSpPr>
+          <p:nvPr>
+            <p:ph type="sldNum" sz="quarter" idx="10"/>
+          </p:nvPr>
+        </p:nvSpPr>
+        <p:spPr/>
+        <p:txBody>
+          <a:bodyPr/>
+          <a:lstStyle/>
+          <a:p>
+            <a:fld id="{F7021451-1387-4CA6-816F-3879F97B5CBC}" type="slidenum">
+              <a:rPr lang="en-US"/>
+              <a:t>20</a:t>
             </a:fld>
             <a:endParaRPr lang="en-US"/>
           </a:p>
@@ -8073,6 +8523,6200 @@
 </p:sld>
 </file>
 
+<file path=ppt/slides/slide16.xml><?xml version="1.0" encoding="utf-8"?>
+<p:sld xmlns:a="http://schemas.openxmlformats.org/drawingml/2006/main" xmlns:r="http://schemas.openxmlformats.org/officeDocument/2006/relationships" xmlns:p="http://schemas.openxmlformats.org/presentationml/2006/main">
+  <p:cSld name="Slide 16">
+    <p:bg>
+      <p:bgPr>
+        <a:solidFill>
+          <a:srgbClr val="FFFFFF"/>
+        </a:solidFill>
+      </p:bgPr>
+    </p:bg>
+    <p:spTree>
+      <p:nvGrpSpPr>
+        <p:cNvPr id="1" name=""/>
+        <p:cNvGrpSpPr/>
+        <p:nvPr/>
+      </p:nvGrpSpPr>
+      <p:grpSpPr>
+        <a:xfrm>
+          <a:off x="0" y="0"/>
+          <a:ext cx="0" cy="0"/>
+          <a:chOff x="0" y="0"/>
+          <a:chExt cx="0" cy="0"/>
+        </a:xfrm>
+      </p:grpSpPr>
+      <p:sp>
+        <p:nvSpPr>
+          <p:cNvPr id="2" name="Text 0"/>
+          <p:cNvSpPr/>
+          <p:nvPr/>
+        </p:nvSpPr>
+        <p:spPr>
+          <a:xfrm>
+            <a:off x="548640" y="256032"/>
+            <a:ext cx="8046720" cy="502920"/>
+          </a:xfrm>
+          <a:prstGeom prst="rect">
+            <a:avLst/>
+          </a:prstGeom>
+          <a:noFill/>
+          <a:ln/>
+        </p:spPr>
+        <p:txBody>
+          <a:bodyPr wrap="square" lIns="0" tIns="0" rIns="0" bIns="0" rtlCol="0" anchor="ctr"/>
+          <a:lstStyle/>
+          <a:p>
+            <a:pPr indent="0" marL="0">
+              <a:buNone/>
+            </a:pPr>
+            <a:r>
+              <a:rPr lang="en-US" sz="2500" b="1" dirty="0">
+                <a:solidFill>
+                  <a:srgbClr val="0F2A44"/>
+                </a:solidFill>
+                <a:latin typeface="Calibri" pitchFamily="34" charset="0"/>
+                <a:ea typeface="Calibri" pitchFamily="34" charset="-122"/>
+                <a:cs typeface="Calibri" pitchFamily="34" charset="-120"/>
+              </a:rPr>
+              <a:t>Annex: core definitions</a:t>
+            </a:r>
+            <a:endParaRPr lang="en-US" sz="2500" dirty="0"/>
+          </a:p>
+        </p:txBody>
+      </p:sp>
+      <p:sp>
+        <p:nvSpPr>
+          <p:cNvPr id="3" name="Shape 1"/>
+          <p:cNvSpPr/>
+          <p:nvPr/>
+        </p:nvSpPr>
+        <p:spPr>
+          <a:xfrm>
+            <a:off x="548640" y="841248"/>
+            <a:ext cx="8046720" cy="13716"/>
+          </a:xfrm>
+          <a:prstGeom prst="rect">
+            <a:avLst/>
+          </a:prstGeom>
+          <a:solidFill>
+            <a:srgbClr val="D8DEE6"/>
+          </a:solidFill>
+          <a:ln w="12700">
+            <a:solidFill>
+              <a:srgbClr val="D8DEE6"/>
+            </a:solidFill>
+            <a:prstDash val="solid"/>
+          </a:ln>
+        </p:spPr>
+      </p:sp>
+      <p:sp>
+        <p:nvSpPr>
+          <p:cNvPr id="4" name="Shape 2"/>
+          <p:cNvSpPr/>
+          <p:nvPr/>
+        </p:nvSpPr>
+        <p:spPr>
+          <a:xfrm>
+            <a:off x="548640" y="1024128"/>
+            <a:ext cx="411480" cy="36576"/>
+          </a:xfrm>
+          <a:prstGeom prst="rect">
+            <a:avLst/>
+          </a:prstGeom>
+          <a:solidFill>
+            <a:srgbClr val="0D9488"/>
+          </a:solidFill>
+          <a:ln w="12700">
+            <a:solidFill>
+              <a:srgbClr val="0D9488"/>
+            </a:solidFill>
+            <a:prstDash val="solid"/>
+          </a:ln>
+        </p:spPr>
+      </p:sp>
+      <p:sp>
+        <p:nvSpPr>
+          <p:cNvPr id="5" name="Text 3"/>
+          <p:cNvSpPr/>
+          <p:nvPr/>
+        </p:nvSpPr>
+        <p:spPr>
+          <a:xfrm>
+            <a:off x="548640" y="1152144"/>
+            <a:ext cx="3703320" cy="256032"/>
+          </a:xfrm>
+          <a:prstGeom prst="rect">
+            <a:avLst/>
+          </a:prstGeom>
+          <a:noFill/>
+          <a:ln/>
+        </p:spPr>
+        <p:txBody>
+          <a:bodyPr wrap="square" lIns="0" tIns="0" rIns="0" bIns="0" rtlCol="0" anchor="ctr"/>
+          <a:lstStyle/>
+          <a:p>
+            <a:pPr indent="0" marL="0">
+              <a:buNone/>
+            </a:pPr>
+            <a:r>
+              <a:rPr lang="en-US" sz="1250" b="1" dirty="0">
+                <a:solidFill>
+                  <a:srgbClr val="0F2A44"/>
+                </a:solidFill>
+                <a:latin typeface="Calibri" pitchFamily="34" charset="0"/>
+                <a:ea typeface="Calibri" pitchFamily="34" charset="-122"/>
+                <a:cs typeface="Calibri" pitchFamily="34" charset="-120"/>
+              </a:rPr>
+              <a:t>Microservice</a:t>
+            </a:r>
+            <a:endParaRPr lang="en-US" sz="1250" dirty="0"/>
+          </a:p>
+        </p:txBody>
+      </p:sp>
+      <p:sp>
+        <p:nvSpPr>
+          <p:cNvPr id="6" name="Text 4"/>
+          <p:cNvSpPr/>
+          <p:nvPr/>
+        </p:nvSpPr>
+        <p:spPr>
+          <a:xfrm>
+            <a:off x="548640" y="1463040"/>
+            <a:ext cx="3703320" cy="502920"/>
+          </a:xfrm>
+          <a:prstGeom prst="rect">
+            <a:avLst/>
+          </a:prstGeom>
+          <a:noFill/>
+          <a:ln/>
+        </p:spPr>
+        <p:txBody>
+          <a:bodyPr wrap="square" lIns="0" tIns="0" rIns="0" bIns="0" rtlCol="0" anchor="ctr"/>
+          <a:lstStyle/>
+          <a:p>
+            <a:pPr indent="0" marL="0">
+              <a:buNone/>
+            </a:pPr>
+            <a:r>
+              <a:rPr lang="en-US" sz="1020" dirty="0">
+                <a:solidFill>
+                  <a:srgbClr val="1E293B"/>
+                </a:solidFill>
+                <a:latin typeface="Calibri" pitchFamily="34" charset="0"/>
+                <a:ea typeface="Calibri" pitchFamily="34" charset="-122"/>
+                <a:cs typeface="Calibri" pitchFamily="34" charset="-120"/>
+              </a:rPr>
+              <a:t>A small, independently deployable service organised around a business capability, communicating with other services through lightweight APIs.</a:t>
+            </a:r>
+            <a:endParaRPr lang="en-US" sz="1020" dirty="0"/>
+          </a:p>
+        </p:txBody>
+      </p:sp>
+      <p:sp>
+        <p:nvSpPr>
+          <p:cNvPr id="7" name="Shape 5"/>
+          <p:cNvSpPr/>
+          <p:nvPr/>
+        </p:nvSpPr>
+        <p:spPr>
+          <a:xfrm>
+            <a:off x="548640" y="2011680"/>
+            <a:ext cx="3703320" cy="9144"/>
+          </a:xfrm>
+          <a:prstGeom prst="rect">
+            <a:avLst/>
+          </a:prstGeom>
+          <a:solidFill>
+            <a:srgbClr val="D8DEE6"/>
+          </a:solidFill>
+          <a:ln w="12700">
+            <a:solidFill>
+              <a:srgbClr val="D8DEE6"/>
+            </a:solidFill>
+            <a:prstDash val="solid"/>
+          </a:ln>
+        </p:spPr>
+      </p:sp>
+      <p:sp>
+        <p:nvSpPr>
+          <p:cNvPr id="8" name="Shape 6"/>
+          <p:cNvSpPr/>
+          <p:nvPr/>
+        </p:nvSpPr>
+        <p:spPr>
+          <a:xfrm>
+            <a:off x="4617720" y="1024128"/>
+            <a:ext cx="411480" cy="36576"/>
+          </a:xfrm>
+          <a:prstGeom prst="rect">
+            <a:avLst/>
+          </a:prstGeom>
+          <a:solidFill>
+            <a:srgbClr val="1C4E80"/>
+          </a:solidFill>
+          <a:ln w="12700">
+            <a:solidFill>
+              <a:srgbClr val="1C4E80"/>
+            </a:solidFill>
+            <a:prstDash val="solid"/>
+          </a:ln>
+        </p:spPr>
+      </p:sp>
+      <p:sp>
+        <p:nvSpPr>
+          <p:cNvPr id="9" name="Text 7"/>
+          <p:cNvSpPr/>
+          <p:nvPr/>
+        </p:nvSpPr>
+        <p:spPr>
+          <a:xfrm>
+            <a:off x="4617720" y="1152144"/>
+            <a:ext cx="3703320" cy="256032"/>
+          </a:xfrm>
+          <a:prstGeom prst="rect">
+            <a:avLst/>
+          </a:prstGeom>
+          <a:noFill/>
+          <a:ln/>
+        </p:spPr>
+        <p:txBody>
+          <a:bodyPr wrap="square" lIns="0" tIns="0" rIns="0" bIns="0" rtlCol="0" anchor="ctr"/>
+          <a:lstStyle/>
+          <a:p>
+            <a:pPr indent="0" marL="0">
+              <a:buNone/>
+            </a:pPr>
+            <a:r>
+              <a:rPr lang="en-US" sz="1250" b="1" dirty="0">
+                <a:solidFill>
+                  <a:srgbClr val="0F2A44"/>
+                </a:solidFill>
+                <a:latin typeface="Calibri" pitchFamily="34" charset="0"/>
+                <a:ea typeface="Calibri" pitchFamily="34" charset="-122"/>
+                <a:cs typeface="Calibri" pitchFamily="34" charset="-120"/>
+              </a:rPr>
+              <a:t>Architectural anti-pattern</a:t>
+            </a:r>
+            <a:endParaRPr lang="en-US" sz="1250" dirty="0"/>
+          </a:p>
+        </p:txBody>
+      </p:sp>
+      <p:sp>
+        <p:nvSpPr>
+          <p:cNvPr id="10" name="Text 8"/>
+          <p:cNvSpPr/>
+          <p:nvPr/>
+        </p:nvSpPr>
+        <p:spPr>
+          <a:xfrm>
+            <a:off x="4617720" y="1463040"/>
+            <a:ext cx="3703320" cy="502920"/>
+          </a:xfrm>
+          <a:prstGeom prst="rect">
+            <a:avLst/>
+          </a:prstGeom>
+          <a:noFill/>
+          <a:ln/>
+        </p:spPr>
+        <p:txBody>
+          <a:bodyPr wrap="square" lIns="0" tIns="0" rIns="0" bIns="0" rtlCol="0" anchor="ctr"/>
+          <a:lstStyle/>
+          <a:p>
+            <a:pPr indent="0" marL="0">
+              <a:buNone/>
+            </a:pPr>
+            <a:r>
+              <a:rPr lang="en-US" sz="1020" dirty="0">
+                <a:solidFill>
+                  <a:srgbClr val="1E293B"/>
+                </a:solidFill>
+                <a:latin typeface="Calibri" pitchFamily="34" charset="0"/>
+                <a:ea typeface="Calibri" pitchFamily="34" charset="-122"/>
+                <a:cs typeface="Calibri" pitchFamily="34" charset="-120"/>
+              </a:rPr>
+              <a:t>A recurring architectural decision that appears useful locally, but creates long-term coupling, fragility, or operational cost.</a:t>
+            </a:r>
+            <a:endParaRPr lang="en-US" sz="1020" dirty="0"/>
+          </a:p>
+        </p:txBody>
+      </p:sp>
+      <p:sp>
+        <p:nvSpPr>
+          <p:cNvPr id="11" name="Shape 9"/>
+          <p:cNvSpPr/>
+          <p:nvPr/>
+        </p:nvSpPr>
+        <p:spPr>
+          <a:xfrm>
+            <a:off x="4617720" y="2011680"/>
+            <a:ext cx="3703320" cy="9144"/>
+          </a:xfrm>
+          <a:prstGeom prst="rect">
+            <a:avLst/>
+          </a:prstGeom>
+          <a:solidFill>
+            <a:srgbClr val="D8DEE6"/>
+          </a:solidFill>
+          <a:ln w="12700">
+            <a:solidFill>
+              <a:srgbClr val="D8DEE6"/>
+            </a:solidFill>
+            <a:prstDash val="solid"/>
+          </a:ln>
+        </p:spPr>
+      </p:sp>
+      <p:sp>
+        <p:nvSpPr>
+          <p:cNvPr id="12" name="Shape 10"/>
+          <p:cNvSpPr/>
+          <p:nvPr/>
+        </p:nvSpPr>
+        <p:spPr>
+          <a:xfrm>
+            <a:off x="548640" y="2139696"/>
+            <a:ext cx="411480" cy="36576"/>
+          </a:xfrm>
+          <a:prstGeom prst="rect">
+            <a:avLst/>
+          </a:prstGeom>
+          <a:solidFill>
+            <a:srgbClr val="0D9488"/>
+          </a:solidFill>
+          <a:ln w="12700">
+            <a:solidFill>
+              <a:srgbClr val="0D9488"/>
+            </a:solidFill>
+            <a:prstDash val="solid"/>
+          </a:ln>
+        </p:spPr>
+      </p:sp>
+      <p:sp>
+        <p:nvSpPr>
+          <p:cNvPr id="13" name="Text 11"/>
+          <p:cNvSpPr/>
+          <p:nvPr/>
+        </p:nvSpPr>
+        <p:spPr>
+          <a:xfrm>
+            <a:off x="548640" y="2267712"/>
+            <a:ext cx="3703320" cy="256032"/>
+          </a:xfrm>
+          <a:prstGeom prst="rect">
+            <a:avLst/>
+          </a:prstGeom>
+          <a:noFill/>
+          <a:ln/>
+        </p:spPr>
+        <p:txBody>
+          <a:bodyPr wrap="square" lIns="0" tIns="0" rIns="0" bIns="0" rtlCol="0" anchor="ctr"/>
+          <a:lstStyle/>
+          <a:p>
+            <a:pPr indent="0" marL="0">
+              <a:buNone/>
+            </a:pPr>
+            <a:r>
+              <a:rPr lang="en-US" sz="1250" b="1" dirty="0">
+                <a:solidFill>
+                  <a:srgbClr val="0F2A44"/>
+                </a:solidFill>
+                <a:latin typeface="Calibri" pitchFamily="34" charset="0"/>
+                <a:ea typeface="Calibri" pitchFamily="34" charset="-122"/>
+                <a:cs typeface="Calibri" pitchFamily="34" charset="-120"/>
+              </a:rPr>
+              <a:t>Service boundary</a:t>
+            </a:r>
+            <a:endParaRPr lang="en-US" sz="1250" dirty="0"/>
+          </a:p>
+        </p:txBody>
+      </p:sp>
+      <p:sp>
+        <p:nvSpPr>
+          <p:cNvPr id="14" name="Text 12"/>
+          <p:cNvSpPr/>
+          <p:nvPr/>
+        </p:nvSpPr>
+        <p:spPr>
+          <a:xfrm>
+            <a:off x="548640" y="2578608"/>
+            <a:ext cx="3703320" cy="502920"/>
+          </a:xfrm>
+          <a:prstGeom prst="rect">
+            <a:avLst/>
+          </a:prstGeom>
+          <a:noFill/>
+          <a:ln/>
+        </p:spPr>
+        <p:txBody>
+          <a:bodyPr wrap="square" lIns="0" tIns="0" rIns="0" bIns="0" rtlCol="0" anchor="ctr"/>
+          <a:lstStyle/>
+          <a:p>
+            <a:pPr indent="0" marL="0">
+              <a:buNone/>
+            </a:pPr>
+            <a:r>
+              <a:rPr lang="en-US" sz="1020" dirty="0">
+                <a:solidFill>
+                  <a:srgbClr val="1E293B"/>
+                </a:solidFill>
+                <a:latin typeface="Calibri" pitchFamily="34" charset="0"/>
+                <a:ea typeface="Calibri" pitchFamily="34" charset="-122"/>
+                <a:cs typeface="Calibri" pitchFamily="34" charset="-120"/>
+              </a:rPr>
+              <a:t>The deployable unit recovered from a repository: build module plus framework entry point, Dockerfile, or main method signal.</a:t>
+            </a:r>
+            <a:endParaRPr lang="en-US" sz="1020" dirty="0"/>
+          </a:p>
+        </p:txBody>
+      </p:sp>
+      <p:sp>
+        <p:nvSpPr>
+          <p:cNvPr id="15" name="Shape 13"/>
+          <p:cNvSpPr/>
+          <p:nvPr/>
+        </p:nvSpPr>
+        <p:spPr>
+          <a:xfrm>
+            <a:off x="548640" y="3127248"/>
+            <a:ext cx="3703320" cy="9144"/>
+          </a:xfrm>
+          <a:prstGeom prst="rect">
+            <a:avLst/>
+          </a:prstGeom>
+          <a:solidFill>
+            <a:srgbClr val="D8DEE6"/>
+          </a:solidFill>
+          <a:ln w="12700">
+            <a:solidFill>
+              <a:srgbClr val="D8DEE6"/>
+            </a:solidFill>
+            <a:prstDash val="solid"/>
+          </a:ln>
+        </p:spPr>
+      </p:sp>
+      <p:sp>
+        <p:nvSpPr>
+          <p:cNvPr id="16" name="Shape 14"/>
+          <p:cNvSpPr/>
+          <p:nvPr/>
+        </p:nvSpPr>
+        <p:spPr>
+          <a:xfrm>
+            <a:off x="4617720" y="2139696"/>
+            <a:ext cx="411480" cy="36576"/>
+          </a:xfrm>
+          <a:prstGeom prst="rect">
+            <a:avLst/>
+          </a:prstGeom>
+          <a:solidFill>
+            <a:srgbClr val="1C4E80"/>
+          </a:solidFill>
+          <a:ln w="12700">
+            <a:solidFill>
+              <a:srgbClr val="1C4E80"/>
+            </a:solidFill>
+            <a:prstDash val="solid"/>
+          </a:ln>
+        </p:spPr>
+      </p:sp>
+      <p:sp>
+        <p:nvSpPr>
+          <p:cNvPr id="17" name="Text 15"/>
+          <p:cNvSpPr/>
+          <p:nvPr/>
+        </p:nvSpPr>
+        <p:spPr>
+          <a:xfrm>
+            <a:off x="4617720" y="2267712"/>
+            <a:ext cx="3703320" cy="256032"/>
+          </a:xfrm>
+          <a:prstGeom prst="rect">
+            <a:avLst/>
+          </a:prstGeom>
+          <a:noFill/>
+          <a:ln/>
+        </p:spPr>
+        <p:txBody>
+          <a:bodyPr wrap="square" lIns="0" tIns="0" rIns="0" bIns="0" rtlCol="0" anchor="ctr"/>
+          <a:lstStyle/>
+          <a:p>
+            <a:pPr indent="0" marL="0">
+              <a:buNone/>
+            </a:pPr>
+            <a:r>
+              <a:rPr lang="en-US" sz="1250" b="1" dirty="0">
+                <a:solidFill>
+                  <a:srgbClr val="0F2A44"/>
+                </a:solidFill>
+                <a:latin typeface="Calibri" pitchFamily="34" charset="0"/>
+                <a:ea typeface="Calibri" pitchFamily="34" charset="-122"/>
+                <a:cs typeface="Calibri" pitchFamily="34" charset="-120"/>
+              </a:rPr>
+              <a:t>Evidence-based finding</a:t>
+            </a:r>
+            <a:endParaRPr lang="en-US" sz="1250" dirty="0"/>
+          </a:p>
+        </p:txBody>
+      </p:sp>
+      <p:sp>
+        <p:nvSpPr>
+          <p:cNvPr id="18" name="Text 16"/>
+          <p:cNvSpPr/>
+          <p:nvPr/>
+        </p:nvSpPr>
+        <p:spPr>
+          <a:xfrm>
+            <a:off x="4617720" y="2578608"/>
+            <a:ext cx="3703320" cy="502920"/>
+          </a:xfrm>
+          <a:prstGeom prst="rect">
+            <a:avLst/>
+          </a:prstGeom>
+          <a:noFill/>
+          <a:ln/>
+        </p:spPr>
+        <p:txBody>
+          <a:bodyPr wrap="square" lIns="0" tIns="0" rIns="0" bIns="0" rtlCol="0" anchor="ctr"/>
+          <a:lstStyle/>
+          <a:p>
+            <a:pPr indent="0" marL="0">
+              <a:buNone/>
+            </a:pPr>
+            <a:r>
+              <a:rPr lang="en-US" sz="1020" dirty="0">
+                <a:solidFill>
+                  <a:srgbClr val="1E293B"/>
+                </a:solidFill>
+                <a:latin typeface="Calibri" pitchFamily="34" charset="0"/>
+                <a:ea typeface="Calibri" pitchFamily="34" charset="-122"/>
+                <a:cs typeface="Calibri" pitchFamily="34" charset="-120"/>
+              </a:rPr>
+              <a:t>A detected issue linked to affected services, source snippets, graph evidence, severity, and remediation guidance.</a:t>
+            </a:r>
+            <a:endParaRPr lang="en-US" sz="1020" dirty="0"/>
+          </a:p>
+        </p:txBody>
+      </p:sp>
+      <p:sp>
+        <p:nvSpPr>
+          <p:cNvPr id="19" name="Shape 17"/>
+          <p:cNvSpPr/>
+          <p:nvPr/>
+        </p:nvSpPr>
+        <p:spPr>
+          <a:xfrm>
+            <a:off x="4617720" y="3127248"/>
+            <a:ext cx="3703320" cy="9144"/>
+          </a:xfrm>
+          <a:prstGeom prst="rect">
+            <a:avLst/>
+          </a:prstGeom>
+          <a:solidFill>
+            <a:srgbClr val="D8DEE6"/>
+          </a:solidFill>
+          <a:ln w="12700">
+            <a:solidFill>
+              <a:srgbClr val="D8DEE6"/>
+            </a:solidFill>
+            <a:prstDash val="solid"/>
+          </a:ln>
+        </p:spPr>
+      </p:sp>
+      <p:sp>
+        <p:nvSpPr>
+          <p:cNvPr id="20" name="Shape 18"/>
+          <p:cNvSpPr/>
+          <p:nvPr/>
+        </p:nvSpPr>
+        <p:spPr>
+          <a:xfrm>
+            <a:off x="548640" y="3255264"/>
+            <a:ext cx="411480" cy="36576"/>
+          </a:xfrm>
+          <a:prstGeom prst="rect">
+            <a:avLst/>
+          </a:prstGeom>
+          <a:solidFill>
+            <a:srgbClr val="0D9488"/>
+          </a:solidFill>
+          <a:ln w="12700">
+            <a:solidFill>
+              <a:srgbClr val="0D9488"/>
+            </a:solidFill>
+            <a:prstDash val="solid"/>
+          </a:ln>
+        </p:spPr>
+      </p:sp>
+      <p:sp>
+        <p:nvSpPr>
+          <p:cNvPr id="21" name="Text 19"/>
+          <p:cNvSpPr/>
+          <p:nvPr/>
+        </p:nvSpPr>
+        <p:spPr>
+          <a:xfrm>
+            <a:off x="548640" y="3383280"/>
+            <a:ext cx="3703320" cy="256032"/>
+          </a:xfrm>
+          <a:prstGeom prst="rect">
+            <a:avLst/>
+          </a:prstGeom>
+          <a:noFill/>
+          <a:ln/>
+        </p:spPr>
+        <p:txBody>
+          <a:bodyPr wrap="square" lIns="0" tIns="0" rIns="0" bIns="0" rtlCol="0" anchor="ctr"/>
+          <a:lstStyle/>
+          <a:p>
+            <a:pPr indent="0" marL="0">
+              <a:buNone/>
+            </a:pPr>
+            <a:r>
+              <a:rPr lang="en-US" sz="1250" b="1" dirty="0">
+                <a:solidFill>
+                  <a:srgbClr val="0F2A44"/>
+                </a:solidFill>
+                <a:latin typeface="Calibri" pitchFamily="34" charset="0"/>
+                <a:ea typeface="Calibri" pitchFamily="34" charset="-122"/>
+                <a:cs typeface="Calibri" pitchFamily="34" charset="-120"/>
+              </a:rPr>
+              <a:t>Multi-level analysis</a:t>
+            </a:r>
+            <a:endParaRPr lang="en-US" sz="1250" dirty="0"/>
+          </a:p>
+        </p:txBody>
+      </p:sp>
+      <p:sp>
+        <p:nvSpPr>
+          <p:cNvPr id="22" name="Text 20"/>
+          <p:cNvSpPr/>
+          <p:nvPr/>
+        </p:nvSpPr>
+        <p:spPr>
+          <a:xfrm>
+            <a:off x="548640" y="3694176"/>
+            <a:ext cx="3703320" cy="502920"/>
+          </a:xfrm>
+          <a:prstGeom prst="rect">
+            <a:avLst/>
+          </a:prstGeom>
+          <a:noFill/>
+          <a:ln/>
+        </p:spPr>
+        <p:txBody>
+          <a:bodyPr wrap="square" lIns="0" tIns="0" rIns="0" bIns="0" rtlCol="0" anchor="ctr"/>
+          <a:lstStyle/>
+          <a:p>
+            <a:pPr indent="0" marL="0">
+              <a:buNone/>
+            </a:pPr>
+            <a:r>
+              <a:rPr lang="en-US" sz="1020" dirty="0">
+                <a:solidFill>
+                  <a:srgbClr val="1E293B"/>
+                </a:solidFill>
+                <a:latin typeface="Calibri" pitchFamily="34" charset="0"/>
+                <a:ea typeface="Calibri" pitchFamily="34" charset="-122"/>
+                <a:cs typeface="Calibri" pitchFamily="34" charset="-120"/>
+              </a:rPr>
+              <a:t>Combining intra-service code metrics and smells with inter-service dependency graph analysis.</a:t>
+            </a:r>
+            <a:endParaRPr lang="en-US" sz="1020" dirty="0"/>
+          </a:p>
+        </p:txBody>
+      </p:sp>
+      <p:sp>
+        <p:nvSpPr>
+          <p:cNvPr id="23" name="Shape 21"/>
+          <p:cNvSpPr/>
+          <p:nvPr/>
+        </p:nvSpPr>
+        <p:spPr>
+          <a:xfrm>
+            <a:off x="548640" y="4242816"/>
+            <a:ext cx="3703320" cy="9144"/>
+          </a:xfrm>
+          <a:prstGeom prst="rect">
+            <a:avLst/>
+          </a:prstGeom>
+          <a:solidFill>
+            <a:srgbClr val="D8DEE6"/>
+          </a:solidFill>
+          <a:ln w="12700">
+            <a:solidFill>
+              <a:srgbClr val="D8DEE6"/>
+            </a:solidFill>
+            <a:prstDash val="solid"/>
+          </a:ln>
+        </p:spPr>
+      </p:sp>
+      <p:sp>
+        <p:nvSpPr>
+          <p:cNvPr id="24" name="Shape 22"/>
+          <p:cNvSpPr/>
+          <p:nvPr/>
+        </p:nvSpPr>
+        <p:spPr>
+          <a:xfrm>
+            <a:off x="4617720" y="3255264"/>
+            <a:ext cx="411480" cy="36576"/>
+          </a:xfrm>
+          <a:prstGeom prst="rect">
+            <a:avLst/>
+          </a:prstGeom>
+          <a:solidFill>
+            <a:srgbClr val="1C4E80"/>
+          </a:solidFill>
+          <a:ln w="12700">
+            <a:solidFill>
+              <a:srgbClr val="1C4E80"/>
+            </a:solidFill>
+            <a:prstDash val="solid"/>
+          </a:ln>
+        </p:spPr>
+      </p:sp>
+      <p:sp>
+        <p:nvSpPr>
+          <p:cNvPr id="25" name="Text 23"/>
+          <p:cNvSpPr/>
+          <p:nvPr/>
+        </p:nvSpPr>
+        <p:spPr>
+          <a:xfrm>
+            <a:off x="4617720" y="3383280"/>
+            <a:ext cx="3703320" cy="256032"/>
+          </a:xfrm>
+          <a:prstGeom prst="rect">
+            <a:avLst/>
+          </a:prstGeom>
+          <a:noFill/>
+          <a:ln/>
+        </p:spPr>
+        <p:txBody>
+          <a:bodyPr wrap="square" lIns="0" tIns="0" rIns="0" bIns="0" rtlCol="0" anchor="ctr"/>
+          <a:lstStyle/>
+          <a:p>
+            <a:pPr indent="0" marL="0">
+              <a:buNone/>
+            </a:pPr>
+            <a:r>
+              <a:rPr lang="en-US" sz="1250" b="1" dirty="0">
+                <a:solidFill>
+                  <a:srgbClr val="0F2A44"/>
+                </a:solidFill>
+                <a:latin typeface="Calibri" pitchFamily="34" charset="0"/>
+                <a:ea typeface="Calibri" pitchFamily="34" charset="-122"/>
+                <a:cs typeface="Calibri" pitchFamily="34" charset="-120"/>
+              </a:rPr>
+              <a:t>Health score</a:t>
+            </a:r>
+            <a:endParaRPr lang="en-US" sz="1250" dirty="0"/>
+          </a:p>
+        </p:txBody>
+      </p:sp>
+      <p:sp>
+        <p:nvSpPr>
+          <p:cNvPr id="26" name="Text 24"/>
+          <p:cNvSpPr/>
+          <p:nvPr/>
+        </p:nvSpPr>
+        <p:spPr>
+          <a:xfrm>
+            <a:off x="4617720" y="3694176"/>
+            <a:ext cx="3703320" cy="502920"/>
+          </a:xfrm>
+          <a:prstGeom prst="rect">
+            <a:avLst/>
+          </a:prstGeom>
+          <a:noFill/>
+          <a:ln/>
+        </p:spPr>
+        <p:txBody>
+          <a:bodyPr wrap="square" lIns="0" tIns="0" rIns="0" bIns="0" rtlCol="0" anchor="ctr"/>
+          <a:lstStyle/>
+          <a:p>
+            <a:pPr indent="0" marL="0">
+              <a:buNone/>
+            </a:pPr>
+            <a:r>
+              <a:rPr lang="en-US" sz="1020" dirty="0">
+                <a:solidFill>
+                  <a:srgbClr val="1E293B"/>
+                </a:solidFill>
+                <a:latin typeface="Calibri" pitchFamily="34" charset="0"/>
+                <a:ea typeface="Calibri" pitchFamily="34" charset="-122"/>
+                <a:cs typeface="Calibri" pitchFamily="34" charset="-120"/>
+              </a:rPr>
+              <a:t>A 0-100 composite quality indicator decomposed into Anti-Patterns, Code Quality, Architecture, and Service Sizing.</a:t>
+            </a:r>
+            <a:endParaRPr lang="en-US" sz="1020" dirty="0"/>
+          </a:p>
+        </p:txBody>
+      </p:sp>
+      <p:sp>
+        <p:nvSpPr>
+          <p:cNvPr id="27" name="Shape 25"/>
+          <p:cNvSpPr/>
+          <p:nvPr/>
+        </p:nvSpPr>
+        <p:spPr>
+          <a:xfrm>
+            <a:off x="4617720" y="4242816"/>
+            <a:ext cx="3703320" cy="9144"/>
+          </a:xfrm>
+          <a:prstGeom prst="rect">
+            <a:avLst/>
+          </a:prstGeom>
+          <a:solidFill>
+            <a:srgbClr val="D8DEE6"/>
+          </a:solidFill>
+          <a:ln w="12700">
+            <a:solidFill>
+              <a:srgbClr val="D8DEE6"/>
+            </a:solidFill>
+            <a:prstDash val="solid"/>
+          </a:ln>
+        </p:spPr>
+      </p:sp>
+      <p:sp>
+        <p:nvSpPr>
+          <p:cNvPr id="28" name="Shape 26"/>
+          <p:cNvSpPr/>
+          <p:nvPr/>
+        </p:nvSpPr>
+        <p:spPr>
+          <a:xfrm>
+            <a:off x="548640" y="4498848"/>
+            <a:ext cx="457200" cy="36576"/>
+          </a:xfrm>
+          <a:prstGeom prst="rect">
+            <a:avLst/>
+          </a:prstGeom>
+          <a:solidFill>
+            <a:srgbClr val="0D9488"/>
+          </a:solidFill>
+          <a:ln w="12700">
+            <a:solidFill>
+              <a:srgbClr val="0D9488"/>
+            </a:solidFill>
+            <a:prstDash val="solid"/>
+          </a:ln>
+        </p:spPr>
+      </p:sp>
+      <p:sp>
+        <p:nvSpPr>
+          <p:cNvPr id="29" name="Text 27"/>
+          <p:cNvSpPr/>
+          <p:nvPr/>
+        </p:nvSpPr>
+        <p:spPr>
+          <a:xfrm>
+            <a:off x="548640" y="4590288"/>
+            <a:ext cx="8046720" cy="237744"/>
+          </a:xfrm>
+          <a:prstGeom prst="rect">
+            <a:avLst/>
+          </a:prstGeom>
+          <a:noFill/>
+          <a:ln/>
+        </p:spPr>
+        <p:txBody>
+          <a:bodyPr wrap="square" lIns="0" tIns="0" rIns="0" bIns="0" rtlCol="0" anchor="ctr"/>
+          <a:lstStyle/>
+          <a:p>
+            <a:pPr indent="0" marL="0">
+              <a:buNone/>
+            </a:pPr>
+            <a:r>
+              <a:rPr lang="en-US" sz="950" i="1" dirty="0">
+                <a:solidFill>
+                  <a:srgbClr val="64748B"/>
+                </a:solidFill>
+                <a:latin typeface="Calibri" pitchFamily="34" charset="0"/>
+                <a:ea typeface="Calibri" pitchFamily="34" charset="-122"/>
+                <a:cs typeface="Calibri" pitchFamily="34" charset="-120"/>
+              </a:rPr>
+              <a:t>Use this slide only if the committee asks for terminology or scope clarification.</a:t>
+            </a:r>
+            <a:endParaRPr lang="en-US" sz="950" dirty="0"/>
+          </a:p>
+        </p:txBody>
+      </p:sp>
+      <p:sp>
+        <p:nvSpPr>
+          <p:cNvPr id="30" name="Text 28"/>
+          <p:cNvSpPr/>
+          <p:nvPr/>
+        </p:nvSpPr>
+        <p:spPr>
+          <a:xfrm>
+            <a:off x="7452360" y="4864608"/>
+            <a:ext cx="1143000" cy="228600"/>
+          </a:xfrm>
+          <a:prstGeom prst="rect">
+            <a:avLst/>
+          </a:prstGeom>
+          <a:noFill/>
+          <a:ln/>
+        </p:spPr>
+        <p:txBody>
+          <a:bodyPr wrap="square" lIns="0" tIns="0" rIns="0" bIns="0" rtlCol="0" anchor="ctr"/>
+          <a:lstStyle/>
+          <a:p>
+            <a:pPr algn="r" indent="0" marL="0">
+              <a:buNone/>
+            </a:pPr>
+            <a:r>
+              <a:rPr lang="en-US" sz="900" dirty="0">
+                <a:solidFill>
+                  <a:srgbClr val="64748B"/>
+                </a:solidFill>
+                <a:latin typeface="Calibri" pitchFamily="34" charset="0"/>
+                <a:ea typeface="Calibri" pitchFamily="34" charset="-122"/>
+                <a:cs typeface="Calibri" pitchFamily="34" charset="-120"/>
+              </a:rPr>
+              <a:t>Appendix A</a:t>
+            </a:r>
+            <a:endParaRPr lang="en-US" sz="900" dirty="0"/>
+          </a:p>
+        </p:txBody>
+      </p:sp>
+    </p:spTree>
+  </p:cSld>
+  <p:clrMapOvr>
+    <a:masterClrMapping/>
+  </p:clrMapOvr>
+</p:sld>
+</file>
+
+<file path=ppt/slides/slide17.xml><?xml version="1.0" encoding="utf-8"?>
+<p:sld xmlns:a="http://schemas.openxmlformats.org/drawingml/2006/main" xmlns:r="http://schemas.openxmlformats.org/officeDocument/2006/relationships" xmlns:p="http://schemas.openxmlformats.org/presentationml/2006/main">
+  <p:cSld name="Slide 17">
+    <p:bg>
+      <p:bgPr>
+        <a:solidFill>
+          <a:srgbClr val="FFFFFF"/>
+        </a:solidFill>
+      </p:bgPr>
+    </p:bg>
+    <p:spTree>
+      <p:nvGrpSpPr>
+        <p:cNvPr id="1" name=""/>
+        <p:cNvGrpSpPr/>
+        <p:nvPr/>
+      </p:nvGrpSpPr>
+      <p:grpSpPr>
+        <a:xfrm>
+          <a:off x="0" y="0"/>
+          <a:ext cx="0" cy="0"/>
+          <a:chOff x="0" y="0"/>
+          <a:chExt cx="0" cy="0"/>
+        </a:xfrm>
+      </p:grpSpPr>
+      <p:sp>
+        <p:nvSpPr>
+          <p:cNvPr id="2" name="Text 0"/>
+          <p:cNvSpPr/>
+          <p:nvPr/>
+        </p:nvSpPr>
+        <p:spPr>
+          <a:xfrm>
+            <a:off x="548640" y="256032"/>
+            <a:ext cx="8046720" cy="502920"/>
+          </a:xfrm>
+          <a:prstGeom prst="rect">
+            <a:avLst/>
+          </a:prstGeom>
+          <a:noFill/>
+          <a:ln/>
+        </p:spPr>
+        <p:txBody>
+          <a:bodyPr wrap="square" lIns="0" tIns="0" rIns="0" bIns="0" rtlCol="0" anchor="ctr"/>
+          <a:lstStyle/>
+          <a:p>
+            <a:pPr indent="0" marL="0">
+              <a:buNone/>
+            </a:pPr>
+            <a:r>
+              <a:rPr lang="en-US" sz="2500" b="1" dirty="0">
+                <a:solidFill>
+                  <a:srgbClr val="0F2A44"/>
+                </a:solidFill>
+                <a:latin typeface="Calibri" pitchFamily="34" charset="0"/>
+                <a:ea typeface="Calibri" pitchFamily="34" charset="-122"/>
+                <a:cs typeface="Calibri" pitchFamily="34" charset="-120"/>
+              </a:rPr>
+              <a:t>Annex: formulas &amp; metrics</a:t>
+            </a:r>
+            <a:endParaRPr lang="en-US" sz="2500" dirty="0"/>
+          </a:p>
+        </p:txBody>
+      </p:sp>
+      <p:sp>
+        <p:nvSpPr>
+          <p:cNvPr id="3" name="Shape 1"/>
+          <p:cNvSpPr/>
+          <p:nvPr/>
+        </p:nvSpPr>
+        <p:spPr>
+          <a:xfrm>
+            <a:off x="548640" y="841248"/>
+            <a:ext cx="8046720" cy="13716"/>
+          </a:xfrm>
+          <a:prstGeom prst="rect">
+            <a:avLst/>
+          </a:prstGeom>
+          <a:solidFill>
+            <a:srgbClr val="D8DEE6"/>
+          </a:solidFill>
+          <a:ln w="12700">
+            <a:solidFill>
+              <a:srgbClr val="D8DEE6"/>
+            </a:solidFill>
+            <a:prstDash val="solid"/>
+          </a:ln>
+        </p:spPr>
+      </p:sp>
+      <p:sp>
+        <p:nvSpPr>
+          <p:cNvPr id="4" name="Text 2"/>
+          <p:cNvSpPr/>
+          <p:nvPr/>
+        </p:nvSpPr>
+        <p:spPr>
+          <a:xfrm>
+            <a:off x="548640" y="1024128"/>
+            <a:ext cx="2423160" cy="256032"/>
+          </a:xfrm>
+          <a:prstGeom prst="rect">
+            <a:avLst/>
+          </a:prstGeom>
+          <a:noFill/>
+          <a:ln/>
+        </p:spPr>
+        <p:txBody>
+          <a:bodyPr wrap="square" lIns="0" tIns="0" rIns="0" bIns="0" rtlCol="0" anchor="ctr"/>
+          <a:lstStyle/>
+          <a:p>
+            <a:pPr indent="0" marL="0">
+              <a:buNone/>
+            </a:pPr>
+            <a:r>
+              <a:rPr lang="en-US" sz="1120" b="1" dirty="0">
+                <a:solidFill>
+                  <a:srgbClr val="0F2A44"/>
+                </a:solidFill>
+                <a:latin typeface="Calibri" pitchFamily="34" charset="0"/>
+                <a:ea typeface="Calibri" pitchFamily="34" charset="-122"/>
+                <a:cs typeface="Calibri" pitchFamily="34" charset="-120"/>
+              </a:rPr>
+              <a:t>Tight Class Cohesion</a:t>
+            </a:r>
+            <a:endParaRPr lang="en-US" sz="1120" dirty="0"/>
+          </a:p>
+        </p:txBody>
+      </p:sp>
+      <p:sp>
+        <p:nvSpPr>
+          <p:cNvPr id="5" name="Text 3"/>
+          <p:cNvSpPr/>
+          <p:nvPr/>
+        </p:nvSpPr>
+        <p:spPr>
+          <a:xfrm>
+            <a:off x="3063240" y="1024128"/>
+            <a:ext cx="2468880" cy="256032"/>
+          </a:xfrm>
+          <a:prstGeom prst="rect">
+            <a:avLst/>
+          </a:prstGeom>
+          <a:noFill/>
+          <a:ln/>
+        </p:spPr>
+        <p:txBody>
+          <a:bodyPr wrap="square" lIns="0" tIns="0" rIns="0" bIns="0" rtlCol="0" anchor="ctr">
+            <a:normAutofit/>
+          </a:bodyPr>
+          <a:lstStyle/>
+          <a:p>
+            <a:pPr indent="0" marL="0">
+              <a:buNone/>
+            </a:pPr>
+            <a:r>
+              <a:rPr lang="en-US" sz="1080" b="1" dirty="0">
+                <a:solidFill>
+                  <a:srgbClr val="0D9488"/>
+                </a:solidFill>
+                <a:latin typeface="Calibri" pitchFamily="34" charset="0"/>
+                <a:ea typeface="Calibri" pitchFamily="34" charset="-122"/>
+                <a:cs typeface="Calibri" pitchFamily="34" charset="-120"/>
+              </a:rPr>
+              <a:t>TCC = NDC / NP</a:t>
+            </a:r>
+            <a:endParaRPr lang="en-US" sz="1080" dirty="0"/>
+          </a:p>
+        </p:txBody>
+      </p:sp>
+      <p:sp>
+        <p:nvSpPr>
+          <p:cNvPr id="6" name="Text 4"/>
+          <p:cNvSpPr/>
+          <p:nvPr/>
+        </p:nvSpPr>
+        <p:spPr>
+          <a:xfrm>
+            <a:off x="5715000" y="1005840"/>
+            <a:ext cx="2880360" cy="384048"/>
+          </a:xfrm>
+          <a:prstGeom prst="rect">
+            <a:avLst/>
+          </a:prstGeom>
+          <a:noFill/>
+          <a:ln/>
+        </p:spPr>
+        <p:txBody>
+          <a:bodyPr wrap="square" lIns="0" tIns="0" rIns="0" bIns="0" rtlCol="0" anchor="ctr">
+            <a:normAutofit/>
+          </a:bodyPr>
+          <a:lstStyle/>
+          <a:p>
+            <a:pPr indent="0" marL="0">
+              <a:buNone/>
+            </a:pPr>
+            <a:r>
+              <a:rPr lang="en-US" sz="880" dirty="0">
+                <a:solidFill>
+                  <a:srgbClr val="1E293B"/>
+                </a:solidFill>
+                <a:latin typeface="Calibri" pitchFamily="34" charset="0"/>
+                <a:ea typeface="Calibri" pitchFamily="34" charset="-122"/>
+                <a:cs typeface="Calibri" pitchFamily="34" charset="-120"/>
+              </a:rPr>
+              <a:t>NDC = directly connected method pairs; NP = all possible method pairs. Low TCC means methods operate on disjoint state.</a:t>
+            </a:r>
+            <a:endParaRPr lang="en-US" sz="880" dirty="0"/>
+          </a:p>
+        </p:txBody>
+      </p:sp>
+      <p:sp>
+        <p:nvSpPr>
+          <p:cNvPr id="7" name="Shape 5"/>
+          <p:cNvSpPr/>
+          <p:nvPr/>
+        </p:nvSpPr>
+        <p:spPr>
+          <a:xfrm>
+            <a:off x="548640" y="1499616"/>
+            <a:ext cx="8046720" cy="9144"/>
+          </a:xfrm>
+          <a:prstGeom prst="rect">
+            <a:avLst/>
+          </a:prstGeom>
+          <a:solidFill>
+            <a:srgbClr val="D8DEE6"/>
+          </a:solidFill>
+          <a:ln w="12700">
+            <a:solidFill>
+              <a:srgbClr val="D8DEE6"/>
+            </a:solidFill>
+            <a:prstDash val="solid"/>
+          </a:ln>
+        </p:spPr>
+      </p:sp>
+      <p:sp>
+        <p:nvSpPr>
+          <p:cNvPr id="8" name="Text 6"/>
+          <p:cNvSpPr/>
+          <p:nvPr/>
+        </p:nvSpPr>
+        <p:spPr>
+          <a:xfrm>
+            <a:off x="548640" y="1709928"/>
+            <a:ext cx="2423160" cy="256032"/>
+          </a:xfrm>
+          <a:prstGeom prst="rect">
+            <a:avLst/>
+          </a:prstGeom>
+          <a:noFill/>
+          <a:ln/>
+        </p:spPr>
+        <p:txBody>
+          <a:bodyPr wrap="square" lIns="0" tIns="0" rIns="0" bIns="0" rtlCol="0" anchor="ctr"/>
+          <a:lstStyle/>
+          <a:p>
+            <a:pPr indent="0" marL="0">
+              <a:buNone/>
+            </a:pPr>
+            <a:r>
+              <a:rPr lang="en-US" sz="1120" b="1" dirty="0">
+                <a:solidFill>
+                  <a:srgbClr val="0F2A44"/>
+                </a:solidFill>
+                <a:latin typeface="Calibri" pitchFamily="34" charset="0"/>
+                <a:ea typeface="Calibri" pitchFamily="34" charset="-122"/>
+                <a:cs typeface="Calibri" pitchFamily="34" charset="-120"/>
+              </a:rPr>
+              <a:t>Code smell density</a:t>
+            </a:r>
+            <a:endParaRPr lang="en-US" sz="1120" dirty="0"/>
+          </a:p>
+        </p:txBody>
+      </p:sp>
+      <p:sp>
+        <p:nvSpPr>
+          <p:cNvPr id="9" name="Text 7"/>
+          <p:cNvSpPr/>
+          <p:nvPr/>
+        </p:nvSpPr>
+        <p:spPr>
+          <a:xfrm>
+            <a:off x="3063240" y="1709928"/>
+            <a:ext cx="2468880" cy="256032"/>
+          </a:xfrm>
+          <a:prstGeom prst="rect">
+            <a:avLst/>
+          </a:prstGeom>
+          <a:noFill/>
+          <a:ln/>
+        </p:spPr>
+        <p:txBody>
+          <a:bodyPr wrap="square" lIns="0" tIns="0" rIns="0" bIns="0" rtlCol="0" anchor="ctr">
+            <a:normAutofit/>
+          </a:bodyPr>
+          <a:lstStyle/>
+          <a:p>
+            <a:pPr indent="0" marL="0">
+              <a:buNone/>
+            </a:pPr>
+            <a:r>
+              <a:rPr lang="en-US" sz="1080" b="1" dirty="0">
+                <a:solidFill>
+                  <a:srgbClr val="0D9488"/>
+                </a:solidFill>
+                <a:latin typeface="Calibri" pitchFamily="34" charset="0"/>
+                <a:ea typeface="Calibri" pitchFamily="34" charset="-122"/>
+                <a:cs typeface="Calibri" pitchFamily="34" charset="-120"/>
+              </a:rPr>
+              <a:t>smellDensity = smellCount / (LOC / 1000)</a:t>
+            </a:r>
+            <a:endParaRPr lang="en-US" sz="1080" dirty="0"/>
+          </a:p>
+        </p:txBody>
+      </p:sp>
+      <p:sp>
+        <p:nvSpPr>
+          <p:cNvPr id="10" name="Text 8"/>
+          <p:cNvSpPr/>
+          <p:nvPr/>
+        </p:nvSpPr>
+        <p:spPr>
+          <a:xfrm>
+            <a:off x="5715000" y="1691640"/>
+            <a:ext cx="2880360" cy="384048"/>
+          </a:xfrm>
+          <a:prstGeom prst="rect">
+            <a:avLst/>
+          </a:prstGeom>
+          <a:noFill/>
+          <a:ln/>
+        </p:spPr>
+        <p:txBody>
+          <a:bodyPr wrap="square" lIns="0" tIns="0" rIns="0" bIns="0" rtlCol="0" anchor="ctr">
+            <a:normAutofit/>
+          </a:bodyPr>
+          <a:lstStyle/>
+          <a:p>
+            <a:pPr indent="0" marL="0">
+              <a:buNone/>
+            </a:pPr>
+            <a:r>
+              <a:rPr lang="en-US" sz="880" dirty="0">
+                <a:solidFill>
+                  <a:srgbClr val="1E293B"/>
+                </a:solidFill>
+                <a:latin typeface="Calibri" pitchFamily="34" charset="0"/>
+                <a:ea typeface="Calibri" pitchFamily="34" charset="-122"/>
+                <a:cs typeface="Calibri" pitchFamily="34" charset="-120"/>
+              </a:rPr>
+              <a:t>Normalises DesigniteJava smell count by service size, so larger codebases are not punished only for being larger.</a:t>
+            </a:r>
+            <a:endParaRPr lang="en-US" sz="880" dirty="0"/>
+          </a:p>
+        </p:txBody>
+      </p:sp>
+      <p:sp>
+        <p:nvSpPr>
+          <p:cNvPr id="11" name="Shape 9"/>
+          <p:cNvSpPr/>
+          <p:nvPr/>
+        </p:nvSpPr>
+        <p:spPr>
+          <a:xfrm>
+            <a:off x="548640" y="2185416"/>
+            <a:ext cx="8046720" cy="9144"/>
+          </a:xfrm>
+          <a:prstGeom prst="rect">
+            <a:avLst/>
+          </a:prstGeom>
+          <a:solidFill>
+            <a:srgbClr val="D8DEE6"/>
+          </a:solidFill>
+          <a:ln w="12700">
+            <a:solidFill>
+              <a:srgbClr val="D8DEE6"/>
+            </a:solidFill>
+            <a:prstDash val="solid"/>
+          </a:ln>
+        </p:spPr>
+      </p:sp>
+      <p:sp>
+        <p:nvSpPr>
+          <p:cNvPr id="12" name="Text 10"/>
+          <p:cNvSpPr/>
+          <p:nvPr/>
+        </p:nvSpPr>
+        <p:spPr>
+          <a:xfrm>
+            <a:off x="548640" y="2395728"/>
+            <a:ext cx="2423160" cy="256032"/>
+          </a:xfrm>
+          <a:prstGeom prst="rect">
+            <a:avLst/>
+          </a:prstGeom>
+          <a:noFill/>
+          <a:ln/>
+        </p:spPr>
+        <p:txBody>
+          <a:bodyPr wrap="square" lIns="0" tIns="0" rIns="0" bIns="0" rtlCol="0" anchor="ctr"/>
+          <a:lstStyle/>
+          <a:p>
+            <a:pPr indent="0" marL="0">
+              <a:buNone/>
+            </a:pPr>
+            <a:r>
+              <a:rPr lang="en-US" sz="1120" b="1" dirty="0">
+                <a:solidFill>
+                  <a:srgbClr val="0F2A44"/>
+                </a:solidFill>
+                <a:latin typeface="Calibri" pitchFamily="34" charset="0"/>
+                <a:ea typeface="Calibri" pitchFamily="34" charset="-122"/>
+                <a:cs typeface="Calibri" pitchFamily="34" charset="-120"/>
+              </a:rPr>
+              <a:t>Graph coupling coefficient</a:t>
+            </a:r>
+            <a:endParaRPr lang="en-US" sz="1120" dirty="0"/>
+          </a:p>
+        </p:txBody>
+      </p:sp>
+      <p:sp>
+        <p:nvSpPr>
+          <p:cNvPr id="13" name="Text 11"/>
+          <p:cNvSpPr/>
+          <p:nvPr/>
+        </p:nvSpPr>
+        <p:spPr>
+          <a:xfrm>
+            <a:off x="3063240" y="2395728"/>
+            <a:ext cx="2468880" cy="256032"/>
+          </a:xfrm>
+          <a:prstGeom prst="rect">
+            <a:avLst/>
+          </a:prstGeom>
+          <a:noFill/>
+          <a:ln/>
+        </p:spPr>
+        <p:txBody>
+          <a:bodyPr wrap="square" lIns="0" tIns="0" rIns="0" bIns="0" rtlCol="0" anchor="ctr">
+            <a:normAutofit/>
+          </a:bodyPr>
+          <a:lstStyle/>
+          <a:p>
+            <a:pPr indent="0" marL="0">
+              <a:buNone/>
+            </a:pPr>
+            <a:r>
+              <a:rPr lang="en-US" sz="1080" b="1" dirty="0">
+                <a:solidFill>
+                  <a:srgbClr val="0D9488"/>
+                </a:solidFill>
+                <a:latin typeface="Calibri" pitchFamily="34" charset="0"/>
+                <a:ea typeface="Calibri" pitchFamily="34" charset="-122"/>
+                <a:cs typeface="Calibri" pitchFamily="34" charset="-120"/>
+              </a:rPr>
+              <a:t>coupling = E / (N × (N - 1))</a:t>
+            </a:r>
+            <a:endParaRPr lang="en-US" sz="1080" dirty="0"/>
+          </a:p>
+        </p:txBody>
+      </p:sp>
+      <p:sp>
+        <p:nvSpPr>
+          <p:cNvPr id="14" name="Text 12"/>
+          <p:cNvSpPr/>
+          <p:nvPr/>
+        </p:nvSpPr>
+        <p:spPr>
+          <a:xfrm>
+            <a:off x="5715000" y="2377440"/>
+            <a:ext cx="2880360" cy="384048"/>
+          </a:xfrm>
+          <a:prstGeom prst="rect">
+            <a:avLst/>
+          </a:prstGeom>
+          <a:noFill/>
+          <a:ln/>
+        </p:spPr>
+        <p:txBody>
+          <a:bodyPr wrap="square" lIns="0" tIns="0" rIns="0" bIns="0" rtlCol="0" anchor="ctr">
+            <a:normAutofit/>
+          </a:bodyPr>
+          <a:lstStyle/>
+          <a:p>
+            <a:pPr indent="0" marL="0">
+              <a:buNone/>
+            </a:pPr>
+            <a:r>
+              <a:rPr lang="en-US" sz="880" dirty="0">
+                <a:solidFill>
+                  <a:srgbClr val="1E293B"/>
+                </a:solidFill>
+                <a:latin typeface="Calibri" pitchFamily="34" charset="0"/>
+                <a:ea typeface="Calibri" pitchFamily="34" charset="-122"/>
+                <a:cs typeface="Calibri" pitchFamily="34" charset="-120"/>
+              </a:rPr>
+              <a:t>E = directed dependency edges; N = detected services. Higher values mean denser inter-service coupling.</a:t>
+            </a:r>
+            <a:endParaRPr lang="en-US" sz="880" dirty="0"/>
+          </a:p>
+        </p:txBody>
+      </p:sp>
+      <p:sp>
+        <p:nvSpPr>
+          <p:cNvPr id="15" name="Shape 13"/>
+          <p:cNvSpPr/>
+          <p:nvPr/>
+        </p:nvSpPr>
+        <p:spPr>
+          <a:xfrm>
+            <a:off x="548640" y="2871216"/>
+            <a:ext cx="8046720" cy="9144"/>
+          </a:xfrm>
+          <a:prstGeom prst="rect">
+            <a:avLst/>
+          </a:prstGeom>
+          <a:solidFill>
+            <a:srgbClr val="D8DEE6"/>
+          </a:solidFill>
+          <a:ln w="12700">
+            <a:solidFill>
+              <a:srgbClr val="D8DEE6"/>
+            </a:solidFill>
+            <a:prstDash val="solid"/>
+          </a:ln>
+        </p:spPr>
+      </p:sp>
+      <p:sp>
+        <p:nvSpPr>
+          <p:cNvPr id="16" name="Text 14"/>
+          <p:cNvSpPr/>
+          <p:nvPr/>
+        </p:nvSpPr>
+        <p:spPr>
+          <a:xfrm>
+            <a:off x="548640" y="3081528"/>
+            <a:ext cx="2423160" cy="256032"/>
+          </a:xfrm>
+          <a:prstGeom prst="rect">
+            <a:avLst/>
+          </a:prstGeom>
+          <a:noFill/>
+          <a:ln/>
+        </p:spPr>
+        <p:txBody>
+          <a:bodyPr wrap="square" lIns="0" tIns="0" rIns="0" bIns="0" rtlCol="0" anchor="ctr"/>
+          <a:lstStyle/>
+          <a:p>
+            <a:pPr indent="0" marL="0">
+              <a:buNone/>
+            </a:pPr>
+            <a:r>
+              <a:rPr lang="en-US" sz="1120" b="1" dirty="0">
+                <a:solidFill>
+                  <a:srgbClr val="0F2A44"/>
+                </a:solidFill>
+                <a:latin typeface="Calibri" pitchFamily="34" charset="0"/>
+                <a:ea typeface="Calibri" pitchFamily="34" charset="-122"/>
+                <a:cs typeface="Calibri" pitchFamily="34" charset="-120"/>
+              </a:rPr>
+              <a:t>Dependency edge weight</a:t>
+            </a:r>
+            <a:endParaRPr lang="en-US" sz="1120" dirty="0"/>
+          </a:p>
+        </p:txBody>
+      </p:sp>
+      <p:sp>
+        <p:nvSpPr>
+          <p:cNvPr id="17" name="Text 15"/>
+          <p:cNvSpPr/>
+          <p:nvPr/>
+        </p:nvSpPr>
+        <p:spPr>
+          <a:xfrm>
+            <a:off x="3063240" y="3081528"/>
+            <a:ext cx="2468880" cy="256032"/>
+          </a:xfrm>
+          <a:prstGeom prst="rect">
+            <a:avLst/>
+          </a:prstGeom>
+          <a:noFill/>
+          <a:ln/>
+        </p:spPr>
+        <p:txBody>
+          <a:bodyPr wrap="square" lIns="0" tIns="0" rIns="0" bIns="0" rtlCol="0" anchor="ctr">
+            <a:normAutofit/>
+          </a:bodyPr>
+          <a:lstStyle/>
+          <a:p>
+            <a:pPr indent="0" marL="0">
+              <a:buNone/>
+            </a:pPr>
+            <a:r>
+              <a:rPr lang="en-US" sz="1080" b="1" dirty="0">
+                <a:solidFill>
+                  <a:srgbClr val="0D9488"/>
+                </a:solidFill>
+                <a:latin typeface="Calibri" pitchFamily="34" charset="0"/>
+                <a:ea typeface="Calibri" pitchFamily="34" charset="-122"/>
+                <a:cs typeface="Calibri" pitchFamily="34" charset="-120"/>
+              </a:rPr>
+              <a:t>weight(A, B) = distinct call sites from A to B</a:t>
+            </a:r>
+            <a:endParaRPr lang="en-US" sz="1080" dirty="0"/>
+          </a:p>
+        </p:txBody>
+      </p:sp>
+      <p:sp>
+        <p:nvSpPr>
+          <p:cNvPr id="18" name="Text 16"/>
+          <p:cNvSpPr/>
+          <p:nvPr/>
+        </p:nvSpPr>
+        <p:spPr>
+          <a:xfrm>
+            <a:off x="5715000" y="3063240"/>
+            <a:ext cx="2880360" cy="384048"/>
+          </a:xfrm>
+          <a:prstGeom prst="rect">
+            <a:avLst/>
+          </a:prstGeom>
+          <a:noFill/>
+          <a:ln/>
+        </p:spPr>
+        <p:txBody>
+          <a:bodyPr wrap="square" lIns="0" tIns="0" rIns="0" bIns="0" rtlCol="0" anchor="ctr">
+            <a:normAutofit/>
+          </a:bodyPr>
+          <a:lstStyle/>
+          <a:p>
+            <a:pPr indent="0" marL="0">
+              <a:buNone/>
+            </a:pPr>
+            <a:r>
+              <a:rPr lang="en-US" sz="880" dirty="0">
+                <a:solidFill>
+                  <a:srgbClr val="1E293B"/>
+                </a:solidFill>
+                <a:latin typeface="Calibri" pitchFamily="34" charset="0"/>
+                <a:ea typeface="Calibri" pitchFamily="34" charset="-122"/>
+                <a:cs typeface="Calibri" pitchFamily="34" charset="-120"/>
+              </a:rPr>
+              <a:t>Recovered from Feign clients, RestTemplate calls, and WebClient invocations in the Spoon AST.</a:t>
+            </a:r>
+            <a:endParaRPr lang="en-US" sz="880" dirty="0"/>
+          </a:p>
+        </p:txBody>
+      </p:sp>
+      <p:sp>
+        <p:nvSpPr>
+          <p:cNvPr id="19" name="Shape 17"/>
+          <p:cNvSpPr/>
+          <p:nvPr/>
+        </p:nvSpPr>
+        <p:spPr>
+          <a:xfrm>
+            <a:off x="548640" y="3557016"/>
+            <a:ext cx="8046720" cy="9144"/>
+          </a:xfrm>
+          <a:prstGeom prst="rect">
+            <a:avLst/>
+          </a:prstGeom>
+          <a:solidFill>
+            <a:srgbClr val="D8DEE6"/>
+          </a:solidFill>
+          <a:ln w="12700">
+            <a:solidFill>
+              <a:srgbClr val="D8DEE6"/>
+            </a:solidFill>
+            <a:prstDash val="solid"/>
+          </a:ln>
+        </p:spPr>
+      </p:sp>
+      <p:sp>
+        <p:nvSpPr>
+          <p:cNvPr id="20" name="Text 18"/>
+          <p:cNvSpPr/>
+          <p:nvPr/>
+        </p:nvSpPr>
+        <p:spPr>
+          <a:xfrm>
+            <a:off x="548640" y="3767328"/>
+            <a:ext cx="2423160" cy="256032"/>
+          </a:xfrm>
+          <a:prstGeom prst="rect">
+            <a:avLst/>
+          </a:prstGeom>
+          <a:noFill/>
+          <a:ln/>
+        </p:spPr>
+        <p:txBody>
+          <a:bodyPr wrap="square" lIns="0" tIns="0" rIns="0" bIns="0" rtlCol="0" anchor="ctr"/>
+          <a:lstStyle/>
+          <a:p>
+            <a:pPr indent="0" marL="0">
+              <a:buNone/>
+            </a:pPr>
+            <a:r>
+              <a:rPr lang="en-US" sz="1120" b="1" dirty="0">
+                <a:solidFill>
+                  <a:srgbClr val="0F2A44"/>
+                </a:solidFill>
+                <a:latin typeface="Calibri" pitchFamily="34" charset="0"/>
+                <a:ea typeface="Calibri" pitchFamily="34" charset="-122"/>
+                <a:cs typeface="Calibri" pitchFamily="34" charset="-120"/>
+              </a:rPr>
+              <a:t>Service size ratio</a:t>
+            </a:r>
+            <a:endParaRPr lang="en-US" sz="1120" dirty="0"/>
+          </a:p>
+        </p:txBody>
+      </p:sp>
+      <p:sp>
+        <p:nvSpPr>
+          <p:cNvPr id="21" name="Text 19"/>
+          <p:cNvSpPr/>
+          <p:nvPr/>
+        </p:nvSpPr>
+        <p:spPr>
+          <a:xfrm>
+            <a:off x="3063240" y="3767328"/>
+            <a:ext cx="2468880" cy="256032"/>
+          </a:xfrm>
+          <a:prstGeom prst="rect">
+            <a:avLst/>
+          </a:prstGeom>
+          <a:noFill/>
+          <a:ln/>
+        </p:spPr>
+        <p:txBody>
+          <a:bodyPr wrap="square" lIns="0" tIns="0" rIns="0" bIns="0" rtlCol="0" anchor="ctr">
+            <a:normAutofit/>
+          </a:bodyPr>
+          <a:lstStyle/>
+          <a:p>
+            <a:pPr indent="0" marL="0">
+              <a:buNone/>
+            </a:pPr>
+            <a:r>
+              <a:rPr lang="en-US" sz="1080" b="1" dirty="0">
+                <a:solidFill>
+                  <a:srgbClr val="0D9488"/>
+                </a:solidFill>
+                <a:latin typeface="Calibri" pitchFamily="34" charset="0"/>
+                <a:ea typeface="Calibri" pitchFamily="34" charset="-122"/>
+                <a:cs typeface="Calibri" pitchFamily="34" charset="-120"/>
+              </a:rPr>
+              <a:t>sizeRatio = LOC(service) / medianLOC(project)</a:t>
+            </a:r>
+            <a:endParaRPr lang="en-US" sz="1080" dirty="0"/>
+          </a:p>
+        </p:txBody>
+      </p:sp>
+      <p:sp>
+        <p:nvSpPr>
+          <p:cNvPr id="22" name="Text 20"/>
+          <p:cNvSpPr/>
+          <p:nvPr/>
+        </p:nvSpPr>
+        <p:spPr>
+          <a:xfrm>
+            <a:off x="5715000" y="3749040"/>
+            <a:ext cx="2880360" cy="384048"/>
+          </a:xfrm>
+          <a:prstGeom prst="rect">
+            <a:avLst/>
+          </a:prstGeom>
+          <a:noFill/>
+          <a:ln/>
+        </p:spPr>
+        <p:txBody>
+          <a:bodyPr wrap="square" lIns="0" tIns="0" rIns="0" bIns="0" rtlCol="0" anchor="ctr">
+            <a:normAutofit/>
+          </a:bodyPr>
+          <a:lstStyle/>
+          <a:p>
+            <a:pPr indent="0" marL="0">
+              <a:buNone/>
+            </a:pPr>
+            <a:r>
+              <a:rPr lang="en-US" sz="880" dirty="0">
+                <a:solidFill>
+                  <a:srgbClr val="1E293B"/>
+                </a:solidFill>
+                <a:latin typeface="Calibri" pitchFamily="34" charset="0"/>
+                <a:ea typeface="Calibri" pitchFamily="34" charset="-122"/>
+                <a:cs typeface="Calibri" pitchFamily="34" charset="-120"/>
+              </a:rPr>
+              <a:t>Used as supporting evidence for Nano Service and God Service-style sizing findings.</a:t>
+            </a:r>
+            <a:endParaRPr lang="en-US" sz="880" dirty="0"/>
+          </a:p>
+        </p:txBody>
+      </p:sp>
+      <p:sp>
+        <p:nvSpPr>
+          <p:cNvPr id="23" name="Shape 21"/>
+          <p:cNvSpPr/>
+          <p:nvPr/>
+        </p:nvSpPr>
+        <p:spPr>
+          <a:xfrm>
+            <a:off x="548640" y="4242816"/>
+            <a:ext cx="8046720" cy="9144"/>
+          </a:xfrm>
+          <a:prstGeom prst="rect">
+            <a:avLst/>
+          </a:prstGeom>
+          <a:solidFill>
+            <a:srgbClr val="D8DEE6"/>
+          </a:solidFill>
+          <a:ln w="12700">
+            <a:solidFill>
+              <a:srgbClr val="D8DEE6"/>
+            </a:solidFill>
+            <a:prstDash val="solid"/>
+          </a:ln>
+        </p:spPr>
+      </p:sp>
+      <p:sp>
+        <p:nvSpPr>
+          <p:cNvPr id="24" name="Shape 22"/>
+          <p:cNvSpPr/>
+          <p:nvPr/>
+        </p:nvSpPr>
+        <p:spPr>
+          <a:xfrm>
+            <a:off x="548640" y="4498848"/>
+            <a:ext cx="457200" cy="36576"/>
+          </a:xfrm>
+          <a:prstGeom prst="rect">
+            <a:avLst/>
+          </a:prstGeom>
+          <a:solidFill>
+            <a:srgbClr val="0D9488"/>
+          </a:solidFill>
+          <a:ln w="12700">
+            <a:solidFill>
+              <a:srgbClr val="0D9488"/>
+            </a:solidFill>
+            <a:prstDash val="solid"/>
+          </a:ln>
+        </p:spPr>
+      </p:sp>
+      <p:sp>
+        <p:nvSpPr>
+          <p:cNvPr id="25" name="Text 23"/>
+          <p:cNvSpPr/>
+          <p:nvPr/>
+        </p:nvSpPr>
+        <p:spPr>
+          <a:xfrm>
+            <a:off x="548640" y="4590288"/>
+            <a:ext cx="8046720" cy="237744"/>
+          </a:xfrm>
+          <a:prstGeom prst="rect">
+            <a:avLst/>
+          </a:prstGeom>
+          <a:noFill/>
+          <a:ln/>
+        </p:spPr>
+        <p:txBody>
+          <a:bodyPr wrap="square" lIns="0" tIns="0" rIns="0" bIns="0" rtlCol="0" anchor="ctr"/>
+          <a:lstStyle/>
+          <a:p>
+            <a:pPr indent="0" marL="0">
+              <a:buNone/>
+            </a:pPr>
+            <a:r>
+              <a:rPr lang="en-US" sz="950" i="1" dirty="0">
+                <a:solidFill>
+                  <a:srgbClr val="64748B"/>
+                </a:solidFill>
+                <a:latin typeface="Calibri" pitchFamily="34" charset="0"/>
+                <a:ea typeface="Calibri" pitchFamily="34" charset="-122"/>
+                <a:cs typeface="Calibri" pitchFamily="34" charset="-120"/>
+              </a:rPr>
+              <a:t>TCC follows Bieman &amp; Kang's cohesion interpretation; graph metrics use the recovered directed service dependency graph.</a:t>
+            </a:r>
+            <a:endParaRPr lang="en-US" sz="950" dirty="0"/>
+          </a:p>
+        </p:txBody>
+      </p:sp>
+      <p:sp>
+        <p:nvSpPr>
+          <p:cNvPr id="26" name="Text 24"/>
+          <p:cNvSpPr/>
+          <p:nvPr/>
+        </p:nvSpPr>
+        <p:spPr>
+          <a:xfrm>
+            <a:off x="7452360" y="4864608"/>
+            <a:ext cx="1143000" cy="228600"/>
+          </a:xfrm>
+          <a:prstGeom prst="rect">
+            <a:avLst/>
+          </a:prstGeom>
+          <a:noFill/>
+          <a:ln/>
+        </p:spPr>
+        <p:txBody>
+          <a:bodyPr wrap="square" lIns="0" tIns="0" rIns="0" bIns="0" rtlCol="0" anchor="ctr"/>
+          <a:lstStyle/>
+          <a:p>
+            <a:pPr algn="r" indent="0" marL="0">
+              <a:buNone/>
+            </a:pPr>
+            <a:r>
+              <a:rPr lang="en-US" sz="900" dirty="0">
+                <a:solidFill>
+                  <a:srgbClr val="64748B"/>
+                </a:solidFill>
+                <a:latin typeface="Calibri" pitchFamily="34" charset="0"/>
+                <a:ea typeface="Calibri" pitchFamily="34" charset="-122"/>
+                <a:cs typeface="Calibri" pitchFamily="34" charset="-120"/>
+              </a:rPr>
+              <a:t>Appendix B</a:t>
+            </a:r>
+            <a:endParaRPr lang="en-US" sz="900" dirty="0"/>
+          </a:p>
+        </p:txBody>
+      </p:sp>
+    </p:spTree>
+  </p:cSld>
+  <p:clrMapOvr>
+    <a:masterClrMapping/>
+  </p:clrMapOvr>
+</p:sld>
+</file>
+
+<file path=ppt/slides/slide18.xml><?xml version="1.0" encoding="utf-8"?>
+<p:sld xmlns:a="http://schemas.openxmlformats.org/drawingml/2006/main" xmlns:r="http://schemas.openxmlformats.org/officeDocument/2006/relationships" xmlns:p="http://schemas.openxmlformats.org/presentationml/2006/main">
+  <p:cSld name="Slide 18">
+    <p:bg>
+      <p:bgPr>
+        <a:solidFill>
+          <a:srgbClr val="FFFFFF"/>
+        </a:solidFill>
+      </p:bgPr>
+    </p:bg>
+    <p:spTree>
+      <p:nvGrpSpPr>
+        <p:cNvPr id="1" name=""/>
+        <p:cNvGrpSpPr/>
+        <p:nvPr/>
+      </p:nvGrpSpPr>
+      <p:grpSpPr>
+        <a:xfrm>
+          <a:off x="0" y="0"/>
+          <a:ext cx="0" cy="0"/>
+          <a:chOff x="0" y="0"/>
+          <a:chExt cx="0" cy="0"/>
+        </a:xfrm>
+      </p:grpSpPr>
+      <p:sp>
+        <p:nvSpPr>
+          <p:cNvPr id="2" name="Text 0"/>
+          <p:cNvSpPr/>
+          <p:nvPr/>
+        </p:nvSpPr>
+        <p:spPr>
+          <a:xfrm>
+            <a:off x="548640" y="256032"/>
+            <a:ext cx="8046720" cy="502920"/>
+          </a:xfrm>
+          <a:prstGeom prst="rect">
+            <a:avLst/>
+          </a:prstGeom>
+          <a:noFill/>
+          <a:ln/>
+        </p:spPr>
+        <p:txBody>
+          <a:bodyPr wrap="square" lIns="0" tIns="0" rIns="0" bIns="0" rtlCol="0" anchor="ctr"/>
+          <a:lstStyle/>
+          <a:p>
+            <a:pPr indent="0" marL="0">
+              <a:buNone/>
+            </a:pPr>
+            <a:r>
+              <a:rPr lang="en-US" sz="2500" b="1" dirty="0">
+                <a:solidFill>
+                  <a:srgbClr val="0F2A44"/>
+                </a:solidFill>
+                <a:latin typeface="Calibri" pitchFamily="34" charset="0"/>
+                <a:ea typeface="Calibri" pitchFamily="34" charset="-122"/>
+                <a:cs typeface="Calibri" pitchFamily="34" charset="-120"/>
+              </a:rPr>
+              <a:t>Annex: health score computation</a:t>
+            </a:r>
+            <a:endParaRPr lang="en-US" sz="2500" dirty="0"/>
+          </a:p>
+        </p:txBody>
+      </p:sp>
+      <p:sp>
+        <p:nvSpPr>
+          <p:cNvPr id="3" name="Shape 1"/>
+          <p:cNvSpPr/>
+          <p:nvPr/>
+        </p:nvSpPr>
+        <p:spPr>
+          <a:xfrm>
+            <a:off x="548640" y="841248"/>
+            <a:ext cx="8046720" cy="13716"/>
+          </a:xfrm>
+          <a:prstGeom prst="rect">
+            <a:avLst/>
+          </a:prstGeom>
+          <a:solidFill>
+            <a:srgbClr val="D8DEE6"/>
+          </a:solidFill>
+          <a:ln w="12700">
+            <a:solidFill>
+              <a:srgbClr val="D8DEE6"/>
+            </a:solidFill>
+            <a:prstDash val="solid"/>
+          </a:ln>
+        </p:spPr>
+      </p:sp>
+      <p:sp>
+        <p:nvSpPr>
+          <p:cNvPr id="4" name="Text 2"/>
+          <p:cNvSpPr/>
+          <p:nvPr/>
+        </p:nvSpPr>
+        <p:spPr>
+          <a:xfrm>
+            <a:off x="548640" y="1005840"/>
+            <a:ext cx="8046720" cy="274320"/>
+          </a:xfrm>
+          <a:prstGeom prst="rect">
+            <a:avLst/>
+          </a:prstGeom>
+          <a:noFill/>
+          <a:ln/>
+        </p:spPr>
+        <p:txBody>
+          <a:bodyPr wrap="square" lIns="0" tIns="0" rIns="0" bIns="0" rtlCol="0" anchor="ctr"/>
+          <a:lstStyle/>
+          <a:p>
+            <a:pPr indent="0" marL="0">
+              <a:buNone/>
+            </a:pPr>
+            <a:r>
+              <a:rPr lang="en-US" sz="1300" b="1" dirty="0">
+                <a:solidFill>
+                  <a:srgbClr val="0F2A44"/>
+                </a:solidFill>
+                <a:latin typeface="Calibri" pitchFamily="34" charset="0"/>
+                <a:ea typeface="Calibri" pitchFamily="34" charset="-122"/>
+                <a:cs typeface="Calibri" pitchFamily="34" charset="-120"/>
+              </a:rPr>
+              <a:t>Overall score</a:t>
+            </a:r>
+            <a:endParaRPr lang="en-US" sz="1300" dirty="0"/>
+          </a:p>
+        </p:txBody>
+      </p:sp>
+      <p:sp>
+        <p:nvSpPr>
+          <p:cNvPr id="5" name="Text 3"/>
+          <p:cNvSpPr/>
+          <p:nvPr/>
+        </p:nvSpPr>
+        <p:spPr>
+          <a:xfrm>
+            <a:off x="548640" y="1353312"/>
+            <a:ext cx="8046720" cy="384048"/>
+          </a:xfrm>
+          <a:prstGeom prst="rect">
+            <a:avLst/>
+          </a:prstGeom>
+          <a:noFill/>
+          <a:ln/>
+        </p:spPr>
+        <p:txBody>
+          <a:bodyPr wrap="square" lIns="0" tIns="0" rIns="0" bIns="0" rtlCol="0" anchor="ctr"/>
+          <a:lstStyle/>
+          <a:p>
+            <a:pPr algn="ctr" indent="0" marL="0">
+              <a:buNone/>
+            </a:pPr>
+            <a:r>
+              <a:rPr lang="en-US" sz="2000" b="1" dirty="0">
+                <a:solidFill>
+                  <a:srgbClr val="0D9488"/>
+                </a:solidFill>
+                <a:latin typeface="Calibri" pitchFamily="34" charset="0"/>
+                <a:ea typeface="Calibri" pitchFamily="34" charset="-122"/>
+                <a:cs typeface="Calibri" pitchFamily="34" charset="-120"/>
+              </a:rPr>
+              <a:t>score = AP + CQ + ARCH + SIZE</a:t>
+            </a:r>
+            <a:endParaRPr lang="en-US" sz="2000" dirty="0"/>
+          </a:p>
+        </p:txBody>
+      </p:sp>
+      <p:sp>
+        <p:nvSpPr>
+          <p:cNvPr id="6" name="Text 4"/>
+          <p:cNvSpPr/>
+          <p:nvPr/>
+        </p:nvSpPr>
+        <p:spPr>
+          <a:xfrm>
+            <a:off x="548640" y="2011680"/>
+            <a:ext cx="685800" cy="219456"/>
+          </a:xfrm>
+          <a:prstGeom prst="rect">
+            <a:avLst/>
+          </a:prstGeom>
+          <a:noFill/>
+          <a:ln/>
+        </p:spPr>
+        <p:txBody>
+          <a:bodyPr wrap="square" lIns="0" tIns="0" rIns="0" bIns="0" rtlCol="0" anchor="ctr"/>
+          <a:lstStyle/>
+          <a:p>
+            <a:pPr indent="0" marL="0">
+              <a:buNone/>
+            </a:pPr>
+            <a:r>
+              <a:rPr lang="en-US" sz="820" b="1" spc="120" kern="0" dirty="0">
+                <a:solidFill>
+                  <a:srgbClr val="0F2A44"/>
+                </a:solidFill>
+                <a:latin typeface="Calibri" pitchFamily="34" charset="0"/>
+                <a:ea typeface="Calibri" pitchFamily="34" charset="-122"/>
+                <a:cs typeface="Calibri" pitchFamily="34" charset="-120"/>
+              </a:rPr>
+              <a:t>TERM</a:t>
+            </a:r>
+            <a:endParaRPr lang="en-US" sz="820" dirty="0"/>
+          </a:p>
+        </p:txBody>
+      </p:sp>
+      <p:sp>
+        <p:nvSpPr>
+          <p:cNvPr id="7" name="Text 5"/>
+          <p:cNvSpPr/>
+          <p:nvPr/>
+        </p:nvSpPr>
+        <p:spPr>
+          <a:xfrm>
+            <a:off x="1325880" y="2011680"/>
+            <a:ext cx="1828800" cy="219456"/>
+          </a:xfrm>
+          <a:prstGeom prst="rect">
+            <a:avLst/>
+          </a:prstGeom>
+          <a:noFill/>
+          <a:ln/>
+        </p:spPr>
+        <p:txBody>
+          <a:bodyPr wrap="square" lIns="0" tIns="0" rIns="0" bIns="0" rtlCol="0" anchor="ctr"/>
+          <a:lstStyle/>
+          <a:p>
+            <a:pPr indent="0" marL="0">
+              <a:buNone/>
+            </a:pPr>
+            <a:r>
+              <a:rPr lang="en-US" sz="820" b="1" spc="120" kern="0" dirty="0">
+                <a:solidFill>
+                  <a:srgbClr val="0F2A44"/>
+                </a:solidFill>
+                <a:latin typeface="Calibri" pitchFamily="34" charset="0"/>
+                <a:ea typeface="Calibri" pitchFamily="34" charset="-122"/>
+                <a:cs typeface="Calibri" pitchFamily="34" charset="-120"/>
+              </a:rPr>
+              <a:t>CATEGORY</a:t>
+            </a:r>
+            <a:endParaRPr lang="en-US" sz="820" dirty="0"/>
+          </a:p>
+        </p:txBody>
+      </p:sp>
+      <p:sp>
+        <p:nvSpPr>
+          <p:cNvPr id="8" name="Text 6"/>
+          <p:cNvSpPr/>
+          <p:nvPr/>
+        </p:nvSpPr>
+        <p:spPr>
+          <a:xfrm>
+            <a:off x="3246120" y="2011680"/>
+            <a:ext cx="777240" cy="219456"/>
+          </a:xfrm>
+          <a:prstGeom prst="rect">
+            <a:avLst/>
+          </a:prstGeom>
+          <a:noFill/>
+          <a:ln/>
+        </p:spPr>
+        <p:txBody>
+          <a:bodyPr wrap="square" lIns="0" tIns="0" rIns="0" bIns="0" rtlCol="0" anchor="ctr"/>
+          <a:lstStyle/>
+          <a:p>
+            <a:pPr indent="0" marL="0">
+              <a:buNone/>
+            </a:pPr>
+            <a:r>
+              <a:rPr lang="en-US" sz="820" b="1" spc="120" kern="0" dirty="0">
+                <a:solidFill>
+                  <a:srgbClr val="0F2A44"/>
+                </a:solidFill>
+                <a:latin typeface="Calibri" pitchFamily="34" charset="0"/>
+                <a:ea typeface="Calibri" pitchFamily="34" charset="-122"/>
+                <a:cs typeface="Calibri" pitchFamily="34" charset="-120"/>
+              </a:rPr>
+              <a:t>BUDGET</a:t>
+            </a:r>
+            <a:endParaRPr lang="en-US" sz="820" dirty="0"/>
+          </a:p>
+        </p:txBody>
+      </p:sp>
+      <p:sp>
+        <p:nvSpPr>
+          <p:cNvPr id="9" name="Text 7"/>
+          <p:cNvSpPr/>
+          <p:nvPr/>
+        </p:nvSpPr>
+        <p:spPr>
+          <a:xfrm>
+            <a:off x="4251960" y="2011680"/>
+            <a:ext cx="4343400" cy="219456"/>
+          </a:xfrm>
+          <a:prstGeom prst="rect">
+            <a:avLst/>
+          </a:prstGeom>
+          <a:noFill/>
+          <a:ln/>
+        </p:spPr>
+        <p:txBody>
+          <a:bodyPr wrap="square" lIns="0" tIns="0" rIns="0" bIns="0" rtlCol="0" anchor="ctr"/>
+          <a:lstStyle/>
+          <a:p>
+            <a:pPr indent="0" marL="0">
+              <a:buNone/>
+            </a:pPr>
+            <a:r>
+              <a:rPr lang="en-US" sz="820" b="1" spc="120" kern="0" dirty="0">
+                <a:solidFill>
+                  <a:srgbClr val="0F2A44"/>
+                </a:solidFill>
+                <a:latin typeface="Calibri" pitchFamily="34" charset="0"/>
+                <a:ea typeface="Calibri" pitchFamily="34" charset="-122"/>
+                <a:cs typeface="Calibri" pitchFamily="34" charset="-120"/>
+              </a:rPr>
+              <a:t>COMPUTATION</a:t>
+            </a:r>
+            <a:endParaRPr lang="en-US" sz="820" dirty="0"/>
+          </a:p>
+        </p:txBody>
+      </p:sp>
+      <p:sp>
+        <p:nvSpPr>
+          <p:cNvPr id="10" name="Shape 8"/>
+          <p:cNvSpPr/>
+          <p:nvPr/>
+        </p:nvSpPr>
+        <p:spPr>
+          <a:xfrm>
+            <a:off x="548640" y="2286000"/>
+            <a:ext cx="8046720" cy="13716"/>
+          </a:xfrm>
+          <a:prstGeom prst="rect">
+            <a:avLst/>
+          </a:prstGeom>
+          <a:solidFill>
+            <a:srgbClr val="D8DEE6"/>
+          </a:solidFill>
+          <a:ln w="12700">
+            <a:solidFill>
+              <a:srgbClr val="D8DEE6"/>
+            </a:solidFill>
+            <a:prstDash val="solid"/>
+          </a:ln>
+        </p:spPr>
+      </p:sp>
+      <p:sp>
+        <p:nvSpPr>
+          <p:cNvPr id="11" name="Text 9"/>
+          <p:cNvSpPr/>
+          <p:nvPr/>
+        </p:nvSpPr>
+        <p:spPr>
+          <a:xfrm>
+            <a:off x="548640" y="2441448"/>
+            <a:ext cx="685800" cy="256032"/>
+          </a:xfrm>
+          <a:prstGeom prst="rect">
+            <a:avLst/>
+          </a:prstGeom>
+          <a:noFill/>
+          <a:ln/>
+        </p:spPr>
+        <p:txBody>
+          <a:bodyPr wrap="square" lIns="0" tIns="0" rIns="0" bIns="0" rtlCol="0" anchor="ctr">
+            <a:normAutofit/>
+          </a:bodyPr>
+          <a:lstStyle/>
+          <a:p>
+            <a:pPr indent="0" marL="0">
+              <a:buNone/>
+            </a:pPr>
+            <a:r>
+              <a:rPr lang="en-US" sz="1050" b="1" dirty="0">
+                <a:solidFill>
+                  <a:srgbClr val="0D9488"/>
+                </a:solidFill>
+                <a:latin typeface="Calibri" pitchFamily="34" charset="0"/>
+                <a:ea typeface="Calibri" pitchFamily="34" charset="-122"/>
+                <a:cs typeface="Calibri" pitchFamily="34" charset="-120"/>
+              </a:rPr>
+              <a:t>AP</a:t>
+            </a:r>
+            <a:endParaRPr lang="en-US" sz="1050" dirty="0"/>
+          </a:p>
+        </p:txBody>
+      </p:sp>
+      <p:sp>
+        <p:nvSpPr>
+          <p:cNvPr id="12" name="Text 10"/>
+          <p:cNvSpPr/>
+          <p:nvPr/>
+        </p:nvSpPr>
+        <p:spPr>
+          <a:xfrm>
+            <a:off x="1325880" y="2441448"/>
+            <a:ext cx="1828800" cy="256032"/>
+          </a:xfrm>
+          <a:prstGeom prst="rect">
+            <a:avLst/>
+          </a:prstGeom>
+          <a:noFill/>
+          <a:ln/>
+        </p:spPr>
+        <p:txBody>
+          <a:bodyPr wrap="square" lIns="0" tIns="0" rIns="0" bIns="0" rtlCol="0" anchor="ctr">
+            <a:normAutofit/>
+          </a:bodyPr>
+          <a:lstStyle/>
+          <a:p>
+            <a:pPr indent="0" marL="0">
+              <a:buNone/>
+            </a:pPr>
+            <a:r>
+              <a:rPr lang="en-US" sz="940" b="1" dirty="0">
+                <a:solidFill>
+                  <a:srgbClr val="1E293B"/>
+                </a:solidFill>
+                <a:latin typeface="Calibri" pitchFamily="34" charset="0"/>
+                <a:ea typeface="Calibri" pitchFamily="34" charset="-122"/>
+                <a:cs typeface="Calibri" pitchFamily="34" charset="-120"/>
+              </a:rPr>
+              <a:t>Anti-Patterns</a:t>
+            </a:r>
+            <a:endParaRPr lang="en-US" sz="940" dirty="0"/>
+          </a:p>
+        </p:txBody>
+      </p:sp>
+      <p:sp>
+        <p:nvSpPr>
+          <p:cNvPr id="13" name="Text 11"/>
+          <p:cNvSpPr/>
+          <p:nvPr/>
+        </p:nvSpPr>
+        <p:spPr>
+          <a:xfrm>
+            <a:off x="3246120" y="2441448"/>
+            <a:ext cx="777240" cy="256032"/>
+          </a:xfrm>
+          <a:prstGeom prst="rect">
+            <a:avLst/>
+          </a:prstGeom>
+          <a:noFill/>
+          <a:ln/>
+        </p:spPr>
+        <p:txBody>
+          <a:bodyPr wrap="square" lIns="0" tIns="0" rIns="0" bIns="0" rtlCol="0" anchor="ctr">
+            <a:normAutofit/>
+          </a:bodyPr>
+          <a:lstStyle/>
+          <a:p>
+            <a:pPr indent="0" marL="0">
+              <a:buNone/>
+            </a:pPr>
+            <a:r>
+              <a:rPr lang="en-US" sz="940" dirty="0">
+                <a:solidFill>
+                  <a:srgbClr val="1E293B"/>
+                </a:solidFill>
+                <a:latin typeface="Calibri" pitchFamily="34" charset="0"/>
+                <a:ea typeface="Calibri" pitchFamily="34" charset="-122"/>
+                <a:cs typeface="Calibri" pitchFamily="34" charset="-120"/>
+              </a:rPr>
+              <a:t>40</a:t>
+            </a:r>
+            <a:endParaRPr lang="en-US" sz="940" dirty="0"/>
+          </a:p>
+        </p:txBody>
+      </p:sp>
+      <p:sp>
+        <p:nvSpPr>
+          <p:cNvPr id="14" name="Text 12"/>
+          <p:cNvSpPr/>
+          <p:nvPr/>
+        </p:nvSpPr>
+        <p:spPr>
+          <a:xfrm>
+            <a:off x="4251960" y="2441448"/>
+            <a:ext cx="4343400" cy="256032"/>
+          </a:xfrm>
+          <a:prstGeom prst="rect">
+            <a:avLst/>
+          </a:prstGeom>
+          <a:noFill/>
+          <a:ln/>
+        </p:spPr>
+        <p:txBody>
+          <a:bodyPr wrap="square" lIns="0" tIns="0" rIns="0" bIns="0" rtlCol="0" anchor="ctr">
+            <a:normAutofit/>
+          </a:bodyPr>
+          <a:lstStyle/>
+          <a:p>
+            <a:pPr indent="0" marL="0">
+              <a:buNone/>
+            </a:pPr>
+            <a:r>
+              <a:rPr lang="en-US" sz="940" dirty="0">
+                <a:solidFill>
+                  <a:srgbClr val="1E293B"/>
+                </a:solidFill>
+                <a:latin typeface="Calibri" pitchFamily="34" charset="0"/>
+                <a:ea typeface="Calibri" pitchFamily="34" charset="-122"/>
+                <a:cs typeface="Calibri" pitchFamily="34" charset="-120"/>
+              </a:rPr>
+              <a:t>max(0, 40 - severity penalties)</a:t>
+            </a:r>
+            <a:endParaRPr lang="en-US" sz="940" dirty="0"/>
+          </a:p>
+        </p:txBody>
+      </p:sp>
+      <p:sp>
+        <p:nvSpPr>
+          <p:cNvPr id="15" name="Shape 13"/>
+          <p:cNvSpPr/>
+          <p:nvPr/>
+        </p:nvSpPr>
+        <p:spPr>
+          <a:xfrm>
+            <a:off x="548640" y="2743200"/>
+            <a:ext cx="8046720" cy="9144"/>
+          </a:xfrm>
+          <a:prstGeom prst="rect">
+            <a:avLst/>
+          </a:prstGeom>
+          <a:solidFill>
+            <a:srgbClr val="D8DEE6"/>
+          </a:solidFill>
+          <a:ln w="12700">
+            <a:solidFill>
+              <a:srgbClr val="D8DEE6"/>
+            </a:solidFill>
+            <a:prstDash val="solid"/>
+          </a:ln>
+        </p:spPr>
+      </p:sp>
+      <p:sp>
+        <p:nvSpPr>
+          <p:cNvPr id="16" name="Text 14"/>
+          <p:cNvSpPr/>
+          <p:nvPr/>
+        </p:nvSpPr>
+        <p:spPr>
+          <a:xfrm>
+            <a:off x="548640" y="2834640"/>
+            <a:ext cx="685800" cy="256032"/>
+          </a:xfrm>
+          <a:prstGeom prst="rect">
+            <a:avLst/>
+          </a:prstGeom>
+          <a:noFill/>
+          <a:ln/>
+        </p:spPr>
+        <p:txBody>
+          <a:bodyPr wrap="square" lIns="0" tIns="0" rIns="0" bIns="0" rtlCol="0" anchor="ctr">
+            <a:normAutofit/>
+          </a:bodyPr>
+          <a:lstStyle/>
+          <a:p>
+            <a:pPr indent="0" marL="0">
+              <a:buNone/>
+            </a:pPr>
+            <a:r>
+              <a:rPr lang="en-US" sz="1050" b="1" dirty="0">
+                <a:solidFill>
+                  <a:srgbClr val="0D9488"/>
+                </a:solidFill>
+                <a:latin typeface="Calibri" pitchFamily="34" charset="0"/>
+                <a:ea typeface="Calibri" pitchFamily="34" charset="-122"/>
+                <a:cs typeface="Calibri" pitchFamily="34" charset="-120"/>
+              </a:rPr>
+              <a:t>CQ</a:t>
+            </a:r>
+            <a:endParaRPr lang="en-US" sz="1050" dirty="0"/>
+          </a:p>
+        </p:txBody>
+      </p:sp>
+      <p:sp>
+        <p:nvSpPr>
+          <p:cNvPr id="17" name="Text 15"/>
+          <p:cNvSpPr/>
+          <p:nvPr/>
+        </p:nvSpPr>
+        <p:spPr>
+          <a:xfrm>
+            <a:off x="1325880" y="2834640"/>
+            <a:ext cx="1828800" cy="256032"/>
+          </a:xfrm>
+          <a:prstGeom prst="rect">
+            <a:avLst/>
+          </a:prstGeom>
+          <a:noFill/>
+          <a:ln/>
+        </p:spPr>
+        <p:txBody>
+          <a:bodyPr wrap="square" lIns="0" tIns="0" rIns="0" bIns="0" rtlCol="0" anchor="ctr">
+            <a:normAutofit/>
+          </a:bodyPr>
+          <a:lstStyle/>
+          <a:p>
+            <a:pPr indent="0" marL="0">
+              <a:buNone/>
+            </a:pPr>
+            <a:r>
+              <a:rPr lang="en-US" sz="940" b="1" dirty="0">
+                <a:solidFill>
+                  <a:srgbClr val="1E293B"/>
+                </a:solidFill>
+                <a:latin typeface="Calibri" pitchFamily="34" charset="0"/>
+                <a:ea typeface="Calibri" pitchFamily="34" charset="-122"/>
+                <a:cs typeface="Calibri" pitchFamily="34" charset="-120"/>
+              </a:rPr>
+              <a:t>Code Quality</a:t>
+            </a:r>
+            <a:endParaRPr lang="en-US" sz="940" dirty="0"/>
+          </a:p>
+        </p:txBody>
+      </p:sp>
+      <p:sp>
+        <p:nvSpPr>
+          <p:cNvPr id="18" name="Text 16"/>
+          <p:cNvSpPr/>
+          <p:nvPr/>
+        </p:nvSpPr>
+        <p:spPr>
+          <a:xfrm>
+            <a:off x="3246120" y="2834640"/>
+            <a:ext cx="777240" cy="256032"/>
+          </a:xfrm>
+          <a:prstGeom prst="rect">
+            <a:avLst/>
+          </a:prstGeom>
+          <a:noFill/>
+          <a:ln/>
+        </p:spPr>
+        <p:txBody>
+          <a:bodyPr wrap="square" lIns="0" tIns="0" rIns="0" bIns="0" rtlCol="0" anchor="ctr">
+            <a:normAutofit/>
+          </a:bodyPr>
+          <a:lstStyle/>
+          <a:p>
+            <a:pPr indent="0" marL="0">
+              <a:buNone/>
+            </a:pPr>
+            <a:r>
+              <a:rPr lang="en-US" sz="940" dirty="0">
+                <a:solidFill>
+                  <a:srgbClr val="1E293B"/>
+                </a:solidFill>
+                <a:latin typeface="Calibri" pitchFamily="34" charset="0"/>
+                <a:ea typeface="Calibri" pitchFamily="34" charset="-122"/>
+                <a:cs typeface="Calibri" pitchFamily="34" charset="-120"/>
+              </a:rPr>
+              <a:t>20</a:t>
+            </a:r>
+            <a:endParaRPr lang="en-US" sz="940" dirty="0"/>
+          </a:p>
+        </p:txBody>
+      </p:sp>
+      <p:sp>
+        <p:nvSpPr>
+          <p:cNvPr id="19" name="Text 17"/>
+          <p:cNvSpPr/>
+          <p:nvPr/>
+        </p:nvSpPr>
+        <p:spPr>
+          <a:xfrm>
+            <a:off x="4251960" y="2834640"/>
+            <a:ext cx="4343400" cy="256032"/>
+          </a:xfrm>
+          <a:prstGeom prst="rect">
+            <a:avLst/>
+          </a:prstGeom>
+          <a:noFill/>
+          <a:ln/>
+        </p:spPr>
+        <p:txBody>
+          <a:bodyPr wrap="square" lIns="0" tIns="0" rIns="0" bIns="0" rtlCol="0" anchor="ctr">
+            <a:normAutofit/>
+          </a:bodyPr>
+          <a:lstStyle/>
+          <a:p>
+            <a:pPr indent="0" marL="0">
+              <a:buNone/>
+            </a:pPr>
+            <a:r>
+              <a:rPr lang="en-US" sz="940" dirty="0">
+                <a:solidFill>
+                  <a:srgbClr val="1E293B"/>
+                </a:solidFill>
+                <a:latin typeface="Calibri" pitchFamily="34" charset="0"/>
+                <a:ea typeface="Calibri" pitchFamily="34" charset="-122"/>
+                <a:cs typeface="Calibri" pitchFamily="34" charset="-120"/>
+              </a:rPr>
+              <a:t>max(0, 20 - smell-density penalty)</a:t>
+            </a:r>
+            <a:endParaRPr lang="en-US" sz="940" dirty="0"/>
+          </a:p>
+        </p:txBody>
+      </p:sp>
+      <p:sp>
+        <p:nvSpPr>
+          <p:cNvPr id="20" name="Shape 18"/>
+          <p:cNvSpPr/>
+          <p:nvPr/>
+        </p:nvSpPr>
+        <p:spPr>
+          <a:xfrm>
+            <a:off x="548640" y="3136392"/>
+            <a:ext cx="8046720" cy="9144"/>
+          </a:xfrm>
+          <a:prstGeom prst="rect">
+            <a:avLst/>
+          </a:prstGeom>
+          <a:solidFill>
+            <a:srgbClr val="D8DEE6"/>
+          </a:solidFill>
+          <a:ln w="12700">
+            <a:solidFill>
+              <a:srgbClr val="D8DEE6"/>
+            </a:solidFill>
+            <a:prstDash val="solid"/>
+          </a:ln>
+        </p:spPr>
+      </p:sp>
+      <p:sp>
+        <p:nvSpPr>
+          <p:cNvPr id="21" name="Text 19"/>
+          <p:cNvSpPr/>
+          <p:nvPr/>
+        </p:nvSpPr>
+        <p:spPr>
+          <a:xfrm>
+            <a:off x="548640" y="3227832"/>
+            <a:ext cx="685800" cy="256032"/>
+          </a:xfrm>
+          <a:prstGeom prst="rect">
+            <a:avLst/>
+          </a:prstGeom>
+          <a:noFill/>
+          <a:ln/>
+        </p:spPr>
+        <p:txBody>
+          <a:bodyPr wrap="square" lIns="0" tIns="0" rIns="0" bIns="0" rtlCol="0" anchor="ctr">
+            <a:normAutofit/>
+          </a:bodyPr>
+          <a:lstStyle/>
+          <a:p>
+            <a:pPr indent="0" marL="0">
+              <a:buNone/>
+            </a:pPr>
+            <a:r>
+              <a:rPr lang="en-US" sz="1050" b="1" dirty="0">
+                <a:solidFill>
+                  <a:srgbClr val="0D9488"/>
+                </a:solidFill>
+                <a:latin typeface="Calibri" pitchFamily="34" charset="0"/>
+                <a:ea typeface="Calibri" pitchFamily="34" charset="-122"/>
+                <a:cs typeface="Calibri" pitchFamily="34" charset="-120"/>
+              </a:rPr>
+              <a:t>ARCH</a:t>
+            </a:r>
+            <a:endParaRPr lang="en-US" sz="1050" dirty="0"/>
+          </a:p>
+        </p:txBody>
+      </p:sp>
+      <p:sp>
+        <p:nvSpPr>
+          <p:cNvPr id="22" name="Text 20"/>
+          <p:cNvSpPr/>
+          <p:nvPr/>
+        </p:nvSpPr>
+        <p:spPr>
+          <a:xfrm>
+            <a:off x="1325880" y="3227832"/>
+            <a:ext cx="1828800" cy="256032"/>
+          </a:xfrm>
+          <a:prstGeom prst="rect">
+            <a:avLst/>
+          </a:prstGeom>
+          <a:noFill/>
+          <a:ln/>
+        </p:spPr>
+        <p:txBody>
+          <a:bodyPr wrap="square" lIns="0" tIns="0" rIns="0" bIns="0" rtlCol="0" anchor="ctr">
+            <a:normAutofit/>
+          </a:bodyPr>
+          <a:lstStyle/>
+          <a:p>
+            <a:pPr indent="0" marL="0">
+              <a:buNone/>
+            </a:pPr>
+            <a:r>
+              <a:rPr lang="en-US" sz="940" b="1" dirty="0">
+                <a:solidFill>
+                  <a:srgbClr val="1E293B"/>
+                </a:solidFill>
+                <a:latin typeface="Calibri" pitchFamily="34" charset="0"/>
+                <a:ea typeface="Calibri" pitchFamily="34" charset="-122"/>
+                <a:cs typeface="Calibri" pitchFamily="34" charset="-120"/>
+              </a:rPr>
+              <a:t>Architecture</a:t>
+            </a:r>
+            <a:endParaRPr lang="en-US" sz="940" dirty="0"/>
+          </a:p>
+        </p:txBody>
+      </p:sp>
+      <p:sp>
+        <p:nvSpPr>
+          <p:cNvPr id="23" name="Text 21"/>
+          <p:cNvSpPr/>
+          <p:nvPr/>
+        </p:nvSpPr>
+        <p:spPr>
+          <a:xfrm>
+            <a:off x="3246120" y="3227832"/>
+            <a:ext cx="777240" cy="256032"/>
+          </a:xfrm>
+          <a:prstGeom prst="rect">
+            <a:avLst/>
+          </a:prstGeom>
+          <a:noFill/>
+          <a:ln/>
+        </p:spPr>
+        <p:txBody>
+          <a:bodyPr wrap="square" lIns="0" tIns="0" rIns="0" bIns="0" rtlCol="0" anchor="ctr">
+            <a:normAutofit/>
+          </a:bodyPr>
+          <a:lstStyle/>
+          <a:p>
+            <a:pPr indent="0" marL="0">
+              <a:buNone/>
+            </a:pPr>
+            <a:r>
+              <a:rPr lang="en-US" sz="940" dirty="0">
+                <a:solidFill>
+                  <a:srgbClr val="1E293B"/>
+                </a:solidFill>
+                <a:latin typeface="Calibri" pitchFamily="34" charset="0"/>
+                <a:ea typeface="Calibri" pitchFamily="34" charset="-122"/>
+                <a:cs typeface="Calibri" pitchFamily="34" charset="-120"/>
+              </a:rPr>
+              <a:t>25</a:t>
+            </a:r>
+            <a:endParaRPr lang="en-US" sz="940" dirty="0"/>
+          </a:p>
+        </p:txBody>
+      </p:sp>
+      <p:sp>
+        <p:nvSpPr>
+          <p:cNvPr id="24" name="Text 22"/>
+          <p:cNvSpPr/>
+          <p:nvPr/>
+        </p:nvSpPr>
+        <p:spPr>
+          <a:xfrm>
+            <a:off x="4251960" y="3227832"/>
+            <a:ext cx="4343400" cy="256032"/>
+          </a:xfrm>
+          <a:prstGeom prst="rect">
+            <a:avLst/>
+          </a:prstGeom>
+          <a:noFill/>
+          <a:ln/>
+        </p:spPr>
+        <p:txBody>
+          <a:bodyPr wrap="square" lIns="0" tIns="0" rIns="0" bIns="0" rtlCol="0" anchor="ctr">
+            <a:normAutofit/>
+          </a:bodyPr>
+          <a:lstStyle/>
+          <a:p>
+            <a:pPr indent="0" marL="0">
+              <a:buNone/>
+            </a:pPr>
+            <a:r>
+              <a:rPr lang="en-US" sz="940" dirty="0">
+                <a:solidFill>
+                  <a:srgbClr val="1E293B"/>
+                </a:solidFill>
+                <a:latin typeface="Calibri" pitchFamily="34" charset="0"/>
+                <a:ea typeface="Calibri" pitchFamily="34" charset="-122"/>
+                <a:cs typeface="Calibri" pitchFamily="34" charset="-120"/>
+              </a:rPr>
+              <a:t>max(0, 25 - coupling/cycle penalties)</a:t>
+            </a:r>
+            <a:endParaRPr lang="en-US" sz="940" dirty="0"/>
+          </a:p>
+        </p:txBody>
+      </p:sp>
+      <p:sp>
+        <p:nvSpPr>
+          <p:cNvPr id="25" name="Shape 23"/>
+          <p:cNvSpPr/>
+          <p:nvPr/>
+        </p:nvSpPr>
+        <p:spPr>
+          <a:xfrm>
+            <a:off x="548640" y="3529584"/>
+            <a:ext cx="8046720" cy="9144"/>
+          </a:xfrm>
+          <a:prstGeom prst="rect">
+            <a:avLst/>
+          </a:prstGeom>
+          <a:solidFill>
+            <a:srgbClr val="D8DEE6"/>
+          </a:solidFill>
+          <a:ln w="12700">
+            <a:solidFill>
+              <a:srgbClr val="D8DEE6"/>
+            </a:solidFill>
+            <a:prstDash val="solid"/>
+          </a:ln>
+        </p:spPr>
+      </p:sp>
+      <p:sp>
+        <p:nvSpPr>
+          <p:cNvPr id="26" name="Text 24"/>
+          <p:cNvSpPr/>
+          <p:nvPr/>
+        </p:nvSpPr>
+        <p:spPr>
+          <a:xfrm>
+            <a:off x="548640" y="3621024"/>
+            <a:ext cx="685800" cy="256032"/>
+          </a:xfrm>
+          <a:prstGeom prst="rect">
+            <a:avLst/>
+          </a:prstGeom>
+          <a:noFill/>
+          <a:ln/>
+        </p:spPr>
+        <p:txBody>
+          <a:bodyPr wrap="square" lIns="0" tIns="0" rIns="0" bIns="0" rtlCol="0" anchor="ctr">
+            <a:normAutofit/>
+          </a:bodyPr>
+          <a:lstStyle/>
+          <a:p>
+            <a:pPr indent="0" marL="0">
+              <a:buNone/>
+            </a:pPr>
+            <a:r>
+              <a:rPr lang="en-US" sz="1050" b="1" dirty="0">
+                <a:solidFill>
+                  <a:srgbClr val="0D9488"/>
+                </a:solidFill>
+                <a:latin typeface="Calibri" pitchFamily="34" charset="0"/>
+                <a:ea typeface="Calibri" pitchFamily="34" charset="-122"/>
+                <a:cs typeface="Calibri" pitchFamily="34" charset="-120"/>
+              </a:rPr>
+              <a:t>SIZE</a:t>
+            </a:r>
+            <a:endParaRPr lang="en-US" sz="1050" dirty="0"/>
+          </a:p>
+        </p:txBody>
+      </p:sp>
+      <p:sp>
+        <p:nvSpPr>
+          <p:cNvPr id="27" name="Text 25"/>
+          <p:cNvSpPr/>
+          <p:nvPr/>
+        </p:nvSpPr>
+        <p:spPr>
+          <a:xfrm>
+            <a:off x="1325880" y="3621024"/>
+            <a:ext cx="1828800" cy="256032"/>
+          </a:xfrm>
+          <a:prstGeom prst="rect">
+            <a:avLst/>
+          </a:prstGeom>
+          <a:noFill/>
+          <a:ln/>
+        </p:spPr>
+        <p:txBody>
+          <a:bodyPr wrap="square" lIns="0" tIns="0" rIns="0" bIns="0" rtlCol="0" anchor="ctr">
+            <a:normAutofit/>
+          </a:bodyPr>
+          <a:lstStyle/>
+          <a:p>
+            <a:pPr indent="0" marL="0">
+              <a:buNone/>
+            </a:pPr>
+            <a:r>
+              <a:rPr lang="en-US" sz="940" b="1" dirty="0">
+                <a:solidFill>
+                  <a:srgbClr val="1E293B"/>
+                </a:solidFill>
+                <a:latin typeface="Calibri" pitchFamily="34" charset="0"/>
+                <a:ea typeface="Calibri" pitchFamily="34" charset="-122"/>
+                <a:cs typeface="Calibri" pitchFamily="34" charset="-120"/>
+              </a:rPr>
+              <a:t>Service Sizing</a:t>
+            </a:r>
+            <a:endParaRPr lang="en-US" sz="940" dirty="0"/>
+          </a:p>
+        </p:txBody>
+      </p:sp>
+      <p:sp>
+        <p:nvSpPr>
+          <p:cNvPr id="28" name="Text 26"/>
+          <p:cNvSpPr/>
+          <p:nvPr/>
+        </p:nvSpPr>
+        <p:spPr>
+          <a:xfrm>
+            <a:off x="3246120" y="3621024"/>
+            <a:ext cx="777240" cy="256032"/>
+          </a:xfrm>
+          <a:prstGeom prst="rect">
+            <a:avLst/>
+          </a:prstGeom>
+          <a:noFill/>
+          <a:ln/>
+        </p:spPr>
+        <p:txBody>
+          <a:bodyPr wrap="square" lIns="0" tIns="0" rIns="0" bIns="0" rtlCol="0" anchor="ctr">
+            <a:normAutofit/>
+          </a:bodyPr>
+          <a:lstStyle/>
+          <a:p>
+            <a:pPr indent="0" marL="0">
+              <a:buNone/>
+            </a:pPr>
+            <a:r>
+              <a:rPr lang="en-US" sz="940" dirty="0">
+                <a:solidFill>
+                  <a:srgbClr val="1E293B"/>
+                </a:solidFill>
+                <a:latin typeface="Calibri" pitchFamily="34" charset="0"/>
+                <a:ea typeface="Calibri" pitchFamily="34" charset="-122"/>
+                <a:cs typeface="Calibri" pitchFamily="34" charset="-120"/>
+              </a:rPr>
+              <a:t>15</a:t>
+            </a:r>
+            <a:endParaRPr lang="en-US" sz="940" dirty="0"/>
+          </a:p>
+        </p:txBody>
+      </p:sp>
+      <p:sp>
+        <p:nvSpPr>
+          <p:cNvPr id="29" name="Text 27"/>
+          <p:cNvSpPr/>
+          <p:nvPr/>
+        </p:nvSpPr>
+        <p:spPr>
+          <a:xfrm>
+            <a:off x="4251960" y="3621024"/>
+            <a:ext cx="4343400" cy="256032"/>
+          </a:xfrm>
+          <a:prstGeom prst="rect">
+            <a:avLst/>
+          </a:prstGeom>
+          <a:noFill/>
+          <a:ln/>
+        </p:spPr>
+        <p:txBody>
+          <a:bodyPr wrap="square" lIns="0" tIns="0" rIns="0" bIns="0" rtlCol="0" anchor="ctr">
+            <a:normAutofit/>
+          </a:bodyPr>
+          <a:lstStyle/>
+          <a:p>
+            <a:pPr indent="0" marL="0">
+              <a:buNone/>
+            </a:pPr>
+            <a:r>
+              <a:rPr lang="en-US" sz="940" dirty="0">
+                <a:solidFill>
+                  <a:srgbClr val="1E293B"/>
+                </a:solidFill>
+                <a:latin typeface="Calibri" pitchFamily="34" charset="0"/>
+                <a:ea typeface="Calibri" pitchFamily="34" charset="-122"/>
+                <a:cs typeface="Calibri" pitchFamily="34" charset="-120"/>
+              </a:rPr>
+              <a:t>max(0, 15 - nano/god service penalties)</a:t>
+            </a:r>
+            <a:endParaRPr lang="en-US" sz="940" dirty="0"/>
+          </a:p>
+        </p:txBody>
+      </p:sp>
+      <p:sp>
+        <p:nvSpPr>
+          <p:cNvPr id="30" name="Shape 28"/>
+          <p:cNvSpPr/>
+          <p:nvPr/>
+        </p:nvSpPr>
+        <p:spPr>
+          <a:xfrm>
+            <a:off x="548640" y="3922776"/>
+            <a:ext cx="8046720" cy="9144"/>
+          </a:xfrm>
+          <a:prstGeom prst="rect">
+            <a:avLst/>
+          </a:prstGeom>
+          <a:solidFill>
+            <a:srgbClr val="D8DEE6"/>
+          </a:solidFill>
+          <a:ln w="12700">
+            <a:solidFill>
+              <a:srgbClr val="D8DEE6"/>
+            </a:solidFill>
+            <a:prstDash val="solid"/>
+          </a:ln>
+        </p:spPr>
+      </p:sp>
+      <p:sp>
+        <p:nvSpPr>
+          <p:cNvPr id="31" name="Text 29"/>
+          <p:cNvSpPr/>
+          <p:nvPr/>
+        </p:nvSpPr>
+        <p:spPr>
+          <a:xfrm>
+            <a:off x="548640" y="4160520"/>
+            <a:ext cx="1645920" cy="228600"/>
+          </a:xfrm>
+          <a:prstGeom prst="rect">
+            <a:avLst/>
+          </a:prstGeom>
+          <a:noFill/>
+          <a:ln/>
+        </p:spPr>
+        <p:txBody>
+          <a:bodyPr wrap="square" lIns="0" tIns="0" rIns="0" bIns="0" rtlCol="0" anchor="ctr"/>
+          <a:lstStyle/>
+          <a:p>
+            <a:pPr indent="0" marL="0">
+              <a:buNone/>
+            </a:pPr>
+            <a:r>
+              <a:rPr lang="en-US" sz="1100" b="1" dirty="0">
+                <a:solidFill>
+                  <a:srgbClr val="0F2A44"/>
+                </a:solidFill>
+                <a:latin typeface="Calibri" pitchFamily="34" charset="0"/>
+                <a:ea typeface="Calibri" pitchFamily="34" charset="-122"/>
+                <a:cs typeface="Calibri" pitchFamily="34" charset="-120"/>
+              </a:rPr>
+              <a:t>Grade mapping</a:t>
+            </a:r>
+            <a:endParaRPr lang="en-US" sz="1100" dirty="0"/>
+          </a:p>
+        </p:txBody>
+      </p:sp>
+      <p:sp>
+        <p:nvSpPr>
+          <p:cNvPr id="32" name="Text 30"/>
+          <p:cNvSpPr/>
+          <p:nvPr/>
+        </p:nvSpPr>
+        <p:spPr>
+          <a:xfrm>
+            <a:off x="2011680" y="4114800"/>
+            <a:ext cx="320040" cy="256032"/>
+          </a:xfrm>
+          <a:prstGeom prst="rect">
+            <a:avLst/>
+          </a:prstGeom>
+          <a:noFill/>
+          <a:ln/>
+        </p:spPr>
+        <p:txBody>
+          <a:bodyPr wrap="square" lIns="0" tIns="0" rIns="0" bIns="0" rtlCol="0" anchor="ctr"/>
+          <a:lstStyle/>
+          <a:p>
+            <a:pPr indent="0" marL="0">
+              <a:buNone/>
+            </a:pPr>
+            <a:r>
+              <a:rPr lang="en-US" sz="1200" b="1" dirty="0">
+                <a:solidFill>
+                  <a:srgbClr val="0F2A44"/>
+                </a:solidFill>
+                <a:latin typeface="Calibri" pitchFamily="34" charset="0"/>
+                <a:ea typeface="Calibri" pitchFamily="34" charset="-122"/>
+                <a:cs typeface="Calibri" pitchFamily="34" charset="-120"/>
+              </a:rPr>
+              <a:t>A</a:t>
+            </a:r>
+            <a:endParaRPr lang="en-US" sz="1200" dirty="0"/>
+          </a:p>
+        </p:txBody>
+      </p:sp>
+      <p:sp>
+        <p:nvSpPr>
+          <p:cNvPr id="33" name="Text 31"/>
+          <p:cNvSpPr/>
+          <p:nvPr/>
+        </p:nvSpPr>
+        <p:spPr>
+          <a:xfrm>
+            <a:off x="2359152" y="4142232"/>
+            <a:ext cx="685800" cy="219456"/>
+          </a:xfrm>
+          <a:prstGeom prst="rect">
+            <a:avLst/>
+          </a:prstGeom>
+          <a:noFill/>
+          <a:ln/>
+        </p:spPr>
+        <p:txBody>
+          <a:bodyPr wrap="square" lIns="0" tIns="0" rIns="0" bIns="0" rtlCol="0" anchor="ctr"/>
+          <a:lstStyle/>
+          <a:p>
+            <a:pPr indent="0" marL="0">
+              <a:buNone/>
+            </a:pPr>
+            <a:r>
+              <a:rPr lang="en-US" sz="900" dirty="0">
+                <a:solidFill>
+                  <a:srgbClr val="64748B"/>
+                </a:solidFill>
+                <a:latin typeface="Calibri" pitchFamily="34" charset="0"/>
+                <a:ea typeface="Calibri" pitchFamily="34" charset="-122"/>
+                <a:cs typeface="Calibri" pitchFamily="34" charset="-120"/>
+              </a:rPr>
+              <a:t>90-100</a:t>
+            </a:r>
+            <a:endParaRPr lang="en-US" sz="900" dirty="0"/>
+          </a:p>
+        </p:txBody>
+      </p:sp>
+      <p:sp>
+        <p:nvSpPr>
+          <p:cNvPr id="34" name="Text 32"/>
+          <p:cNvSpPr/>
+          <p:nvPr/>
+        </p:nvSpPr>
+        <p:spPr>
+          <a:xfrm>
+            <a:off x="3182112" y="4114800"/>
+            <a:ext cx="320040" cy="256032"/>
+          </a:xfrm>
+          <a:prstGeom prst="rect">
+            <a:avLst/>
+          </a:prstGeom>
+          <a:noFill/>
+          <a:ln/>
+        </p:spPr>
+        <p:txBody>
+          <a:bodyPr wrap="square" lIns="0" tIns="0" rIns="0" bIns="0" rtlCol="0" anchor="ctr"/>
+          <a:lstStyle/>
+          <a:p>
+            <a:pPr indent="0" marL="0">
+              <a:buNone/>
+            </a:pPr>
+            <a:r>
+              <a:rPr lang="en-US" sz="1200" b="1" dirty="0">
+                <a:solidFill>
+                  <a:srgbClr val="0F2A44"/>
+                </a:solidFill>
+                <a:latin typeface="Calibri" pitchFamily="34" charset="0"/>
+                <a:ea typeface="Calibri" pitchFamily="34" charset="-122"/>
+                <a:cs typeface="Calibri" pitchFamily="34" charset="-120"/>
+              </a:rPr>
+              <a:t>B</a:t>
+            </a:r>
+            <a:endParaRPr lang="en-US" sz="1200" dirty="0"/>
+          </a:p>
+        </p:txBody>
+      </p:sp>
+      <p:sp>
+        <p:nvSpPr>
+          <p:cNvPr id="35" name="Text 33"/>
+          <p:cNvSpPr/>
+          <p:nvPr/>
+        </p:nvSpPr>
+        <p:spPr>
+          <a:xfrm>
+            <a:off x="3529584" y="4142232"/>
+            <a:ext cx="685800" cy="219456"/>
+          </a:xfrm>
+          <a:prstGeom prst="rect">
+            <a:avLst/>
+          </a:prstGeom>
+          <a:noFill/>
+          <a:ln/>
+        </p:spPr>
+        <p:txBody>
+          <a:bodyPr wrap="square" lIns="0" tIns="0" rIns="0" bIns="0" rtlCol="0" anchor="ctr"/>
+          <a:lstStyle/>
+          <a:p>
+            <a:pPr indent="0" marL="0">
+              <a:buNone/>
+            </a:pPr>
+            <a:r>
+              <a:rPr lang="en-US" sz="900" dirty="0">
+                <a:solidFill>
+                  <a:srgbClr val="64748B"/>
+                </a:solidFill>
+                <a:latin typeface="Calibri" pitchFamily="34" charset="0"/>
+                <a:ea typeface="Calibri" pitchFamily="34" charset="-122"/>
+                <a:cs typeface="Calibri" pitchFamily="34" charset="-120"/>
+              </a:rPr>
+              <a:t>80-89</a:t>
+            </a:r>
+            <a:endParaRPr lang="en-US" sz="900" dirty="0"/>
+          </a:p>
+        </p:txBody>
+      </p:sp>
+      <p:sp>
+        <p:nvSpPr>
+          <p:cNvPr id="36" name="Text 34"/>
+          <p:cNvSpPr/>
+          <p:nvPr/>
+        </p:nvSpPr>
+        <p:spPr>
+          <a:xfrm>
+            <a:off x="4352544" y="4114800"/>
+            <a:ext cx="320040" cy="256032"/>
+          </a:xfrm>
+          <a:prstGeom prst="rect">
+            <a:avLst/>
+          </a:prstGeom>
+          <a:noFill/>
+          <a:ln/>
+        </p:spPr>
+        <p:txBody>
+          <a:bodyPr wrap="square" lIns="0" tIns="0" rIns="0" bIns="0" rtlCol="0" anchor="ctr"/>
+          <a:lstStyle/>
+          <a:p>
+            <a:pPr indent="0" marL="0">
+              <a:buNone/>
+            </a:pPr>
+            <a:r>
+              <a:rPr lang="en-US" sz="1200" b="1" dirty="0">
+                <a:solidFill>
+                  <a:srgbClr val="0F2A44"/>
+                </a:solidFill>
+                <a:latin typeface="Calibri" pitchFamily="34" charset="0"/>
+                <a:ea typeface="Calibri" pitchFamily="34" charset="-122"/>
+                <a:cs typeface="Calibri" pitchFamily="34" charset="-120"/>
+              </a:rPr>
+              <a:t>C</a:t>
+            </a:r>
+            <a:endParaRPr lang="en-US" sz="1200" dirty="0"/>
+          </a:p>
+        </p:txBody>
+      </p:sp>
+      <p:sp>
+        <p:nvSpPr>
+          <p:cNvPr id="37" name="Text 35"/>
+          <p:cNvSpPr/>
+          <p:nvPr/>
+        </p:nvSpPr>
+        <p:spPr>
+          <a:xfrm>
+            <a:off x="4700016" y="4142232"/>
+            <a:ext cx="685800" cy="219456"/>
+          </a:xfrm>
+          <a:prstGeom prst="rect">
+            <a:avLst/>
+          </a:prstGeom>
+          <a:noFill/>
+          <a:ln/>
+        </p:spPr>
+        <p:txBody>
+          <a:bodyPr wrap="square" lIns="0" tIns="0" rIns="0" bIns="0" rtlCol="0" anchor="ctr"/>
+          <a:lstStyle/>
+          <a:p>
+            <a:pPr indent="0" marL="0">
+              <a:buNone/>
+            </a:pPr>
+            <a:r>
+              <a:rPr lang="en-US" sz="900" dirty="0">
+                <a:solidFill>
+                  <a:srgbClr val="64748B"/>
+                </a:solidFill>
+                <a:latin typeface="Calibri" pitchFamily="34" charset="0"/>
+                <a:ea typeface="Calibri" pitchFamily="34" charset="-122"/>
+                <a:cs typeface="Calibri" pitchFamily="34" charset="-120"/>
+              </a:rPr>
+              <a:t>65-79</a:t>
+            </a:r>
+            <a:endParaRPr lang="en-US" sz="900" dirty="0"/>
+          </a:p>
+        </p:txBody>
+      </p:sp>
+      <p:sp>
+        <p:nvSpPr>
+          <p:cNvPr id="38" name="Text 36"/>
+          <p:cNvSpPr/>
+          <p:nvPr/>
+        </p:nvSpPr>
+        <p:spPr>
+          <a:xfrm>
+            <a:off x="5522976" y="4114800"/>
+            <a:ext cx="320040" cy="256032"/>
+          </a:xfrm>
+          <a:prstGeom prst="rect">
+            <a:avLst/>
+          </a:prstGeom>
+          <a:noFill/>
+          <a:ln/>
+        </p:spPr>
+        <p:txBody>
+          <a:bodyPr wrap="square" lIns="0" tIns="0" rIns="0" bIns="0" rtlCol="0" anchor="ctr"/>
+          <a:lstStyle/>
+          <a:p>
+            <a:pPr indent="0" marL="0">
+              <a:buNone/>
+            </a:pPr>
+            <a:r>
+              <a:rPr lang="en-US" sz="1200" b="1" dirty="0">
+                <a:solidFill>
+                  <a:srgbClr val="0F2A44"/>
+                </a:solidFill>
+                <a:latin typeface="Calibri" pitchFamily="34" charset="0"/>
+                <a:ea typeface="Calibri" pitchFamily="34" charset="-122"/>
+                <a:cs typeface="Calibri" pitchFamily="34" charset="-120"/>
+              </a:rPr>
+              <a:t>D</a:t>
+            </a:r>
+            <a:endParaRPr lang="en-US" sz="1200" dirty="0"/>
+          </a:p>
+        </p:txBody>
+      </p:sp>
+      <p:sp>
+        <p:nvSpPr>
+          <p:cNvPr id="39" name="Text 37"/>
+          <p:cNvSpPr/>
+          <p:nvPr/>
+        </p:nvSpPr>
+        <p:spPr>
+          <a:xfrm>
+            <a:off x="5870448" y="4142232"/>
+            <a:ext cx="685800" cy="219456"/>
+          </a:xfrm>
+          <a:prstGeom prst="rect">
+            <a:avLst/>
+          </a:prstGeom>
+          <a:noFill/>
+          <a:ln/>
+        </p:spPr>
+        <p:txBody>
+          <a:bodyPr wrap="square" lIns="0" tIns="0" rIns="0" bIns="0" rtlCol="0" anchor="ctr"/>
+          <a:lstStyle/>
+          <a:p>
+            <a:pPr indent="0" marL="0">
+              <a:buNone/>
+            </a:pPr>
+            <a:r>
+              <a:rPr lang="en-US" sz="900" dirty="0">
+                <a:solidFill>
+                  <a:srgbClr val="64748B"/>
+                </a:solidFill>
+                <a:latin typeface="Calibri" pitchFamily="34" charset="0"/>
+                <a:ea typeface="Calibri" pitchFamily="34" charset="-122"/>
+                <a:cs typeface="Calibri" pitchFamily="34" charset="-120"/>
+              </a:rPr>
+              <a:t>50-64</a:t>
+            </a:r>
+            <a:endParaRPr lang="en-US" sz="900" dirty="0"/>
+          </a:p>
+        </p:txBody>
+      </p:sp>
+      <p:sp>
+        <p:nvSpPr>
+          <p:cNvPr id="40" name="Text 38"/>
+          <p:cNvSpPr/>
+          <p:nvPr/>
+        </p:nvSpPr>
+        <p:spPr>
+          <a:xfrm>
+            <a:off x="6693408" y="4114800"/>
+            <a:ext cx="320040" cy="256032"/>
+          </a:xfrm>
+          <a:prstGeom prst="rect">
+            <a:avLst/>
+          </a:prstGeom>
+          <a:noFill/>
+          <a:ln/>
+        </p:spPr>
+        <p:txBody>
+          <a:bodyPr wrap="square" lIns="0" tIns="0" rIns="0" bIns="0" rtlCol="0" anchor="ctr"/>
+          <a:lstStyle/>
+          <a:p>
+            <a:pPr indent="0" marL="0">
+              <a:buNone/>
+            </a:pPr>
+            <a:r>
+              <a:rPr lang="en-US" sz="1200" b="1" dirty="0">
+                <a:solidFill>
+                  <a:srgbClr val="0F2A44"/>
+                </a:solidFill>
+                <a:latin typeface="Calibri" pitchFamily="34" charset="0"/>
+                <a:ea typeface="Calibri" pitchFamily="34" charset="-122"/>
+                <a:cs typeface="Calibri" pitchFamily="34" charset="-120"/>
+              </a:rPr>
+              <a:t>F</a:t>
+            </a:r>
+            <a:endParaRPr lang="en-US" sz="1200" dirty="0"/>
+          </a:p>
+        </p:txBody>
+      </p:sp>
+      <p:sp>
+        <p:nvSpPr>
+          <p:cNvPr id="41" name="Text 39"/>
+          <p:cNvSpPr/>
+          <p:nvPr/>
+        </p:nvSpPr>
+        <p:spPr>
+          <a:xfrm>
+            <a:off x="7040880" y="4142232"/>
+            <a:ext cx="685800" cy="219456"/>
+          </a:xfrm>
+          <a:prstGeom prst="rect">
+            <a:avLst/>
+          </a:prstGeom>
+          <a:noFill/>
+          <a:ln/>
+        </p:spPr>
+        <p:txBody>
+          <a:bodyPr wrap="square" lIns="0" tIns="0" rIns="0" bIns="0" rtlCol="0" anchor="ctr"/>
+          <a:lstStyle/>
+          <a:p>
+            <a:pPr indent="0" marL="0">
+              <a:buNone/>
+            </a:pPr>
+            <a:r>
+              <a:rPr lang="en-US" sz="900" dirty="0">
+                <a:solidFill>
+                  <a:srgbClr val="64748B"/>
+                </a:solidFill>
+                <a:latin typeface="Calibri" pitchFamily="34" charset="0"/>
+                <a:ea typeface="Calibri" pitchFamily="34" charset="-122"/>
+                <a:cs typeface="Calibri" pitchFamily="34" charset="-120"/>
+              </a:rPr>
+              <a:t>&lt; 50</a:t>
+            </a:r>
+            <a:endParaRPr lang="en-US" sz="900" dirty="0"/>
+          </a:p>
+        </p:txBody>
+      </p:sp>
+      <p:sp>
+        <p:nvSpPr>
+          <p:cNvPr id="42" name="Text 40"/>
+          <p:cNvSpPr/>
+          <p:nvPr/>
+        </p:nvSpPr>
+        <p:spPr>
+          <a:xfrm>
+            <a:off x="7452360" y="4864608"/>
+            <a:ext cx="1143000" cy="228600"/>
+          </a:xfrm>
+          <a:prstGeom prst="rect">
+            <a:avLst/>
+          </a:prstGeom>
+          <a:noFill/>
+          <a:ln/>
+        </p:spPr>
+        <p:txBody>
+          <a:bodyPr wrap="square" lIns="0" tIns="0" rIns="0" bIns="0" rtlCol="0" anchor="ctr"/>
+          <a:lstStyle/>
+          <a:p>
+            <a:pPr algn="r" indent="0" marL="0">
+              <a:buNone/>
+            </a:pPr>
+            <a:r>
+              <a:rPr lang="en-US" sz="900" dirty="0">
+                <a:solidFill>
+                  <a:srgbClr val="64748B"/>
+                </a:solidFill>
+                <a:latin typeface="Calibri" pitchFamily="34" charset="0"/>
+                <a:ea typeface="Calibri" pitchFamily="34" charset="-122"/>
+                <a:cs typeface="Calibri" pitchFamily="34" charset="-120"/>
+              </a:rPr>
+              <a:t>Appendix C</a:t>
+            </a:r>
+            <a:endParaRPr lang="en-US" sz="900" dirty="0"/>
+          </a:p>
+        </p:txBody>
+      </p:sp>
+    </p:spTree>
+  </p:cSld>
+  <p:clrMapOvr>
+    <a:masterClrMapping/>
+  </p:clrMapOvr>
+</p:sld>
+</file>
+
+<file path=ppt/slides/slide19.xml><?xml version="1.0" encoding="utf-8"?>
+<p:sld xmlns:a="http://schemas.openxmlformats.org/drawingml/2006/main" xmlns:r="http://schemas.openxmlformats.org/officeDocument/2006/relationships" xmlns:p="http://schemas.openxmlformats.org/presentationml/2006/main">
+  <p:cSld name="Slide 19">
+    <p:bg>
+      <p:bgPr>
+        <a:solidFill>
+          <a:srgbClr val="FFFFFF"/>
+        </a:solidFill>
+      </p:bgPr>
+    </p:bg>
+    <p:spTree>
+      <p:nvGrpSpPr>
+        <p:cNvPr id="1" name=""/>
+        <p:cNvGrpSpPr/>
+        <p:nvPr/>
+      </p:nvGrpSpPr>
+      <p:grpSpPr>
+        <a:xfrm>
+          <a:off x="0" y="0"/>
+          <a:ext cx="0" cy="0"/>
+          <a:chOff x="0" y="0"/>
+          <a:chExt cx="0" cy="0"/>
+        </a:xfrm>
+      </p:grpSpPr>
+      <p:sp>
+        <p:nvSpPr>
+          <p:cNvPr id="2" name="Text 0"/>
+          <p:cNvSpPr/>
+          <p:nvPr/>
+        </p:nvSpPr>
+        <p:spPr>
+          <a:xfrm>
+            <a:off x="548640" y="256032"/>
+            <a:ext cx="8046720" cy="502920"/>
+          </a:xfrm>
+          <a:prstGeom prst="rect">
+            <a:avLst/>
+          </a:prstGeom>
+          <a:noFill/>
+          <a:ln/>
+        </p:spPr>
+        <p:txBody>
+          <a:bodyPr wrap="square" lIns="0" tIns="0" rIns="0" bIns="0" rtlCol="0" anchor="ctr"/>
+          <a:lstStyle/>
+          <a:p>
+            <a:pPr indent="0" marL="0">
+              <a:buNone/>
+            </a:pPr>
+            <a:r>
+              <a:rPr lang="en-US" sz="2500" b="1" dirty="0">
+                <a:solidFill>
+                  <a:srgbClr val="0F2A44"/>
+                </a:solidFill>
+                <a:latin typeface="Calibri" pitchFamily="34" charset="0"/>
+                <a:ea typeface="Calibri" pitchFamily="34" charset="-122"/>
+                <a:cs typeface="Calibri" pitchFamily="34" charset="-120"/>
+              </a:rPr>
+              <a:t>Annex: detector thresholds</a:t>
+            </a:r>
+            <a:endParaRPr lang="en-US" sz="2500" dirty="0"/>
+          </a:p>
+        </p:txBody>
+      </p:sp>
+      <p:sp>
+        <p:nvSpPr>
+          <p:cNvPr id="3" name="Shape 1"/>
+          <p:cNvSpPr/>
+          <p:nvPr/>
+        </p:nvSpPr>
+        <p:spPr>
+          <a:xfrm>
+            <a:off x="548640" y="841248"/>
+            <a:ext cx="8046720" cy="13716"/>
+          </a:xfrm>
+          <a:prstGeom prst="rect">
+            <a:avLst/>
+          </a:prstGeom>
+          <a:solidFill>
+            <a:srgbClr val="D8DEE6"/>
+          </a:solidFill>
+          <a:ln w="12700">
+            <a:solidFill>
+              <a:srgbClr val="D8DEE6"/>
+            </a:solidFill>
+            <a:prstDash val="solid"/>
+          </a:ln>
+        </p:spPr>
+      </p:sp>
+      <p:sp>
+        <p:nvSpPr>
+          <p:cNvPr id="4" name="Text 2"/>
+          <p:cNvSpPr/>
+          <p:nvPr/>
+        </p:nvSpPr>
+        <p:spPr>
+          <a:xfrm>
+            <a:off x="548640" y="1005840"/>
+            <a:ext cx="1234440" cy="228600"/>
+          </a:xfrm>
+          <a:prstGeom prst="rect">
+            <a:avLst/>
+          </a:prstGeom>
+          <a:noFill/>
+          <a:ln/>
+        </p:spPr>
+        <p:txBody>
+          <a:bodyPr wrap="square" lIns="0" tIns="0" rIns="0" bIns="0" rtlCol="0" anchor="ctr"/>
+          <a:lstStyle/>
+          <a:p>
+            <a:pPr indent="0" marL="0">
+              <a:buNone/>
+            </a:pPr>
+            <a:r>
+              <a:rPr lang="en-US" sz="780" b="1" spc="110" kern="0" dirty="0">
+                <a:solidFill>
+                  <a:srgbClr val="0F2A44"/>
+                </a:solidFill>
+                <a:latin typeface="Calibri" pitchFamily="34" charset="0"/>
+                <a:ea typeface="Calibri" pitchFamily="34" charset="-122"/>
+                <a:cs typeface="Calibri" pitchFamily="34" charset="-120"/>
+              </a:rPr>
+              <a:t>DETECTOR</a:t>
+            </a:r>
+            <a:endParaRPr lang="en-US" sz="780" dirty="0"/>
+          </a:p>
+        </p:txBody>
+      </p:sp>
+      <p:sp>
+        <p:nvSpPr>
+          <p:cNvPr id="5" name="Text 3"/>
+          <p:cNvSpPr/>
+          <p:nvPr/>
+        </p:nvSpPr>
+        <p:spPr>
+          <a:xfrm>
+            <a:off x="1691640" y="1005840"/>
+            <a:ext cx="2423160" cy="228600"/>
+          </a:xfrm>
+          <a:prstGeom prst="rect">
+            <a:avLst/>
+          </a:prstGeom>
+          <a:noFill/>
+          <a:ln/>
+        </p:spPr>
+        <p:txBody>
+          <a:bodyPr wrap="square" lIns="0" tIns="0" rIns="0" bIns="0" rtlCol="0" anchor="ctr"/>
+          <a:lstStyle/>
+          <a:p>
+            <a:pPr indent="0" marL="0">
+              <a:buNone/>
+            </a:pPr>
+            <a:r>
+              <a:rPr lang="en-US" sz="780" b="1" spc="110" kern="0" dirty="0">
+                <a:solidFill>
+                  <a:srgbClr val="0F2A44"/>
+                </a:solidFill>
+                <a:latin typeface="Calibri" pitchFamily="34" charset="0"/>
+                <a:ea typeface="Calibri" pitchFamily="34" charset="-122"/>
+                <a:cs typeface="Calibri" pitchFamily="34" charset="-120"/>
+              </a:rPr>
+              <a:t>SIGNAL</a:t>
+            </a:r>
+            <a:endParaRPr lang="en-US" sz="780" dirty="0"/>
+          </a:p>
+        </p:txBody>
+      </p:sp>
+      <p:sp>
+        <p:nvSpPr>
+          <p:cNvPr id="6" name="Text 4"/>
+          <p:cNvSpPr/>
+          <p:nvPr/>
+        </p:nvSpPr>
+        <p:spPr>
+          <a:xfrm>
+            <a:off x="4251960" y="1005840"/>
+            <a:ext cx="1325880" cy="228600"/>
+          </a:xfrm>
+          <a:prstGeom prst="rect">
+            <a:avLst/>
+          </a:prstGeom>
+          <a:noFill/>
+          <a:ln/>
+        </p:spPr>
+        <p:txBody>
+          <a:bodyPr wrap="square" lIns="0" tIns="0" rIns="0" bIns="0" rtlCol="0" anchor="ctr"/>
+          <a:lstStyle/>
+          <a:p>
+            <a:pPr indent="0" marL="0">
+              <a:buNone/>
+            </a:pPr>
+            <a:r>
+              <a:rPr lang="en-US" sz="780" b="1" spc="110" kern="0" dirty="0">
+                <a:solidFill>
+                  <a:srgbClr val="0F2A44"/>
+                </a:solidFill>
+                <a:latin typeface="Calibri" pitchFamily="34" charset="0"/>
+                <a:ea typeface="Calibri" pitchFamily="34" charset="-122"/>
+                <a:cs typeface="Calibri" pitchFamily="34" charset="-120"/>
+              </a:rPr>
+              <a:t>THRESHOLD</a:t>
+            </a:r>
+            <a:endParaRPr lang="en-US" sz="780" dirty="0"/>
+          </a:p>
+        </p:txBody>
+      </p:sp>
+      <p:sp>
+        <p:nvSpPr>
+          <p:cNvPr id="7" name="Text 5"/>
+          <p:cNvSpPr/>
+          <p:nvPr/>
+        </p:nvSpPr>
+        <p:spPr>
+          <a:xfrm>
+            <a:off x="5715000" y="1005840"/>
+            <a:ext cx="685800" cy="228600"/>
+          </a:xfrm>
+          <a:prstGeom prst="rect">
+            <a:avLst/>
+          </a:prstGeom>
+          <a:noFill/>
+          <a:ln/>
+        </p:spPr>
+        <p:txBody>
+          <a:bodyPr wrap="square" lIns="0" tIns="0" rIns="0" bIns="0" rtlCol="0" anchor="ctr"/>
+          <a:lstStyle/>
+          <a:p>
+            <a:pPr indent="0" marL="0">
+              <a:buNone/>
+            </a:pPr>
+            <a:r>
+              <a:rPr lang="en-US" sz="780" b="1" spc="110" kern="0" dirty="0">
+                <a:solidFill>
+                  <a:srgbClr val="0F2A44"/>
+                </a:solidFill>
+                <a:latin typeface="Calibri" pitchFamily="34" charset="0"/>
+                <a:ea typeface="Calibri" pitchFamily="34" charset="-122"/>
+                <a:cs typeface="Calibri" pitchFamily="34" charset="-120"/>
+              </a:rPr>
+              <a:t>SEVERITY</a:t>
+            </a:r>
+            <a:endParaRPr lang="en-US" sz="780" dirty="0"/>
+          </a:p>
+        </p:txBody>
+      </p:sp>
+      <p:sp>
+        <p:nvSpPr>
+          <p:cNvPr id="8" name="Text 6"/>
+          <p:cNvSpPr/>
+          <p:nvPr/>
+        </p:nvSpPr>
+        <p:spPr>
+          <a:xfrm>
+            <a:off x="6537960" y="1005840"/>
+            <a:ext cx="2057400" cy="228600"/>
+          </a:xfrm>
+          <a:prstGeom prst="rect">
+            <a:avLst/>
+          </a:prstGeom>
+          <a:noFill/>
+          <a:ln/>
+        </p:spPr>
+        <p:txBody>
+          <a:bodyPr wrap="square" lIns="0" tIns="0" rIns="0" bIns="0" rtlCol="0" anchor="ctr"/>
+          <a:lstStyle/>
+          <a:p>
+            <a:pPr indent="0" marL="0">
+              <a:buNone/>
+            </a:pPr>
+            <a:r>
+              <a:rPr lang="en-US" sz="780" b="1" spc="110" kern="0" dirty="0">
+                <a:solidFill>
+                  <a:srgbClr val="0F2A44"/>
+                </a:solidFill>
+                <a:latin typeface="Calibri" pitchFamily="34" charset="0"/>
+                <a:ea typeface="Calibri" pitchFamily="34" charset="-122"/>
+                <a:cs typeface="Calibri" pitchFamily="34" charset="-120"/>
+              </a:rPr>
+              <a:t>RATIONALE</a:t>
+            </a:r>
+            <a:endParaRPr lang="en-US" sz="780" dirty="0"/>
+          </a:p>
+        </p:txBody>
+      </p:sp>
+      <p:sp>
+        <p:nvSpPr>
+          <p:cNvPr id="9" name="Shape 7"/>
+          <p:cNvSpPr/>
+          <p:nvPr/>
+        </p:nvSpPr>
+        <p:spPr>
+          <a:xfrm>
+            <a:off x="548640" y="1298448"/>
+            <a:ext cx="8046720" cy="13716"/>
+          </a:xfrm>
+          <a:prstGeom prst="rect">
+            <a:avLst/>
+          </a:prstGeom>
+          <a:solidFill>
+            <a:srgbClr val="D8DEE6"/>
+          </a:solidFill>
+          <a:ln w="12700">
+            <a:solidFill>
+              <a:srgbClr val="D8DEE6"/>
+            </a:solidFill>
+            <a:prstDash val="solid"/>
+          </a:ln>
+        </p:spPr>
+      </p:sp>
+      <p:sp>
+        <p:nvSpPr>
+          <p:cNvPr id="10" name="Text 8"/>
+          <p:cNvSpPr/>
+          <p:nvPr/>
+        </p:nvSpPr>
+        <p:spPr>
+          <a:xfrm>
+            <a:off x="548640" y="1408176"/>
+            <a:ext cx="1234440" cy="219456"/>
+          </a:xfrm>
+          <a:prstGeom prst="rect">
+            <a:avLst/>
+          </a:prstGeom>
+          <a:noFill/>
+          <a:ln/>
+        </p:spPr>
+        <p:txBody>
+          <a:bodyPr wrap="square" lIns="0" tIns="0" rIns="0" bIns="0" rtlCol="0" anchor="ctr">
+            <a:normAutofit/>
+          </a:bodyPr>
+          <a:lstStyle/>
+          <a:p>
+            <a:pPr indent="0" marL="0">
+              <a:buNone/>
+            </a:pPr>
+            <a:r>
+              <a:rPr lang="en-US" sz="870" b="1" dirty="0">
+                <a:solidFill>
+                  <a:srgbClr val="1E293B"/>
+                </a:solidFill>
+                <a:latin typeface="Calibri" pitchFamily="34" charset="0"/>
+                <a:ea typeface="Calibri" pitchFamily="34" charset="-122"/>
+                <a:cs typeface="Calibri" pitchFamily="34" charset="-120"/>
+              </a:rPr>
+              <a:t>Shared DB</a:t>
+            </a:r>
+            <a:endParaRPr lang="en-US" sz="870" dirty="0"/>
+          </a:p>
+        </p:txBody>
+      </p:sp>
+      <p:sp>
+        <p:nvSpPr>
+          <p:cNvPr id="11" name="Text 9"/>
+          <p:cNvSpPr/>
+          <p:nvPr/>
+        </p:nvSpPr>
+        <p:spPr>
+          <a:xfrm>
+            <a:off x="1691640" y="1408176"/>
+            <a:ext cx="2423160" cy="219456"/>
+          </a:xfrm>
+          <a:prstGeom prst="rect">
+            <a:avLst/>
+          </a:prstGeom>
+          <a:noFill/>
+          <a:ln/>
+        </p:spPr>
+        <p:txBody>
+          <a:bodyPr wrap="square" lIns="0" tIns="0" rIns="0" bIns="0" rtlCol="0" anchor="ctr">
+            <a:normAutofit/>
+          </a:bodyPr>
+          <a:lstStyle/>
+          <a:p>
+            <a:pPr indent="0" marL="0">
+              <a:buNone/>
+            </a:pPr>
+            <a:r>
+              <a:rPr lang="en-US" sz="770" dirty="0">
+                <a:solidFill>
+                  <a:srgbClr val="1E293B"/>
+                </a:solidFill>
+                <a:latin typeface="Calibri" pitchFamily="34" charset="0"/>
+                <a:ea typeface="Calibri" pitchFamily="34" charset="-122"/>
+                <a:cs typeface="Calibri" pitchFamily="34" charset="-120"/>
+              </a:rPr>
+              <a:t>same datasource URL in &gt;1 service</a:t>
+            </a:r>
+            <a:endParaRPr lang="en-US" sz="770" dirty="0"/>
+          </a:p>
+        </p:txBody>
+      </p:sp>
+      <p:sp>
+        <p:nvSpPr>
+          <p:cNvPr id="12" name="Text 10"/>
+          <p:cNvSpPr/>
+          <p:nvPr/>
+        </p:nvSpPr>
+        <p:spPr>
+          <a:xfrm>
+            <a:off x="4251960" y="1408176"/>
+            <a:ext cx="1325880" cy="219456"/>
+          </a:xfrm>
+          <a:prstGeom prst="rect">
+            <a:avLst/>
+          </a:prstGeom>
+          <a:noFill/>
+          <a:ln/>
+        </p:spPr>
+        <p:txBody>
+          <a:bodyPr wrap="square" lIns="0" tIns="0" rIns="0" bIns="0" rtlCol="0" anchor="ctr">
+            <a:normAutofit/>
+          </a:bodyPr>
+          <a:lstStyle/>
+          <a:p>
+            <a:pPr indent="0" marL="0">
+              <a:buNone/>
+            </a:pPr>
+            <a:r>
+              <a:rPr lang="en-US" sz="770" dirty="0">
+                <a:solidFill>
+                  <a:srgbClr val="1E293B"/>
+                </a:solidFill>
+                <a:latin typeface="Calibri" pitchFamily="34" charset="0"/>
+                <a:ea typeface="Calibri" pitchFamily="34" charset="-122"/>
+                <a:cs typeface="Calibri" pitchFamily="34" charset="-120"/>
+              </a:rPr>
+              <a:t>&gt;1 service</a:t>
+            </a:r>
+            <a:endParaRPr lang="en-US" sz="770" dirty="0"/>
+          </a:p>
+        </p:txBody>
+      </p:sp>
+      <p:sp>
+        <p:nvSpPr>
+          <p:cNvPr id="13" name="Text 11"/>
+          <p:cNvSpPr/>
+          <p:nvPr/>
+        </p:nvSpPr>
+        <p:spPr>
+          <a:xfrm>
+            <a:off x="5715000" y="1408176"/>
+            <a:ext cx="685800" cy="219456"/>
+          </a:xfrm>
+          <a:prstGeom prst="rect">
+            <a:avLst/>
+          </a:prstGeom>
+          <a:noFill/>
+          <a:ln/>
+        </p:spPr>
+        <p:txBody>
+          <a:bodyPr wrap="square" lIns="0" tIns="0" rIns="0" bIns="0" rtlCol="0" anchor="ctr">
+            <a:normAutofit/>
+          </a:bodyPr>
+          <a:lstStyle/>
+          <a:p>
+            <a:pPr indent="0" marL="0">
+              <a:buNone/>
+            </a:pPr>
+            <a:r>
+              <a:rPr lang="en-US" sz="770" b="1" dirty="0">
+                <a:solidFill>
+                  <a:srgbClr val="D97706"/>
+                </a:solidFill>
+                <a:latin typeface="Calibri" pitchFamily="34" charset="0"/>
+                <a:ea typeface="Calibri" pitchFamily="34" charset="-122"/>
+                <a:cs typeface="Calibri" pitchFamily="34" charset="-120"/>
+              </a:rPr>
+              <a:t>High</a:t>
+            </a:r>
+            <a:endParaRPr lang="en-US" sz="770" dirty="0"/>
+          </a:p>
+        </p:txBody>
+      </p:sp>
+      <p:sp>
+        <p:nvSpPr>
+          <p:cNvPr id="14" name="Text 12"/>
+          <p:cNvSpPr/>
+          <p:nvPr/>
+        </p:nvSpPr>
+        <p:spPr>
+          <a:xfrm>
+            <a:off x="6537960" y="1408176"/>
+            <a:ext cx="2057400" cy="219456"/>
+          </a:xfrm>
+          <a:prstGeom prst="rect">
+            <a:avLst/>
+          </a:prstGeom>
+          <a:noFill/>
+          <a:ln/>
+        </p:spPr>
+        <p:txBody>
+          <a:bodyPr wrap="square" lIns="0" tIns="0" rIns="0" bIns="0" rtlCol="0" anchor="ctr">
+            <a:normAutofit/>
+          </a:bodyPr>
+          <a:lstStyle/>
+          <a:p>
+            <a:pPr indent="0" marL="0">
+              <a:buNone/>
+            </a:pPr>
+            <a:r>
+              <a:rPr lang="en-US" sz="770" dirty="0">
+                <a:solidFill>
+                  <a:srgbClr val="1E293B"/>
+                </a:solidFill>
+                <a:latin typeface="Calibri" pitchFamily="34" charset="0"/>
+                <a:ea typeface="Calibri" pitchFamily="34" charset="-122"/>
+                <a:cs typeface="Calibri" pitchFamily="34" charset="-120"/>
+              </a:rPr>
+              <a:t>lost data ownership</a:t>
+            </a:r>
+            <a:endParaRPr lang="en-US" sz="770" dirty="0"/>
+          </a:p>
+        </p:txBody>
+      </p:sp>
+      <p:sp>
+        <p:nvSpPr>
+          <p:cNvPr id="15" name="Shape 13"/>
+          <p:cNvSpPr/>
+          <p:nvPr/>
+        </p:nvSpPr>
+        <p:spPr>
+          <a:xfrm>
+            <a:off x="548640" y="1655064"/>
+            <a:ext cx="8046720" cy="7315"/>
+          </a:xfrm>
+          <a:prstGeom prst="rect">
+            <a:avLst/>
+          </a:prstGeom>
+          <a:solidFill>
+            <a:srgbClr val="D8DEE6"/>
+          </a:solidFill>
+          <a:ln w="12700">
+            <a:solidFill>
+              <a:srgbClr val="D8DEE6"/>
+            </a:solidFill>
+            <a:prstDash val="solid"/>
+          </a:ln>
+        </p:spPr>
+      </p:sp>
+      <p:sp>
+        <p:nvSpPr>
+          <p:cNvPr id="16" name="Text 14"/>
+          <p:cNvSpPr/>
+          <p:nvPr/>
+        </p:nvSpPr>
+        <p:spPr>
+          <a:xfrm>
+            <a:off x="548640" y="1719072"/>
+            <a:ext cx="1234440" cy="219456"/>
+          </a:xfrm>
+          <a:prstGeom prst="rect">
+            <a:avLst/>
+          </a:prstGeom>
+          <a:noFill/>
+          <a:ln/>
+        </p:spPr>
+        <p:txBody>
+          <a:bodyPr wrap="square" lIns="0" tIns="0" rIns="0" bIns="0" rtlCol="0" anchor="ctr">
+            <a:normAutofit/>
+          </a:bodyPr>
+          <a:lstStyle/>
+          <a:p>
+            <a:pPr indent="0" marL="0">
+              <a:buNone/>
+            </a:pPr>
+            <a:r>
+              <a:rPr lang="en-US" sz="870" b="1" dirty="0">
+                <a:solidFill>
+                  <a:srgbClr val="1E293B"/>
+                </a:solidFill>
+                <a:latin typeface="Calibri" pitchFamily="34" charset="0"/>
+                <a:ea typeface="Calibri" pitchFamily="34" charset="-122"/>
+                <a:cs typeface="Calibri" pitchFamily="34" charset="-120"/>
+              </a:rPr>
+              <a:t>Cyclic Dep.</a:t>
+            </a:r>
+            <a:endParaRPr lang="en-US" sz="870" dirty="0"/>
+          </a:p>
+        </p:txBody>
+      </p:sp>
+      <p:sp>
+        <p:nvSpPr>
+          <p:cNvPr id="17" name="Text 15"/>
+          <p:cNvSpPr/>
+          <p:nvPr/>
+        </p:nvSpPr>
+        <p:spPr>
+          <a:xfrm>
+            <a:off x="1691640" y="1719072"/>
+            <a:ext cx="2423160" cy="219456"/>
+          </a:xfrm>
+          <a:prstGeom prst="rect">
+            <a:avLst/>
+          </a:prstGeom>
+          <a:noFill/>
+          <a:ln/>
+        </p:spPr>
+        <p:txBody>
+          <a:bodyPr wrap="square" lIns="0" tIns="0" rIns="0" bIns="0" rtlCol="0" anchor="ctr">
+            <a:normAutofit/>
+          </a:bodyPr>
+          <a:lstStyle/>
+          <a:p>
+            <a:pPr indent="0" marL="0">
+              <a:buNone/>
+            </a:pPr>
+            <a:r>
+              <a:rPr lang="en-US" sz="770" dirty="0">
+                <a:solidFill>
+                  <a:srgbClr val="1E293B"/>
+                </a:solidFill>
+                <a:latin typeface="Calibri" pitchFamily="34" charset="0"/>
+                <a:ea typeface="Calibri" pitchFamily="34" charset="-122"/>
+                <a:cs typeface="Calibri" pitchFamily="34" charset="-120"/>
+              </a:rPr>
+              <a:t>Tarjan SCC in service graph</a:t>
+            </a:r>
+            <a:endParaRPr lang="en-US" sz="770" dirty="0"/>
+          </a:p>
+        </p:txBody>
+      </p:sp>
+      <p:sp>
+        <p:nvSpPr>
+          <p:cNvPr id="18" name="Text 16"/>
+          <p:cNvSpPr/>
+          <p:nvPr/>
+        </p:nvSpPr>
+        <p:spPr>
+          <a:xfrm>
+            <a:off x="4251960" y="1719072"/>
+            <a:ext cx="1325880" cy="219456"/>
+          </a:xfrm>
+          <a:prstGeom prst="rect">
+            <a:avLst/>
+          </a:prstGeom>
+          <a:noFill/>
+          <a:ln/>
+        </p:spPr>
+        <p:txBody>
+          <a:bodyPr wrap="square" lIns="0" tIns="0" rIns="0" bIns="0" rtlCol="0" anchor="ctr">
+            <a:normAutofit/>
+          </a:bodyPr>
+          <a:lstStyle/>
+          <a:p>
+            <a:pPr indent="0" marL="0">
+              <a:buNone/>
+            </a:pPr>
+            <a:r>
+              <a:rPr lang="en-US" sz="770" dirty="0">
+                <a:solidFill>
+                  <a:srgbClr val="1E293B"/>
+                </a:solidFill>
+                <a:latin typeface="Calibri" pitchFamily="34" charset="0"/>
+                <a:ea typeface="Calibri" pitchFamily="34" charset="-122"/>
+                <a:cs typeface="Calibri" pitchFamily="34" charset="-120"/>
+              </a:rPr>
+              <a:t>SCC size &gt;1</a:t>
+            </a:r>
+            <a:endParaRPr lang="en-US" sz="770" dirty="0"/>
+          </a:p>
+        </p:txBody>
+      </p:sp>
+      <p:sp>
+        <p:nvSpPr>
+          <p:cNvPr id="19" name="Text 17"/>
+          <p:cNvSpPr/>
+          <p:nvPr/>
+        </p:nvSpPr>
+        <p:spPr>
+          <a:xfrm>
+            <a:off x="5715000" y="1719072"/>
+            <a:ext cx="685800" cy="219456"/>
+          </a:xfrm>
+          <a:prstGeom prst="rect">
+            <a:avLst/>
+          </a:prstGeom>
+          <a:noFill/>
+          <a:ln/>
+        </p:spPr>
+        <p:txBody>
+          <a:bodyPr wrap="square" lIns="0" tIns="0" rIns="0" bIns="0" rtlCol="0" anchor="ctr">
+            <a:normAutofit/>
+          </a:bodyPr>
+          <a:lstStyle/>
+          <a:p>
+            <a:pPr indent="0" marL="0">
+              <a:buNone/>
+            </a:pPr>
+            <a:r>
+              <a:rPr lang="en-US" sz="770" b="1" dirty="0">
+                <a:solidFill>
+                  <a:srgbClr val="DC2626"/>
+                </a:solidFill>
+                <a:latin typeface="Calibri" pitchFamily="34" charset="0"/>
+                <a:ea typeface="Calibri" pitchFamily="34" charset="-122"/>
+                <a:cs typeface="Calibri" pitchFamily="34" charset="-120"/>
+              </a:rPr>
+              <a:t>Crit.</a:t>
+            </a:r>
+            <a:endParaRPr lang="en-US" sz="770" dirty="0"/>
+          </a:p>
+        </p:txBody>
+      </p:sp>
+      <p:sp>
+        <p:nvSpPr>
+          <p:cNvPr id="20" name="Text 18"/>
+          <p:cNvSpPr/>
+          <p:nvPr/>
+        </p:nvSpPr>
+        <p:spPr>
+          <a:xfrm>
+            <a:off x="6537960" y="1719072"/>
+            <a:ext cx="2057400" cy="219456"/>
+          </a:xfrm>
+          <a:prstGeom prst="rect">
+            <a:avLst/>
+          </a:prstGeom>
+          <a:noFill/>
+          <a:ln/>
+        </p:spPr>
+        <p:txBody>
+          <a:bodyPr wrap="square" lIns="0" tIns="0" rIns="0" bIns="0" rtlCol="0" anchor="ctr">
+            <a:normAutofit/>
+          </a:bodyPr>
+          <a:lstStyle/>
+          <a:p>
+            <a:pPr indent="0" marL="0">
+              <a:buNone/>
+            </a:pPr>
+            <a:r>
+              <a:rPr lang="en-US" sz="770" dirty="0">
+                <a:solidFill>
+                  <a:srgbClr val="1E293B"/>
+                </a:solidFill>
+                <a:latin typeface="Calibri" pitchFamily="34" charset="0"/>
+                <a:ea typeface="Calibri" pitchFamily="34" charset="-122"/>
+                <a:cs typeface="Calibri" pitchFamily="34" charset="-120"/>
+              </a:rPr>
+              <a:t>deployability blocked</a:t>
+            </a:r>
+            <a:endParaRPr lang="en-US" sz="770" dirty="0"/>
+          </a:p>
+        </p:txBody>
+      </p:sp>
+      <p:sp>
+        <p:nvSpPr>
+          <p:cNvPr id="21" name="Shape 19"/>
+          <p:cNvSpPr/>
+          <p:nvPr/>
+        </p:nvSpPr>
+        <p:spPr>
+          <a:xfrm>
+            <a:off x="548640" y="1965960"/>
+            <a:ext cx="8046720" cy="7315"/>
+          </a:xfrm>
+          <a:prstGeom prst="rect">
+            <a:avLst/>
+          </a:prstGeom>
+          <a:solidFill>
+            <a:srgbClr val="D8DEE6"/>
+          </a:solidFill>
+          <a:ln w="12700">
+            <a:solidFill>
+              <a:srgbClr val="D8DEE6"/>
+            </a:solidFill>
+            <a:prstDash val="solid"/>
+          </a:ln>
+        </p:spPr>
+      </p:sp>
+      <p:sp>
+        <p:nvSpPr>
+          <p:cNvPr id="22" name="Text 20"/>
+          <p:cNvSpPr/>
+          <p:nvPr/>
+        </p:nvSpPr>
+        <p:spPr>
+          <a:xfrm>
+            <a:off x="548640" y="2029968"/>
+            <a:ext cx="1234440" cy="219456"/>
+          </a:xfrm>
+          <a:prstGeom prst="rect">
+            <a:avLst/>
+          </a:prstGeom>
+          <a:noFill/>
+          <a:ln/>
+        </p:spPr>
+        <p:txBody>
+          <a:bodyPr wrap="square" lIns="0" tIns="0" rIns="0" bIns="0" rtlCol="0" anchor="ctr">
+            <a:normAutofit/>
+          </a:bodyPr>
+          <a:lstStyle/>
+          <a:p>
+            <a:pPr indent="0" marL="0">
+              <a:buNone/>
+            </a:pPr>
+            <a:r>
+              <a:rPr lang="en-US" sz="870" b="1" dirty="0">
+                <a:solidFill>
+                  <a:srgbClr val="1E293B"/>
+                </a:solidFill>
+                <a:latin typeface="Calibri" pitchFamily="34" charset="0"/>
+                <a:ea typeface="Calibri" pitchFamily="34" charset="-122"/>
+                <a:cs typeface="Calibri" pitchFamily="34" charset="-120"/>
+              </a:rPr>
+              <a:t>Chatty Service</a:t>
+            </a:r>
+            <a:endParaRPr lang="en-US" sz="870" dirty="0"/>
+          </a:p>
+        </p:txBody>
+      </p:sp>
+      <p:sp>
+        <p:nvSpPr>
+          <p:cNvPr id="23" name="Text 21"/>
+          <p:cNvSpPr/>
+          <p:nvPr/>
+        </p:nvSpPr>
+        <p:spPr>
+          <a:xfrm>
+            <a:off x="1691640" y="2029968"/>
+            <a:ext cx="2423160" cy="219456"/>
+          </a:xfrm>
+          <a:prstGeom prst="rect">
+            <a:avLst/>
+          </a:prstGeom>
+          <a:noFill/>
+          <a:ln/>
+        </p:spPr>
+        <p:txBody>
+          <a:bodyPr wrap="square" lIns="0" tIns="0" rIns="0" bIns="0" rtlCol="0" anchor="ctr">
+            <a:normAutofit/>
+          </a:bodyPr>
+          <a:lstStyle/>
+          <a:p>
+            <a:pPr indent="0" marL="0">
+              <a:buNone/>
+            </a:pPr>
+            <a:r>
+              <a:rPr lang="en-US" sz="770" dirty="0">
+                <a:solidFill>
+                  <a:srgbClr val="1E293B"/>
+                </a:solidFill>
+                <a:latin typeface="Calibri" pitchFamily="34" charset="0"/>
+                <a:ea typeface="Calibri" pitchFamily="34" charset="-122"/>
+                <a:cs typeface="Calibri" pitchFamily="34" charset="-120"/>
+              </a:rPr>
+              <a:t>edge call volume or wide Feign client</a:t>
+            </a:r>
+            <a:endParaRPr lang="en-US" sz="770" dirty="0"/>
+          </a:p>
+        </p:txBody>
+      </p:sp>
+      <p:sp>
+        <p:nvSpPr>
+          <p:cNvPr id="24" name="Text 22"/>
+          <p:cNvSpPr/>
+          <p:nvPr/>
+        </p:nvSpPr>
+        <p:spPr>
+          <a:xfrm>
+            <a:off x="4251960" y="2029968"/>
+            <a:ext cx="1325880" cy="219456"/>
+          </a:xfrm>
+          <a:prstGeom prst="rect">
+            <a:avLst/>
+          </a:prstGeom>
+          <a:noFill/>
+          <a:ln/>
+        </p:spPr>
+        <p:txBody>
+          <a:bodyPr wrap="square" lIns="0" tIns="0" rIns="0" bIns="0" rtlCol="0" anchor="ctr">
+            <a:normAutofit/>
+          </a:bodyPr>
+          <a:lstStyle/>
+          <a:p>
+            <a:pPr indent="0" marL="0">
+              <a:buNone/>
+            </a:pPr>
+            <a:r>
+              <a:rPr lang="en-US" sz="770" dirty="0">
+                <a:solidFill>
+                  <a:srgbClr val="1E293B"/>
+                </a:solidFill>
+                <a:latin typeface="Calibri" pitchFamily="34" charset="0"/>
+                <a:ea typeface="Calibri" pitchFamily="34" charset="-122"/>
+                <a:cs typeface="Calibri" pitchFamily="34" charset="-120"/>
+              </a:rPr>
+              <a:t>&gt;=5 calls/methods</a:t>
+            </a:r>
+            <a:endParaRPr lang="en-US" sz="770" dirty="0"/>
+          </a:p>
+        </p:txBody>
+      </p:sp>
+      <p:sp>
+        <p:nvSpPr>
+          <p:cNvPr id="25" name="Text 23"/>
+          <p:cNvSpPr/>
+          <p:nvPr/>
+        </p:nvSpPr>
+        <p:spPr>
+          <a:xfrm>
+            <a:off x="5715000" y="2029968"/>
+            <a:ext cx="685800" cy="219456"/>
+          </a:xfrm>
+          <a:prstGeom prst="rect">
+            <a:avLst/>
+          </a:prstGeom>
+          <a:noFill/>
+          <a:ln/>
+        </p:spPr>
+        <p:txBody>
+          <a:bodyPr wrap="square" lIns="0" tIns="0" rIns="0" bIns="0" rtlCol="0" anchor="ctr">
+            <a:normAutofit/>
+          </a:bodyPr>
+          <a:lstStyle/>
+          <a:p>
+            <a:pPr indent="0" marL="0">
+              <a:buNone/>
+            </a:pPr>
+            <a:r>
+              <a:rPr lang="en-US" sz="770" b="1" dirty="0">
+                <a:solidFill>
+                  <a:srgbClr val="D97706"/>
+                </a:solidFill>
+                <a:latin typeface="Calibri" pitchFamily="34" charset="0"/>
+                <a:ea typeface="Calibri" pitchFamily="34" charset="-122"/>
+                <a:cs typeface="Calibri" pitchFamily="34" charset="-120"/>
+              </a:rPr>
+              <a:t>High</a:t>
+            </a:r>
+            <a:endParaRPr lang="en-US" sz="770" dirty="0"/>
+          </a:p>
+        </p:txBody>
+      </p:sp>
+      <p:sp>
+        <p:nvSpPr>
+          <p:cNvPr id="26" name="Text 24"/>
+          <p:cNvSpPr/>
+          <p:nvPr/>
+        </p:nvSpPr>
+        <p:spPr>
+          <a:xfrm>
+            <a:off x="6537960" y="2029968"/>
+            <a:ext cx="2057400" cy="219456"/>
+          </a:xfrm>
+          <a:prstGeom prst="rect">
+            <a:avLst/>
+          </a:prstGeom>
+          <a:noFill/>
+          <a:ln/>
+        </p:spPr>
+        <p:txBody>
+          <a:bodyPr wrap="square" lIns="0" tIns="0" rIns="0" bIns="0" rtlCol="0" anchor="ctr">
+            <a:normAutofit/>
+          </a:bodyPr>
+          <a:lstStyle/>
+          <a:p>
+            <a:pPr indent="0" marL="0">
+              <a:buNone/>
+            </a:pPr>
+            <a:r>
+              <a:rPr lang="en-US" sz="770" dirty="0">
+                <a:solidFill>
+                  <a:srgbClr val="1E293B"/>
+                </a:solidFill>
+                <a:latin typeface="Calibri" pitchFamily="34" charset="0"/>
+                <a:ea typeface="Calibri" pitchFamily="34" charset="-122"/>
+                <a:cs typeface="Calibri" pitchFamily="34" charset="-120"/>
+              </a:rPr>
+              <a:t>runtime coupling</a:t>
+            </a:r>
+            <a:endParaRPr lang="en-US" sz="770" dirty="0"/>
+          </a:p>
+        </p:txBody>
+      </p:sp>
+      <p:sp>
+        <p:nvSpPr>
+          <p:cNvPr id="27" name="Shape 25"/>
+          <p:cNvSpPr/>
+          <p:nvPr/>
+        </p:nvSpPr>
+        <p:spPr>
+          <a:xfrm>
+            <a:off x="548640" y="2276856"/>
+            <a:ext cx="8046720" cy="7315"/>
+          </a:xfrm>
+          <a:prstGeom prst="rect">
+            <a:avLst/>
+          </a:prstGeom>
+          <a:solidFill>
+            <a:srgbClr val="D8DEE6"/>
+          </a:solidFill>
+          <a:ln w="12700">
+            <a:solidFill>
+              <a:srgbClr val="D8DEE6"/>
+            </a:solidFill>
+            <a:prstDash val="solid"/>
+          </a:ln>
+        </p:spPr>
+      </p:sp>
+      <p:sp>
+        <p:nvSpPr>
+          <p:cNvPr id="28" name="Text 26"/>
+          <p:cNvSpPr/>
+          <p:nvPr/>
+        </p:nvSpPr>
+        <p:spPr>
+          <a:xfrm>
+            <a:off x="548640" y="2340864"/>
+            <a:ext cx="1234440" cy="219456"/>
+          </a:xfrm>
+          <a:prstGeom prst="rect">
+            <a:avLst/>
+          </a:prstGeom>
+          <a:noFill/>
+          <a:ln/>
+        </p:spPr>
+        <p:txBody>
+          <a:bodyPr wrap="square" lIns="0" tIns="0" rIns="0" bIns="0" rtlCol="0" anchor="ctr">
+            <a:normAutofit/>
+          </a:bodyPr>
+          <a:lstStyle/>
+          <a:p>
+            <a:pPr indent="0" marL="0">
+              <a:buNone/>
+            </a:pPr>
+            <a:r>
+              <a:rPr lang="en-US" sz="870" b="1" dirty="0">
+                <a:solidFill>
+                  <a:srgbClr val="1E293B"/>
+                </a:solidFill>
+                <a:latin typeface="Calibri" pitchFamily="34" charset="0"/>
+                <a:ea typeface="Calibri" pitchFamily="34" charset="-122"/>
+                <a:cs typeface="Calibri" pitchFamily="34" charset="-120"/>
+              </a:rPr>
+              <a:t>Hardcoded EP</a:t>
+            </a:r>
+            <a:endParaRPr lang="en-US" sz="870" dirty="0"/>
+          </a:p>
+        </p:txBody>
+      </p:sp>
+      <p:sp>
+        <p:nvSpPr>
+          <p:cNvPr id="29" name="Text 27"/>
+          <p:cNvSpPr/>
+          <p:nvPr/>
+        </p:nvSpPr>
+        <p:spPr>
+          <a:xfrm>
+            <a:off x="1691640" y="2340864"/>
+            <a:ext cx="2423160" cy="219456"/>
+          </a:xfrm>
+          <a:prstGeom prst="rect">
+            <a:avLst/>
+          </a:prstGeom>
+          <a:noFill/>
+          <a:ln/>
+        </p:spPr>
+        <p:txBody>
+          <a:bodyPr wrap="square" lIns="0" tIns="0" rIns="0" bIns="0" rtlCol="0" anchor="ctr">
+            <a:normAutofit/>
+          </a:bodyPr>
+          <a:lstStyle/>
+          <a:p>
+            <a:pPr indent="0" marL="0">
+              <a:buNone/>
+            </a:pPr>
+            <a:r>
+              <a:rPr lang="en-US" sz="770" dirty="0">
+                <a:solidFill>
+                  <a:srgbClr val="1E293B"/>
+                </a:solidFill>
+                <a:latin typeface="Calibri" pitchFamily="34" charset="0"/>
+                <a:ea typeface="Calibri" pitchFamily="34" charset="-122"/>
+                <a:cs typeface="Calibri" pitchFamily="34" charset="-120"/>
+              </a:rPr>
+              <a:t>literal URL/IP/localhost in Java</a:t>
+            </a:r>
+            <a:endParaRPr lang="en-US" sz="770" dirty="0"/>
+          </a:p>
+        </p:txBody>
+      </p:sp>
+      <p:sp>
+        <p:nvSpPr>
+          <p:cNvPr id="30" name="Text 28"/>
+          <p:cNvSpPr/>
+          <p:nvPr/>
+        </p:nvSpPr>
+        <p:spPr>
+          <a:xfrm>
+            <a:off x="4251960" y="2340864"/>
+            <a:ext cx="1325880" cy="219456"/>
+          </a:xfrm>
+          <a:prstGeom prst="rect">
+            <a:avLst/>
+          </a:prstGeom>
+          <a:noFill/>
+          <a:ln/>
+        </p:spPr>
+        <p:txBody>
+          <a:bodyPr wrap="square" lIns="0" tIns="0" rIns="0" bIns="0" rtlCol="0" anchor="ctr">
+            <a:normAutofit/>
+          </a:bodyPr>
+          <a:lstStyle/>
+          <a:p>
+            <a:pPr indent="0" marL="0">
+              <a:buNone/>
+            </a:pPr>
+            <a:r>
+              <a:rPr lang="en-US" sz="770" dirty="0">
+                <a:solidFill>
+                  <a:srgbClr val="1E293B"/>
+                </a:solidFill>
+                <a:latin typeface="Calibri" pitchFamily="34" charset="0"/>
+                <a:ea typeface="Calibri" pitchFamily="34" charset="-122"/>
+                <a:cs typeface="Calibri" pitchFamily="34" charset="-120"/>
+              </a:rPr>
+              <a:t>regex match</a:t>
+            </a:r>
+            <a:endParaRPr lang="en-US" sz="770" dirty="0"/>
+          </a:p>
+        </p:txBody>
+      </p:sp>
+      <p:sp>
+        <p:nvSpPr>
+          <p:cNvPr id="31" name="Text 29"/>
+          <p:cNvSpPr/>
+          <p:nvPr/>
+        </p:nvSpPr>
+        <p:spPr>
+          <a:xfrm>
+            <a:off x="5715000" y="2340864"/>
+            <a:ext cx="685800" cy="219456"/>
+          </a:xfrm>
+          <a:prstGeom prst="rect">
+            <a:avLst/>
+          </a:prstGeom>
+          <a:noFill/>
+          <a:ln/>
+        </p:spPr>
+        <p:txBody>
+          <a:bodyPr wrap="square" lIns="0" tIns="0" rIns="0" bIns="0" rtlCol="0" anchor="ctr">
+            <a:normAutofit/>
+          </a:bodyPr>
+          <a:lstStyle/>
+          <a:p>
+            <a:pPr indent="0" marL="0">
+              <a:buNone/>
+            </a:pPr>
+            <a:r>
+              <a:rPr lang="en-US" sz="770" b="1" dirty="0">
+                <a:solidFill>
+                  <a:srgbClr val="1C4E80"/>
+                </a:solidFill>
+                <a:latin typeface="Calibri" pitchFamily="34" charset="0"/>
+                <a:ea typeface="Calibri" pitchFamily="34" charset="-122"/>
+                <a:cs typeface="Calibri" pitchFamily="34" charset="-120"/>
+              </a:rPr>
+              <a:t>Med.</a:t>
+            </a:r>
+            <a:endParaRPr lang="en-US" sz="770" dirty="0"/>
+          </a:p>
+        </p:txBody>
+      </p:sp>
+      <p:sp>
+        <p:nvSpPr>
+          <p:cNvPr id="32" name="Text 30"/>
+          <p:cNvSpPr/>
+          <p:nvPr/>
+        </p:nvSpPr>
+        <p:spPr>
+          <a:xfrm>
+            <a:off x="6537960" y="2340864"/>
+            <a:ext cx="2057400" cy="219456"/>
+          </a:xfrm>
+          <a:prstGeom prst="rect">
+            <a:avLst/>
+          </a:prstGeom>
+          <a:noFill/>
+          <a:ln/>
+        </p:spPr>
+        <p:txBody>
+          <a:bodyPr wrap="square" lIns="0" tIns="0" rIns="0" bIns="0" rtlCol="0" anchor="ctr">
+            <a:normAutofit/>
+          </a:bodyPr>
+          <a:lstStyle/>
+          <a:p>
+            <a:pPr indent="0" marL="0">
+              <a:buNone/>
+            </a:pPr>
+            <a:r>
+              <a:rPr lang="en-US" sz="770" dirty="0">
+                <a:solidFill>
+                  <a:srgbClr val="1E293B"/>
+                </a:solidFill>
+                <a:latin typeface="Calibri" pitchFamily="34" charset="0"/>
+                <a:ea typeface="Calibri" pitchFamily="34" charset="-122"/>
+                <a:cs typeface="Calibri" pitchFamily="34" charset="-120"/>
+              </a:rPr>
+              <a:t>environment lock-in</a:t>
+            </a:r>
+            <a:endParaRPr lang="en-US" sz="770" dirty="0"/>
+          </a:p>
+        </p:txBody>
+      </p:sp>
+      <p:sp>
+        <p:nvSpPr>
+          <p:cNvPr id="33" name="Shape 31"/>
+          <p:cNvSpPr/>
+          <p:nvPr/>
+        </p:nvSpPr>
+        <p:spPr>
+          <a:xfrm>
+            <a:off x="548640" y="2587752"/>
+            <a:ext cx="8046720" cy="7315"/>
+          </a:xfrm>
+          <a:prstGeom prst="rect">
+            <a:avLst/>
+          </a:prstGeom>
+          <a:solidFill>
+            <a:srgbClr val="D8DEE6"/>
+          </a:solidFill>
+          <a:ln w="12700">
+            <a:solidFill>
+              <a:srgbClr val="D8DEE6"/>
+            </a:solidFill>
+            <a:prstDash val="solid"/>
+          </a:ln>
+        </p:spPr>
+      </p:sp>
+      <p:sp>
+        <p:nvSpPr>
+          <p:cNvPr id="34" name="Text 32"/>
+          <p:cNvSpPr/>
+          <p:nvPr/>
+        </p:nvSpPr>
+        <p:spPr>
+          <a:xfrm>
+            <a:off x="548640" y="2651760"/>
+            <a:ext cx="1234440" cy="219456"/>
+          </a:xfrm>
+          <a:prstGeom prst="rect">
+            <a:avLst/>
+          </a:prstGeom>
+          <a:noFill/>
+          <a:ln/>
+        </p:spPr>
+        <p:txBody>
+          <a:bodyPr wrap="square" lIns="0" tIns="0" rIns="0" bIns="0" rtlCol="0" anchor="ctr">
+            <a:normAutofit/>
+          </a:bodyPr>
+          <a:lstStyle/>
+          <a:p>
+            <a:pPr indent="0" marL="0">
+              <a:buNone/>
+            </a:pPr>
+            <a:r>
+              <a:rPr lang="en-US" sz="870" b="1" dirty="0">
+                <a:solidFill>
+                  <a:srgbClr val="1E293B"/>
+                </a:solidFill>
+                <a:latin typeface="Calibri" pitchFamily="34" charset="0"/>
+                <a:ea typeface="Calibri" pitchFamily="34" charset="-122"/>
+                <a:cs typeface="Calibri" pitchFamily="34" charset="-120"/>
+              </a:rPr>
+              <a:t>ESB Misuse</a:t>
+            </a:r>
+            <a:endParaRPr lang="en-US" sz="870" dirty="0"/>
+          </a:p>
+        </p:txBody>
+      </p:sp>
+      <p:sp>
+        <p:nvSpPr>
+          <p:cNvPr id="35" name="Text 33"/>
+          <p:cNvSpPr/>
+          <p:nvPr/>
+        </p:nvSpPr>
+        <p:spPr>
+          <a:xfrm>
+            <a:off x="1691640" y="2651760"/>
+            <a:ext cx="2423160" cy="219456"/>
+          </a:xfrm>
+          <a:prstGeom prst="rect">
+            <a:avLst/>
+          </a:prstGeom>
+          <a:noFill/>
+          <a:ln/>
+        </p:spPr>
+        <p:txBody>
+          <a:bodyPr wrap="square" lIns="0" tIns="0" rIns="0" bIns="0" rtlCol="0" anchor="ctr">
+            <a:normAutofit/>
+          </a:bodyPr>
+          <a:lstStyle/>
+          <a:p>
+            <a:pPr indent="0" marL="0">
+              <a:buNone/>
+            </a:pPr>
+            <a:r>
+              <a:rPr lang="en-US" sz="770" dirty="0">
+                <a:solidFill>
+                  <a:srgbClr val="1E293B"/>
+                </a:solidFill>
+                <a:latin typeface="Calibri" pitchFamily="34" charset="0"/>
+                <a:ea typeface="Calibri" pitchFamily="34" charset="-122"/>
+                <a:cs typeface="Calibri" pitchFamily="34" charset="-120"/>
+              </a:rPr>
+              <a:t>mediator-like caller/callee ratio</a:t>
+            </a:r>
+            <a:endParaRPr lang="en-US" sz="770" dirty="0"/>
+          </a:p>
+        </p:txBody>
+      </p:sp>
+      <p:sp>
+        <p:nvSpPr>
+          <p:cNvPr id="36" name="Text 34"/>
+          <p:cNvSpPr/>
+          <p:nvPr/>
+        </p:nvSpPr>
+        <p:spPr>
+          <a:xfrm>
+            <a:off x="4251960" y="2651760"/>
+            <a:ext cx="1325880" cy="219456"/>
+          </a:xfrm>
+          <a:prstGeom prst="rect">
+            <a:avLst/>
+          </a:prstGeom>
+          <a:noFill/>
+          <a:ln/>
+        </p:spPr>
+        <p:txBody>
+          <a:bodyPr wrap="square" lIns="0" tIns="0" rIns="0" bIns="0" rtlCol="0" anchor="ctr">
+            <a:normAutofit/>
+          </a:bodyPr>
+          <a:lstStyle/>
+          <a:p>
+            <a:pPr indent="0" marL="0">
+              <a:buNone/>
+            </a:pPr>
+            <a:r>
+              <a:rPr lang="en-US" sz="770" dirty="0">
+                <a:solidFill>
+                  <a:srgbClr val="1E293B"/>
+                </a:solidFill>
+                <a:latin typeface="Calibri" pitchFamily="34" charset="0"/>
+                <a:ea typeface="Calibri" pitchFamily="34" charset="-122"/>
+                <a:cs typeface="Calibri" pitchFamily="34" charset="-120"/>
+              </a:rPr>
+              <a:t>volume ratio rule</a:t>
+            </a:r>
+            <a:endParaRPr lang="en-US" sz="770" dirty="0"/>
+          </a:p>
+        </p:txBody>
+      </p:sp>
+      <p:sp>
+        <p:nvSpPr>
+          <p:cNvPr id="37" name="Text 35"/>
+          <p:cNvSpPr/>
+          <p:nvPr/>
+        </p:nvSpPr>
+        <p:spPr>
+          <a:xfrm>
+            <a:off x="5715000" y="2651760"/>
+            <a:ext cx="685800" cy="219456"/>
+          </a:xfrm>
+          <a:prstGeom prst="rect">
+            <a:avLst/>
+          </a:prstGeom>
+          <a:noFill/>
+          <a:ln/>
+        </p:spPr>
+        <p:txBody>
+          <a:bodyPr wrap="square" lIns="0" tIns="0" rIns="0" bIns="0" rtlCol="0" anchor="ctr">
+            <a:normAutofit/>
+          </a:bodyPr>
+          <a:lstStyle/>
+          <a:p>
+            <a:pPr indent="0" marL="0">
+              <a:buNone/>
+            </a:pPr>
+            <a:r>
+              <a:rPr lang="en-US" sz="770" b="1" dirty="0">
+                <a:solidFill>
+                  <a:srgbClr val="D97706"/>
+                </a:solidFill>
+                <a:latin typeface="Calibri" pitchFamily="34" charset="0"/>
+                <a:ea typeface="Calibri" pitchFamily="34" charset="-122"/>
+                <a:cs typeface="Calibri" pitchFamily="34" charset="-120"/>
+              </a:rPr>
+              <a:t>High</a:t>
+            </a:r>
+            <a:endParaRPr lang="en-US" sz="770" dirty="0"/>
+          </a:p>
+        </p:txBody>
+      </p:sp>
+      <p:sp>
+        <p:nvSpPr>
+          <p:cNvPr id="38" name="Text 36"/>
+          <p:cNvSpPr/>
+          <p:nvPr/>
+        </p:nvSpPr>
+        <p:spPr>
+          <a:xfrm>
+            <a:off x="6537960" y="2651760"/>
+            <a:ext cx="2057400" cy="219456"/>
+          </a:xfrm>
+          <a:prstGeom prst="rect">
+            <a:avLst/>
+          </a:prstGeom>
+          <a:noFill/>
+          <a:ln/>
+        </p:spPr>
+        <p:txBody>
+          <a:bodyPr wrap="square" lIns="0" tIns="0" rIns="0" bIns="0" rtlCol="0" anchor="ctr">
+            <a:normAutofit/>
+          </a:bodyPr>
+          <a:lstStyle/>
+          <a:p>
+            <a:pPr indent="0" marL="0">
+              <a:buNone/>
+            </a:pPr>
+            <a:r>
+              <a:rPr lang="en-US" sz="770" dirty="0">
+                <a:solidFill>
+                  <a:srgbClr val="1E293B"/>
+                </a:solidFill>
+                <a:latin typeface="Calibri" pitchFamily="34" charset="0"/>
+                <a:ea typeface="Calibri" pitchFamily="34" charset="-122"/>
+                <a:cs typeface="Calibri" pitchFamily="34" charset="-120"/>
+              </a:rPr>
+              <a:t>central bottleneck</a:t>
+            </a:r>
+            <a:endParaRPr lang="en-US" sz="770" dirty="0"/>
+          </a:p>
+        </p:txBody>
+      </p:sp>
+      <p:sp>
+        <p:nvSpPr>
+          <p:cNvPr id="39" name="Shape 37"/>
+          <p:cNvSpPr/>
+          <p:nvPr/>
+        </p:nvSpPr>
+        <p:spPr>
+          <a:xfrm>
+            <a:off x="548640" y="2898648"/>
+            <a:ext cx="8046720" cy="7315"/>
+          </a:xfrm>
+          <a:prstGeom prst="rect">
+            <a:avLst/>
+          </a:prstGeom>
+          <a:solidFill>
+            <a:srgbClr val="D8DEE6"/>
+          </a:solidFill>
+          <a:ln w="12700">
+            <a:solidFill>
+              <a:srgbClr val="D8DEE6"/>
+            </a:solidFill>
+            <a:prstDash val="solid"/>
+          </a:ln>
+        </p:spPr>
+      </p:sp>
+      <p:sp>
+        <p:nvSpPr>
+          <p:cNvPr id="40" name="Text 38"/>
+          <p:cNvSpPr/>
+          <p:nvPr/>
+        </p:nvSpPr>
+        <p:spPr>
+          <a:xfrm>
+            <a:off x="548640" y="2962656"/>
+            <a:ext cx="1234440" cy="219456"/>
+          </a:xfrm>
+          <a:prstGeom prst="rect">
+            <a:avLst/>
+          </a:prstGeom>
+          <a:noFill/>
+          <a:ln/>
+        </p:spPr>
+        <p:txBody>
+          <a:bodyPr wrap="square" lIns="0" tIns="0" rIns="0" bIns="0" rtlCol="0" anchor="ctr">
+            <a:normAutofit/>
+          </a:bodyPr>
+          <a:lstStyle/>
+          <a:p>
+            <a:pPr indent="0" marL="0">
+              <a:buNone/>
+            </a:pPr>
+            <a:r>
+              <a:rPr lang="en-US" sz="870" b="1" dirty="0">
+                <a:solidFill>
+                  <a:srgbClr val="1E293B"/>
+                </a:solidFill>
+                <a:latin typeface="Calibri" pitchFamily="34" charset="0"/>
+                <a:ea typeface="Calibri" pitchFamily="34" charset="-122"/>
+                <a:cs typeface="Calibri" pitchFamily="34" charset="-120"/>
+              </a:rPr>
+              <a:t>Distributed Mono.</a:t>
+            </a:r>
+            <a:endParaRPr lang="en-US" sz="870" dirty="0"/>
+          </a:p>
+        </p:txBody>
+      </p:sp>
+      <p:sp>
+        <p:nvSpPr>
+          <p:cNvPr id="41" name="Text 39"/>
+          <p:cNvSpPr/>
+          <p:nvPr/>
+        </p:nvSpPr>
+        <p:spPr>
+          <a:xfrm>
+            <a:off x="1691640" y="2962656"/>
+            <a:ext cx="2423160" cy="219456"/>
+          </a:xfrm>
+          <a:prstGeom prst="rect">
+            <a:avLst/>
+          </a:prstGeom>
+          <a:noFill/>
+          <a:ln/>
+        </p:spPr>
+        <p:txBody>
+          <a:bodyPr wrap="square" lIns="0" tIns="0" rIns="0" bIns="0" rtlCol="0" anchor="ctr">
+            <a:normAutofit/>
+          </a:bodyPr>
+          <a:lstStyle/>
+          <a:p>
+            <a:pPr indent="0" marL="0">
+              <a:buNone/>
+            </a:pPr>
+            <a:r>
+              <a:rPr lang="en-US" sz="770" dirty="0">
+                <a:solidFill>
+                  <a:srgbClr val="1E293B"/>
+                </a:solidFill>
+                <a:latin typeface="Calibri" pitchFamily="34" charset="0"/>
+                <a:ea typeface="Calibri" pitchFamily="34" charset="-122"/>
+                <a:cs typeface="Calibri" pitchFamily="34" charset="-120"/>
+              </a:rPr>
+              <a:t>high graph density + shared data</a:t>
+            </a:r>
+            <a:endParaRPr lang="en-US" sz="770" dirty="0"/>
+          </a:p>
+        </p:txBody>
+      </p:sp>
+      <p:sp>
+        <p:nvSpPr>
+          <p:cNvPr id="42" name="Text 40"/>
+          <p:cNvSpPr/>
+          <p:nvPr/>
+        </p:nvSpPr>
+        <p:spPr>
+          <a:xfrm>
+            <a:off x="4251960" y="2962656"/>
+            <a:ext cx="1325880" cy="219456"/>
+          </a:xfrm>
+          <a:prstGeom prst="rect">
+            <a:avLst/>
+          </a:prstGeom>
+          <a:noFill/>
+          <a:ln/>
+        </p:spPr>
+        <p:txBody>
+          <a:bodyPr wrap="square" lIns="0" tIns="0" rIns="0" bIns="0" rtlCol="0" anchor="ctr">
+            <a:normAutofit/>
+          </a:bodyPr>
+          <a:lstStyle/>
+          <a:p>
+            <a:pPr indent="0" marL="0">
+              <a:buNone/>
+            </a:pPr>
+            <a:r>
+              <a:rPr lang="en-US" sz="770" dirty="0">
+                <a:solidFill>
+                  <a:srgbClr val="1E293B"/>
+                </a:solidFill>
+                <a:latin typeface="Calibri" pitchFamily="34" charset="0"/>
+                <a:ea typeface="Calibri" pitchFamily="34" charset="-122"/>
+                <a:cs typeface="Calibri" pitchFamily="34" charset="-120"/>
+              </a:rPr>
+              <a:t>composite rule</a:t>
+            </a:r>
+            <a:endParaRPr lang="en-US" sz="770" dirty="0"/>
+          </a:p>
+        </p:txBody>
+      </p:sp>
+      <p:sp>
+        <p:nvSpPr>
+          <p:cNvPr id="43" name="Text 41"/>
+          <p:cNvSpPr/>
+          <p:nvPr/>
+        </p:nvSpPr>
+        <p:spPr>
+          <a:xfrm>
+            <a:off x="5715000" y="2962656"/>
+            <a:ext cx="685800" cy="219456"/>
+          </a:xfrm>
+          <a:prstGeom prst="rect">
+            <a:avLst/>
+          </a:prstGeom>
+          <a:noFill/>
+          <a:ln/>
+        </p:spPr>
+        <p:txBody>
+          <a:bodyPr wrap="square" lIns="0" tIns="0" rIns="0" bIns="0" rtlCol="0" anchor="ctr">
+            <a:normAutofit/>
+          </a:bodyPr>
+          <a:lstStyle/>
+          <a:p>
+            <a:pPr indent="0" marL="0">
+              <a:buNone/>
+            </a:pPr>
+            <a:r>
+              <a:rPr lang="en-US" sz="770" b="1" dirty="0">
+                <a:solidFill>
+                  <a:srgbClr val="DC2626"/>
+                </a:solidFill>
+                <a:latin typeface="Calibri" pitchFamily="34" charset="0"/>
+                <a:ea typeface="Calibri" pitchFamily="34" charset="-122"/>
+                <a:cs typeface="Calibri" pitchFamily="34" charset="-120"/>
+              </a:rPr>
+              <a:t>Crit.</a:t>
+            </a:r>
+            <a:endParaRPr lang="en-US" sz="770" dirty="0"/>
+          </a:p>
+        </p:txBody>
+      </p:sp>
+      <p:sp>
+        <p:nvSpPr>
+          <p:cNvPr id="44" name="Text 42"/>
+          <p:cNvSpPr/>
+          <p:nvPr/>
+        </p:nvSpPr>
+        <p:spPr>
+          <a:xfrm>
+            <a:off x="6537960" y="2962656"/>
+            <a:ext cx="2057400" cy="219456"/>
+          </a:xfrm>
+          <a:prstGeom prst="rect">
+            <a:avLst/>
+          </a:prstGeom>
+          <a:noFill/>
+          <a:ln/>
+        </p:spPr>
+        <p:txBody>
+          <a:bodyPr wrap="square" lIns="0" tIns="0" rIns="0" bIns="0" rtlCol="0" anchor="ctr">
+            <a:normAutofit/>
+          </a:bodyPr>
+          <a:lstStyle/>
+          <a:p>
+            <a:pPr indent="0" marL="0">
+              <a:buNone/>
+            </a:pPr>
+            <a:r>
+              <a:rPr lang="en-US" sz="770" dirty="0">
+                <a:solidFill>
+                  <a:srgbClr val="1E293B"/>
+                </a:solidFill>
+                <a:latin typeface="Calibri" pitchFamily="34" charset="0"/>
+                <a:ea typeface="Calibri" pitchFamily="34" charset="-122"/>
+                <a:cs typeface="Calibri" pitchFamily="34" charset="-120"/>
+              </a:rPr>
+              <a:t>system-wide coupling</a:t>
+            </a:r>
+            <a:endParaRPr lang="en-US" sz="770" dirty="0"/>
+          </a:p>
+        </p:txBody>
+      </p:sp>
+      <p:sp>
+        <p:nvSpPr>
+          <p:cNvPr id="45" name="Shape 43"/>
+          <p:cNvSpPr/>
+          <p:nvPr/>
+        </p:nvSpPr>
+        <p:spPr>
+          <a:xfrm>
+            <a:off x="548640" y="3209544"/>
+            <a:ext cx="8046720" cy="7315"/>
+          </a:xfrm>
+          <a:prstGeom prst="rect">
+            <a:avLst/>
+          </a:prstGeom>
+          <a:solidFill>
+            <a:srgbClr val="D8DEE6"/>
+          </a:solidFill>
+          <a:ln w="12700">
+            <a:solidFill>
+              <a:srgbClr val="D8DEE6"/>
+            </a:solidFill>
+            <a:prstDash val="solid"/>
+          </a:ln>
+        </p:spPr>
+      </p:sp>
+      <p:sp>
+        <p:nvSpPr>
+          <p:cNvPr id="46" name="Text 44"/>
+          <p:cNvSpPr/>
+          <p:nvPr/>
+        </p:nvSpPr>
+        <p:spPr>
+          <a:xfrm>
+            <a:off x="548640" y="3273552"/>
+            <a:ext cx="1234440" cy="219456"/>
+          </a:xfrm>
+          <a:prstGeom prst="rect">
+            <a:avLst/>
+          </a:prstGeom>
+          <a:noFill/>
+          <a:ln/>
+        </p:spPr>
+        <p:txBody>
+          <a:bodyPr wrap="square" lIns="0" tIns="0" rIns="0" bIns="0" rtlCol="0" anchor="ctr">
+            <a:normAutofit/>
+          </a:bodyPr>
+          <a:lstStyle/>
+          <a:p>
+            <a:pPr indent="0" marL="0">
+              <a:buNone/>
+            </a:pPr>
+            <a:r>
+              <a:rPr lang="en-US" sz="870" b="1" dirty="0">
+                <a:solidFill>
+                  <a:srgbClr val="1E293B"/>
+                </a:solidFill>
+                <a:latin typeface="Calibri" pitchFamily="34" charset="0"/>
+                <a:ea typeface="Calibri" pitchFamily="34" charset="-122"/>
+                <a:cs typeface="Calibri" pitchFamily="34" charset="-120"/>
+              </a:rPr>
+              <a:t>API Versioning</a:t>
+            </a:r>
+            <a:endParaRPr lang="en-US" sz="870" dirty="0"/>
+          </a:p>
+        </p:txBody>
+      </p:sp>
+      <p:sp>
+        <p:nvSpPr>
+          <p:cNvPr id="47" name="Text 45"/>
+          <p:cNvSpPr/>
+          <p:nvPr/>
+        </p:nvSpPr>
+        <p:spPr>
+          <a:xfrm>
+            <a:off x="1691640" y="3273552"/>
+            <a:ext cx="2423160" cy="219456"/>
+          </a:xfrm>
+          <a:prstGeom prst="rect">
+            <a:avLst/>
+          </a:prstGeom>
+          <a:noFill/>
+          <a:ln/>
+        </p:spPr>
+        <p:txBody>
+          <a:bodyPr wrap="square" lIns="0" tIns="0" rIns="0" bIns="0" rtlCol="0" anchor="ctr">
+            <a:normAutofit/>
+          </a:bodyPr>
+          <a:lstStyle/>
+          <a:p>
+            <a:pPr indent="0" marL="0">
+              <a:buNone/>
+            </a:pPr>
+            <a:r>
+              <a:rPr lang="en-US" sz="770" dirty="0">
+                <a:solidFill>
+                  <a:srgbClr val="1E293B"/>
+                </a:solidFill>
+                <a:latin typeface="Calibri" pitchFamily="34" charset="0"/>
+                <a:ea typeface="Calibri" pitchFamily="34" charset="-122"/>
+                <a:cs typeface="Calibri" pitchFamily="34" charset="-120"/>
+              </a:rPr>
+              <a:t>endpoint path lacks /vN</a:t>
+            </a:r>
+            <a:endParaRPr lang="en-US" sz="770" dirty="0"/>
+          </a:p>
+        </p:txBody>
+      </p:sp>
+      <p:sp>
+        <p:nvSpPr>
+          <p:cNvPr id="48" name="Text 46"/>
+          <p:cNvSpPr/>
+          <p:nvPr/>
+        </p:nvSpPr>
+        <p:spPr>
+          <a:xfrm>
+            <a:off x="4251960" y="3273552"/>
+            <a:ext cx="1325880" cy="219456"/>
+          </a:xfrm>
+          <a:prstGeom prst="rect">
+            <a:avLst/>
+          </a:prstGeom>
+          <a:noFill/>
+          <a:ln/>
+        </p:spPr>
+        <p:txBody>
+          <a:bodyPr wrap="square" lIns="0" tIns="0" rIns="0" bIns="0" rtlCol="0" anchor="ctr">
+            <a:normAutofit/>
+          </a:bodyPr>
+          <a:lstStyle/>
+          <a:p>
+            <a:pPr indent="0" marL="0">
+              <a:buNone/>
+            </a:pPr>
+            <a:r>
+              <a:rPr lang="en-US" sz="770" dirty="0">
+                <a:solidFill>
+                  <a:srgbClr val="1E293B"/>
+                </a:solidFill>
+                <a:latin typeface="Calibri" pitchFamily="34" charset="0"/>
+                <a:ea typeface="Calibri" pitchFamily="34" charset="-122"/>
+                <a:cs typeface="Calibri" pitchFamily="34" charset="-120"/>
+              </a:rPr>
+              <a:t>no version token</a:t>
+            </a:r>
+            <a:endParaRPr lang="en-US" sz="770" dirty="0"/>
+          </a:p>
+        </p:txBody>
+      </p:sp>
+      <p:sp>
+        <p:nvSpPr>
+          <p:cNvPr id="49" name="Text 47"/>
+          <p:cNvSpPr/>
+          <p:nvPr/>
+        </p:nvSpPr>
+        <p:spPr>
+          <a:xfrm>
+            <a:off x="5715000" y="3273552"/>
+            <a:ext cx="685800" cy="219456"/>
+          </a:xfrm>
+          <a:prstGeom prst="rect">
+            <a:avLst/>
+          </a:prstGeom>
+          <a:noFill/>
+          <a:ln/>
+        </p:spPr>
+        <p:txBody>
+          <a:bodyPr wrap="square" lIns="0" tIns="0" rIns="0" bIns="0" rtlCol="0" anchor="ctr">
+            <a:normAutofit/>
+          </a:bodyPr>
+          <a:lstStyle/>
+          <a:p>
+            <a:pPr indent="0" marL="0">
+              <a:buNone/>
+            </a:pPr>
+            <a:r>
+              <a:rPr lang="en-US" sz="770" b="1" dirty="0">
+                <a:solidFill>
+                  <a:srgbClr val="1C4E80"/>
+                </a:solidFill>
+                <a:latin typeface="Calibri" pitchFamily="34" charset="0"/>
+                <a:ea typeface="Calibri" pitchFamily="34" charset="-122"/>
+                <a:cs typeface="Calibri" pitchFamily="34" charset="-120"/>
+              </a:rPr>
+              <a:t>Med.</a:t>
+            </a:r>
+            <a:endParaRPr lang="en-US" sz="770" dirty="0"/>
+          </a:p>
+        </p:txBody>
+      </p:sp>
+      <p:sp>
+        <p:nvSpPr>
+          <p:cNvPr id="50" name="Text 48"/>
+          <p:cNvSpPr/>
+          <p:nvPr/>
+        </p:nvSpPr>
+        <p:spPr>
+          <a:xfrm>
+            <a:off x="6537960" y="3273552"/>
+            <a:ext cx="2057400" cy="219456"/>
+          </a:xfrm>
+          <a:prstGeom prst="rect">
+            <a:avLst/>
+          </a:prstGeom>
+          <a:noFill/>
+          <a:ln/>
+        </p:spPr>
+        <p:txBody>
+          <a:bodyPr wrap="square" lIns="0" tIns="0" rIns="0" bIns="0" rtlCol="0" anchor="ctr">
+            <a:normAutofit/>
+          </a:bodyPr>
+          <a:lstStyle/>
+          <a:p>
+            <a:pPr indent="0" marL="0">
+              <a:buNone/>
+            </a:pPr>
+            <a:r>
+              <a:rPr lang="en-US" sz="770" dirty="0">
+                <a:solidFill>
+                  <a:srgbClr val="1E293B"/>
+                </a:solidFill>
+                <a:latin typeface="Calibri" pitchFamily="34" charset="0"/>
+                <a:ea typeface="Calibri" pitchFamily="34" charset="-122"/>
+                <a:cs typeface="Calibri" pitchFamily="34" charset="-120"/>
+              </a:rPr>
+              <a:t>client breakage risk</a:t>
+            </a:r>
+            <a:endParaRPr lang="en-US" sz="770" dirty="0"/>
+          </a:p>
+        </p:txBody>
+      </p:sp>
+      <p:sp>
+        <p:nvSpPr>
+          <p:cNvPr id="51" name="Shape 49"/>
+          <p:cNvSpPr/>
+          <p:nvPr/>
+        </p:nvSpPr>
+        <p:spPr>
+          <a:xfrm>
+            <a:off x="548640" y="3520440"/>
+            <a:ext cx="8046720" cy="7315"/>
+          </a:xfrm>
+          <a:prstGeom prst="rect">
+            <a:avLst/>
+          </a:prstGeom>
+          <a:solidFill>
+            <a:srgbClr val="D8DEE6"/>
+          </a:solidFill>
+          <a:ln w="12700">
+            <a:solidFill>
+              <a:srgbClr val="D8DEE6"/>
+            </a:solidFill>
+            <a:prstDash val="solid"/>
+          </a:ln>
+        </p:spPr>
+      </p:sp>
+      <p:sp>
+        <p:nvSpPr>
+          <p:cNvPr id="52" name="Text 50"/>
+          <p:cNvSpPr/>
+          <p:nvPr/>
+        </p:nvSpPr>
+        <p:spPr>
+          <a:xfrm>
+            <a:off x="548640" y="3584448"/>
+            <a:ext cx="1234440" cy="219456"/>
+          </a:xfrm>
+          <a:prstGeom prst="rect">
+            <a:avLst/>
+          </a:prstGeom>
+          <a:noFill/>
+          <a:ln/>
+        </p:spPr>
+        <p:txBody>
+          <a:bodyPr wrap="square" lIns="0" tIns="0" rIns="0" bIns="0" rtlCol="0" anchor="ctr">
+            <a:normAutofit/>
+          </a:bodyPr>
+          <a:lstStyle/>
+          <a:p>
+            <a:pPr indent="0" marL="0">
+              <a:buNone/>
+            </a:pPr>
+            <a:r>
+              <a:rPr lang="en-US" sz="870" b="1" dirty="0">
+                <a:solidFill>
+                  <a:srgbClr val="1E293B"/>
+                </a:solidFill>
+                <a:latin typeface="Calibri" pitchFamily="34" charset="0"/>
+                <a:ea typeface="Calibri" pitchFamily="34" charset="-122"/>
+                <a:cs typeface="Calibri" pitchFamily="34" charset="-120"/>
+              </a:rPr>
+              <a:t>Wrong Cuts</a:t>
+            </a:r>
+            <a:endParaRPr lang="en-US" sz="870" dirty="0"/>
+          </a:p>
+        </p:txBody>
+      </p:sp>
+      <p:sp>
+        <p:nvSpPr>
+          <p:cNvPr id="53" name="Text 51"/>
+          <p:cNvSpPr/>
+          <p:nvPr/>
+        </p:nvSpPr>
+        <p:spPr>
+          <a:xfrm>
+            <a:off x="1691640" y="3584448"/>
+            <a:ext cx="2423160" cy="219456"/>
+          </a:xfrm>
+          <a:prstGeom prst="rect">
+            <a:avLst/>
+          </a:prstGeom>
+          <a:noFill/>
+          <a:ln/>
+        </p:spPr>
+        <p:txBody>
+          <a:bodyPr wrap="square" lIns="0" tIns="0" rIns="0" bIns="0" rtlCol="0" anchor="ctr">
+            <a:normAutofit/>
+          </a:bodyPr>
+          <a:lstStyle/>
+          <a:p>
+            <a:pPr indent="0" marL="0">
+              <a:buNone/>
+            </a:pPr>
+            <a:r>
+              <a:rPr lang="en-US" sz="770" dirty="0">
+                <a:solidFill>
+                  <a:srgbClr val="1E293B"/>
+                </a:solidFill>
+                <a:latin typeface="Calibri" pitchFamily="34" charset="0"/>
+                <a:ea typeface="Calibri" pitchFamily="34" charset="-122"/>
+                <a:cs typeface="Calibri" pitchFamily="34" charset="-120"/>
+              </a:rPr>
+              <a:t>bidirectional service pair</a:t>
+            </a:r>
+            <a:endParaRPr lang="en-US" sz="770" dirty="0"/>
+          </a:p>
+        </p:txBody>
+      </p:sp>
+      <p:sp>
+        <p:nvSpPr>
+          <p:cNvPr id="54" name="Text 52"/>
+          <p:cNvSpPr/>
+          <p:nvPr/>
+        </p:nvSpPr>
+        <p:spPr>
+          <a:xfrm>
+            <a:off x="4251960" y="3584448"/>
+            <a:ext cx="1325880" cy="219456"/>
+          </a:xfrm>
+          <a:prstGeom prst="rect">
+            <a:avLst/>
+          </a:prstGeom>
+          <a:noFill/>
+          <a:ln/>
+        </p:spPr>
+        <p:txBody>
+          <a:bodyPr wrap="square" lIns="0" tIns="0" rIns="0" bIns="0" rtlCol="0" anchor="ctr">
+            <a:normAutofit/>
+          </a:bodyPr>
+          <a:lstStyle/>
+          <a:p>
+            <a:pPr indent="0" marL="0">
+              <a:buNone/>
+            </a:pPr>
+            <a:r>
+              <a:rPr lang="en-US" sz="770" dirty="0">
+                <a:solidFill>
+                  <a:srgbClr val="1E293B"/>
+                </a:solidFill>
+                <a:latin typeface="Calibri" pitchFamily="34" charset="0"/>
+                <a:ea typeface="Calibri" pitchFamily="34" charset="-122"/>
+                <a:cs typeface="Calibri" pitchFamily="34" charset="-120"/>
+              </a:rPr>
+              <a:t>A-&gt;B and B-&gt;A</a:t>
+            </a:r>
+            <a:endParaRPr lang="en-US" sz="770" dirty="0"/>
+          </a:p>
+        </p:txBody>
+      </p:sp>
+      <p:sp>
+        <p:nvSpPr>
+          <p:cNvPr id="55" name="Text 53"/>
+          <p:cNvSpPr/>
+          <p:nvPr/>
+        </p:nvSpPr>
+        <p:spPr>
+          <a:xfrm>
+            <a:off x="5715000" y="3584448"/>
+            <a:ext cx="685800" cy="219456"/>
+          </a:xfrm>
+          <a:prstGeom prst="rect">
+            <a:avLst/>
+          </a:prstGeom>
+          <a:noFill/>
+          <a:ln/>
+        </p:spPr>
+        <p:txBody>
+          <a:bodyPr wrap="square" lIns="0" tIns="0" rIns="0" bIns="0" rtlCol="0" anchor="ctr">
+            <a:normAutofit/>
+          </a:bodyPr>
+          <a:lstStyle/>
+          <a:p>
+            <a:pPr indent="0" marL="0">
+              <a:buNone/>
+            </a:pPr>
+            <a:r>
+              <a:rPr lang="en-US" sz="770" b="1" dirty="0">
+                <a:solidFill>
+                  <a:srgbClr val="D97706"/>
+                </a:solidFill>
+                <a:latin typeface="Calibri" pitchFamily="34" charset="0"/>
+                <a:ea typeface="Calibri" pitchFamily="34" charset="-122"/>
+                <a:cs typeface="Calibri" pitchFamily="34" charset="-120"/>
+              </a:rPr>
+              <a:t>High</a:t>
+            </a:r>
+            <a:endParaRPr lang="en-US" sz="770" dirty="0"/>
+          </a:p>
+        </p:txBody>
+      </p:sp>
+      <p:sp>
+        <p:nvSpPr>
+          <p:cNvPr id="56" name="Text 54"/>
+          <p:cNvSpPr/>
+          <p:nvPr/>
+        </p:nvSpPr>
+        <p:spPr>
+          <a:xfrm>
+            <a:off x="6537960" y="3584448"/>
+            <a:ext cx="2057400" cy="219456"/>
+          </a:xfrm>
+          <a:prstGeom prst="rect">
+            <a:avLst/>
+          </a:prstGeom>
+          <a:noFill/>
+          <a:ln/>
+        </p:spPr>
+        <p:txBody>
+          <a:bodyPr wrap="square" lIns="0" tIns="0" rIns="0" bIns="0" rtlCol="0" anchor="ctr">
+            <a:normAutofit/>
+          </a:bodyPr>
+          <a:lstStyle/>
+          <a:p>
+            <a:pPr indent="0" marL="0">
+              <a:buNone/>
+            </a:pPr>
+            <a:r>
+              <a:rPr lang="en-US" sz="770" dirty="0">
+                <a:solidFill>
+                  <a:srgbClr val="1E293B"/>
+                </a:solidFill>
+                <a:latin typeface="Calibri" pitchFamily="34" charset="0"/>
+                <a:ea typeface="Calibri" pitchFamily="34" charset="-122"/>
+                <a:cs typeface="Calibri" pitchFamily="34" charset="-120"/>
+              </a:rPr>
+              <a:t>poor boundaries</a:t>
+            </a:r>
+            <a:endParaRPr lang="en-US" sz="770" dirty="0"/>
+          </a:p>
+        </p:txBody>
+      </p:sp>
+      <p:sp>
+        <p:nvSpPr>
+          <p:cNvPr id="57" name="Shape 55"/>
+          <p:cNvSpPr/>
+          <p:nvPr/>
+        </p:nvSpPr>
+        <p:spPr>
+          <a:xfrm>
+            <a:off x="548640" y="3831336"/>
+            <a:ext cx="8046720" cy="7315"/>
+          </a:xfrm>
+          <a:prstGeom prst="rect">
+            <a:avLst/>
+          </a:prstGeom>
+          <a:solidFill>
+            <a:srgbClr val="D8DEE6"/>
+          </a:solidFill>
+          <a:ln w="12700">
+            <a:solidFill>
+              <a:srgbClr val="D8DEE6"/>
+            </a:solidFill>
+            <a:prstDash val="solid"/>
+          </a:ln>
+        </p:spPr>
+      </p:sp>
+      <p:sp>
+        <p:nvSpPr>
+          <p:cNvPr id="58" name="Text 56"/>
+          <p:cNvSpPr/>
+          <p:nvPr/>
+        </p:nvSpPr>
+        <p:spPr>
+          <a:xfrm>
+            <a:off x="548640" y="3895344"/>
+            <a:ext cx="1234440" cy="219456"/>
+          </a:xfrm>
+          <a:prstGeom prst="rect">
+            <a:avLst/>
+          </a:prstGeom>
+          <a:noFill/>
+          <a:ln/>
+        </p:spPr>
+        <p:txBody>
+          <a:bodyPr wrap="square" lIns="0" tIns="0" rIns="0" bIns="0" rtlCol="0" anchor="ctr">
+            <a:normAutofit/>
+          </a:bodyPr>
+          <a:lstStyle/>
+          <a:p>
+            <a:pPr indent="0" marL="0">
+              <a:buNone/>
+            </a:pPr>
+            <a:r>
+              <a:rPr lang="en-US" sz="870" b="1" dirty="0">
+                <a:solidFill>
+                  <a:srgbClr val="1E293B"/>
+                </a:solidFill>
+                <a:latin typeface="Calibri" pitchFamily="34" charset="0"/>
+                <a:ea typeface="Calibri" pitchFamily="34" charset="-122"/>
+                <a:cs typeface="Calibri" pitchFamily="34" charset="-120"/>
+              </a:rPr>
+              <a:t>Nano Service</a:t>
+            </a:r>
+            <a:endParaRPr lang="en-US" sz="870" dirty="0"/>
+          </a:p>
+        </p:txBody>
+      </p:sp>
+      <p:sp>
+        <p:nvSpPr>
+          <p:cNvPr id="59" name="Text 57"/>
+          <p:cNvSpPr/>
+          <p:nvPr/>
+        </p:nvSpPr>
+        <p:spPr>
+          <a:xfrm>
+            <a:off x="1691640" y="3895344"/>
+            <a:ext cx="2423160" cy="219456"/>
+          </a:xfrm>
+          <a:prstGeom prst="rect">
+            <a:avLst/>
+          </a:prstGeom>
+          <a:noFill/>
+          <a:ln/>
+        </p:spPr>
+        <p:txBody>
+          <a:bodyPr wrap="square" lIns="0" tIns="0" rIns="0" bIns="0" rtlCol="0" anchor="ctr">
+            <a:normAutofit/>
+          </a:bodyPr>
+          <a:lstStyle/>
+          <a:p>
+            <a:pPr indent="0" marL="0">
+              <a:buNone/>
+            </a:pPr>
+            <a:r>
+              <a:rPr lang="en-US" sz="770" dirty="0">
+                <a:solidFill>
+                  <a:srgbClr val="1E293B"/>
+                </a:solidFill>
+                <a:latin typeface="Calibri" pitchFamily="34" charset="0"/>
+                <a:ea typeface="Calibri" pitchFamily="34" charset="-122"/>
+                <a:cs typeface="Calibri" pitchFamily="34" charset="-120"/>
+              </a:rPr>
+              <a:t>very small deployable service</a:t>
+            </a:r>
+            <a:endParaRPr lang="en-US" sz="770" dirty="0"/>
+          </a:p>
+        </p:txBody>
+      </p:sp>
+      <p:sp>
+        <p:nvSpPr>
+          <p:cNvPr id="60" name="Text 58"/>
+          <p:cNvSpPr/>
+          <p:nvPr/>
+        </p:nvSpPr>
+        <p:spPr>
+          <a:xfrm>
+            <a:off x="4251960" y="3895344"/>
+            <a:ext cx="1325880" cy="219456"/>
+          </a:xfrm>
+          <a:prstGeom prst="rect">
+            <a:avLst/>
+          </a:prstGeom>
+          <a:noFill/>
+          <a:ln/>
+        </p:spPr>
+        <p:txBody>
+          <a:bodyPr wrap="square" lIns="0" tIns="0" rIns="0" bIns="0" rtlCol="0" anchor="ctr">
+            <a:normAutofit/>
+          </a:bodyPr>
+          <a:lstStyle/>
+          <a:p>
+            <a:pPr indent="0" marL="0">
+              <a:buNone/>
+            </a:pPr>
+            <a:r>
+              <a:rPr lang="en-US" sz="770" dirty="0">
+                <a:solidFill>
+                  <a:srgbClr val="1E293B"/>
+                </a:solidFill>
+                <a:latin typeface="Calibri" pitchFamily="34" charset="0"/>
+                <a:ea typeface="Calibri" pitchFamily="34" charset="-122"/>
+                <a:cs typeface="Calibri" pitchFamily="34" charset="-120"/>
+              </a:rPr>
+              <a:t>LOC below floor</a:t>
+            </a:r>
+            <a:endParaRPr lang="en-US" sz="770" dirty="0"/>
+          </a:p>
+        </p:txBody>
+      </p:sp>
+      <p:sp>
+        <p:nvSpPr>
+          <p:cNvPr id="61" name="Text 59"/>
+          <p:cNvSpPr/>
+          <p:nvPr/>
+        </p:nvSpPr>
+        <p:spPr>
+          <a:xfrm>
+            <a:off x="5715000" y="3895344"/>
+            <a:ext cx="685800" cy="219456"/>
+          </a:xfrm>
+          <a:prstGeom prst="rect">
+            <a:avLst/>
+          </a:prstGeom>
+          <a:noFill/>
+          <a:ln/>
+        </p:spPr>
+        <p:txBody>
+          <a:bodyPr wrap="square" lIns="0" tIns="0" rIns="0" bIns="0" rtlCol="0" anchor="ctr">
+            <a:normAutofit/>
+          </a:bodyPr>
+          <a:lstStyle/>
+          <a:p>
+            <a:pPr indent="0" marL="0">
+              <a:buNone/>
+            </a:pPr>
+            <a:r>
+              <a:rPr lang="en-US" sz="770" b="1" dirty="0">
+                <a:solidFill>
+                  <a:srgbClr val="1C4E80"/>
+                </a:solidFill>
+                <a:latin typeface="Calibri" pitchFamily="34" charset="0"/>
+                <a:ea typeface="Calibri" pitchFamily="34" charset="-122"/>
+                <a:cs typeface="Calibri" pitchFamily="34" charset="-120"/>
+              </a:rPr>
+              <a:t>Med.</a:t>
+            </a:r>
+            <a:endParaRPr lang="en-US" sz="770" dirty="0"/>
+          </a:p>
+        </p:txBody>
+      </p:sp>
+      <p:sp>
+        <p:nvSpPr>
+          <p:cNvPr id="62" name="Text 60"/>
+          <p:cNvSpPr/>
+          <p:nvPr/>
+        </p:nvSpPr>
+        <p:spPr>
+          <a:xfrm>
+            <a:off x="6537960" y="3895344"/>
+            <a:ext cx="2057400" cy="219456"/>
+          </a:xfrm>
+          <a:prstGeom prst="rect">
+            <a:avLst/>
+          </a:prstGeom>
+          <a:noFill/>
+          <a:ln/>
+        </p:spPr>
+        <p:txBody>
+          <a:bodyPr wrap="square" lIns="0" tIns="0" rIns="0" bIns="0" rtlCol="0" anchor="ctr">
+            <a:normAutofit/>
+          </a:bodyPr>
+          <a:lstStyle/>
+          <a:p>
+            <a:pPr indent="0" marL="0">
+              <a:buNone/>
+            </a:pPr>
+            <a:r>
+              <a:rPr lang="en-US" sz="770" dirty="0">
+                <a:solidFill>
+                  <a:srgbClr val="1E293B"/>
+                </a:solidFill>
+                <a:latin typeface="Calibri" pitchFamily="34" charset="0"/>
+                <a:ea typeface="Calibri" pitchFamily="34" charset="-122"/>
+                <a:cs typeface="Calibri" pitchFamily="34" charset="-120"/>
+              </a:rPr>
+              <a:t>operational overhead</a:t>
+            </a:r>
+            <a:endParaRPr lang="en-US" sz="770" dirty="0"/>
+          </a:p>
+        </p:txBody>
+      </p:sp>
+      <p:sp>
+        <p:nvSpPr>
+          <p:cNvPr id="63" name="Shape 61"/>
+          <p:cNvSpPr/>
+          <p:nvPr/>
+        </p:nvSpPr>
+        <p:spPr>
+          <a:xfrm>
+            <a:off x="548640" y="4142232"/>
+            <a:ext cx="8046720" cy="7315"/>
+          </a:xfrm>
+          <a:prstGeom prst="rect">
+            <a:avLst/>
+          </a:prstGeom>
+          <a:solidFill>
+            <a:srgbClr val="D8DEE6"/>
+          </a:solidFill>
+          <a:ln w="12700">
+            <a:solidFill>
+              <a:srgbClr val="D8DEE6"/>
+            </a:solidFill>
+            <a:prstDash val="solid"/>
+          </a:ln>
+        </p:spPr>
+      </p:sp>
+      <p:sp>
+        <p:nvSpPr>
+          <p:cNvPr id="64" name="Text 62"/>
+          <p:cNvSpPr/>
+          <p:nvPr/>
+        </p:nvSpPr>
+        <p:spPr>
+          <a:xfrm>
+            <a:off x="548640" y="4206240"/>
+            <a:ext cx="1234440" cy="219456"/>
+          </a:xfrm>
+          <a:prstGeom prst="rect">
+            <a:avLst/>
+          </a:prstGeom>
+          <a:noFill/>
+          <a:ln/>
+        </p:spPr>
+        <p:txBody>
+          <a:bodyPr wrap="square" lIns="0" tIns="0" rIns="0" bIns="0" rtlCol="0" anchor="ctr">
+            <a:normAutofit/>
+          </a:bodyPr>
+          <a:lstStyle/>
+          <a:p>
+            <a:pPr indent="0" marL="0">
+              <a:buNone/>
+            </a:pPr>
+            <a:r>
+              <a:rPr lang="en-US" sz="870" b="1" dirty="0">
+                <a:solidFill>
+                  <a:srgbClr val="1E293B"/>
+                </a:solidFill>
+                <a:latin typeface="Calibri" pitchFamily="34" charset="0"/>
+                <a:ea typeface="Calibri" pitchFamily="34" charset="-122"/>
+                <a:cs typeface="Calibri" pitchFamily="34" charset="-120"/>
+              </a:rPr>
+              <a:t>God Service</a:t>
+            </a:r>
+            <a:endParaRPr lang="en-US" sz="870" dirty="0"/>
+          </a:p>
+        </p:txBody>
+      </p:sp>
+      <p:sp>
+        <p:nvSpPr>
+          <p:cNvPr id="65" name="Text 63"/>
+          <p:cNvSpPr/>
+          <p:nvPr/>
+        </p:nvSpPr>
+        <p:spPr>
+          <a:xfrm>
+            <a:off x="1691640" y="4206240"/>
+            <a:ext cx="2423160" cy="219456"/>
+          </a:xfrm>
+          <a:prstGeom prst="rect">
+            <a:avLst/>
+          </a:prstGeom>
+          <a:noFill/>
+          <a:ln/>
+        </p:spPr>
+        <p:txBody>
+          <a:bodyPr wrap="square" lIns="0" tIns="0" rIns="0" bIns="0" rtlCol="0" anchor="ctr">
+            <a:normAutofit/>
+          </a:bodyPr>
+          <a:lstStyle/>
+          <a:p>
+            <a:pPr indent="0" marL="0">
+              <a:buNone/>
+            </a:pPr>
+            <a:r>
+              <a:rPr lang="en-US" sz="770" dirty="0">
+                <a:solidFill>
+                  <a:srgbClr val="1E293B"/>
+                </a:solidFill>
+                <a:latin typeface="Calibri" pitchFamily="34" charset="0"/>
+                <a:ea typeface="Calibri" pitchFamily="34" charset="-122"/>
+                <a:cs typeface="Calibri" pitchFamily="34" charset="-120"/>
+              </a:rPr>
+              <a:t>contains God Class evidence</a:t>
+            </a:r>
+            <a:endParaRPr lang="en-US" sz="770" dirty="0"/>
+          </a:p>
+        </p:txBody>
+      </p:sp>
+      <p:sp>
+        <p:nvSpPr>
+          <p:cNvPr id="66" name="Text 64"/>
+          <p:cNvSpPr/>
+          <p:nvPr/>
+        </p:nvSpPr>
+        <p:spPr>
+          <a:xfrm>
+            <a:off x="4251960" y="4206240"/>
+            <a:ext cx="1325880" cy="219456"/>
+          </a:xfrm>
+          <a:prstGeom prst="rect">
+            <a:avLst/>
+          </a:prstGeom>
+          <a:noFill/>
+          <a:ln/>
+        </p:spPr>
+        <p:txBody>
+          <a:bodyPr wrap="square" lIns="0" tIns="0" rIns="0" bIns="0" rtlCol="0" anchor="ctr">
+            <a:normAutofit/>
+          </a:bodyPr>
+          <a:lstStyle/>
+          <a:p>
+            <a:pPr indent="0" marL="0">
+              <a:buNone/>
+            </a:pPr>
+            <a:r>
+              <a:rPr lang="en-US" sz="770" dirty="0">
+                <a:solidFill>
+                  <a:srgbClr val="1E293B"/>
+                </a:solidFill>
+                <a:latin typeface="Calibri" pitchFamily="34" charset="0"/>
+                <a:ea typeface="Calibri" pitchFamily="34" charset="-122"/>
+                <a:cs typeface="Calibri" pitchFamily="34" charset="-120"/>
+              </a:rPr>
+              <a:t>&gt;=3 of 6 metrics</a:t>
+            </a:r>
+            <a:endParaRPr lang="en-US" sz="770" dirty="0"/>
+          </a:p>
+        </p:txBody>
+      </p:sp>
+      <p:sp>
+        <p:nvSpPr>
+          <p:cNvPr id="67" name="Text 65"/>
+          <p:cNvSpPr/>
+          <p:nvPr/>
+        </p:nvSpPr>
+        <p:spPr>
+          <a:xfrm>
+            <a:off x="5715000" y="4206240"/>
+            <a:ext cx="685800" cy="219456"/>
+          </a:xfrm>
+          <a:prstGeom prst="rect">
+            <a:avLst/>
+          </a:prstGeom>
+          <a:noFill/>
+          <a:ln/>
+        </p:spPr>
+        <p:txBody>
+          <a:bodyPr wrap="square" lIns="0" tIns="0" rIns="0" bIns="0" rtlCol="0" anchor="ctr">
+            <a:normAutofit/>
+          </a:bodyPr>
+          <a:lstStyle/>
+          <a:p>
+            <a:pPr indent="0" marL="0">
+              <a:buNone/>
+            </a:pPr>
+            <a:r>
+              <a:rPr lang="en-US" sz="770" b="1" dirty="0">
+                <a:solidFill>
+                  <a:srgbClr val="D97706"/>
+                </a:solidFill>
+                <a:latin typeface="Calibri" pitchFamily="34" charset="0"/>
+                <a:ea typeface="Calibri" pitchFamily="34" charset="-122"/>
+                <a:cs typeface="Calibri" pitchFamily="34" charset="-120"/>
+              </a:rPr>
+              <a:t>High</a:t>
+            </a:r>
+            <a:endParaRPr lang="en-US" sz="770" dirty="0"/>
+          </a:p>
+        </p:txBody>
+      </p:sp>
+      <p:sp>
+        <p:nvSpPr>
+          <p:cNvPr id="68" name="Text 66"/>
+          <p:cNvSpPr/>
+          <p:nvPr/>
+        </p:nvSpPr>
+        <p:spPr>
+          <a:xfrm>
+            <a:off x="6537960" y="4206240"/>
+            <a:ext cx="2057400" cy="219456"/>
+          </a:xfrm>
+          <a:prstGeom prst="rect">
+            <a:avLst/>
+          </a:prstGeom>
+          <a:noFill/>
+          <a:ln/>
+        </p:spPr>
+        <p:txBody>
+          <a:bodyPr wrap="square" lIns="0" tIns="0" rIns="0" bIns="0" rtlCol="0" anchor="ctr">
+            <a:normAutofit/>
+          </a:bodyPr>
+          <a:lstStyle/>
+          <a:p>
+            <a:pPr indent="0" marL="0">
+              <a:buNone/>
+            </a:pPr>
+            <a:r>
+              <a:rPr lang="en-US" sz="770" dirty="0">
+                <a:solidFill>
+                  <a:srgbClr val="1E293B"/>
+                </a:solidFill>
+                <a:latin typeface="Calibri" pitchFamily="34" charset="0"/>
+                <a:ea typeface="Calibri" pitchFamily="34" charset="-122"/>
+                <a:cs typeface="Calibri" pitchFamily="34" charset="-120"/>
+              </a:rPr>
+              <a:t>too many responsibilities</a:t>
+            </a:r>
+            <a:endParaRPr lang="en-US" sz="770" dirty="0"/>
+          </a:p>
+        </p:txBody>
+      </p:sp>
+      <p:sp>
+        <p:nvSpPr>
+          <p:cNvPr id="69" name="Shape 67"/>
+          <p:cNvSpPr/>
+          <p:nvPr/>
+        </p:nvSpPr>
+        <p:spPr>
+          <a:xfrm>
+            <a:off x="548640" y="4453128"/>
+            <a:ext cx="8046720" cy="7315"/>
+          </a:xfrm>
+          <a:prstGeom prst="rect">
+            <a:avLst/>
+          </a:prstGeom>
+          <a:solidFill>
+            <a:srgbClr val="D8DEE6"/>
+          </a:solidFill>
+          <a:ln w="12700">
+            <a:solidFill>
+              <a:srgbClr val="D8DEE6"/>
+            </a:solidFill>
+            <a:prstDash val="solid"/>
+          </a:ln>
+        </p:spPr>
+      </p:sp>
+      <p:sp>
+        <p:nvSpPr>
+          <p:cNvPr id="70" name="Shape 68"/>
+          <p:cNvSpPr/>
+          <p:nvPr/>
+        </p:nvSpPr>
+        <p:spPr>
+          <a:xfrm>
+            <a:off x="548640" y="4599432"/>
+            <a:ext cx="457200" cy="36576"/>
+          </a:xfrm>
+          <a:prstGeom prst="rect">
+            <a:avLst/>
+          </a:prstGeom>
+          <a:solidFill>
+            <a:srgbClr val="0D9488"/>
+          </a:solidFill>
+          <a:ln w="12700">
+            <a:solidFill>
+              <a:srgbClr val="0D9488"/>
+            </a:solidFill>
+            <a:prstDash val="solid"/>
+          </a:ln>
+        </p:spPr>
+      </p:sp>
+      <p:sp>
+        <p:nvSpPr>
+          <p:cNvPr id="71" name="Text 69"/>
+          <p:cNvSpPr/>
+          <p:nvPr/>
+        </p:nvSpPr>
+        <p:spPr>
+          <a:xfrm>
+            <a:off x="548640" y="4681728"/>
+            <a:ext cx="8046720" cy="201168"/>
+          </a:xfrm>
+          <a:prstGeom prst="rect">
+            <a:avLst/>
+          </a:prstGeom>
+          <a:noFill/>
+          <a:ln/>
+        </p:spPr>
+        <p:txBody>
+          <a:bodyPr wrap="square" lIns="0" tIns="0" rIns="0" bIns="0" rtlCol="0" anchor="ctr"/>
+          <a:lstStyle/>
+          <a:p>
+            <a:pPr indent="0" marL="0">
+              <a:buNone/>
+            </a:pPr>
+            <a:r>
+              <a:rPr lang="en-US" sz="850" i="1" dirty="0">
+                <a:solidFill>
+                  <a:srgbClr val="64748B"/>
+                </a:solidFill>
+                <a:latin typeface="Calibri" pitchFamily="34" charset="0"/>
+                <a:ea typeface="Calibri" pitchFamily="34" charset="-122"/>
+                <a:cs typeface="Calibri" pitchFamily="34" charset="-120"/>
+              </a:rPr>
+              <a:t>Thresholds are configurable and intentionally conservative for a dissertation prototype; production use should calibrate them per organisation.</a:t>
+            </a:r>
+            <a:endParaRPr lang="en-US" sz="850" dirty="0"/>
+          </a:p>
+        </p:txBody>
+      </p:sp>
+      <p:sp>
+        <p:nvSpPr>
+          <p:cNvPr id="72" name="Text 70"/>
+          <p:cNvSpPr/>
+          <p:nvPr/>
+        </p:nvSpPr>
+        <p:spPr>
+          <a:xfrm>
+            <a:off x="7452360" y="4864608"/>
+            <a:ext cx="1143000" cy="228600"/>
+          </a:xfrm>
+          <a:prstGeom prst="rect">
+            <a:avLst/>
+          </a:prstGeom>
+          <a:noFill/>
+          <a:ln/>
+        </p:spPr>
+        <p:txBody>
+          <a:bodyPr wrap="square" lIns="0" tIns="0" rIns="0" bIns="0" rtlCol="0" anchor="ctr"/>
+          <a:lstStyle/>
+          <a:p>
+            <a:pPr algn="r" indent="0" marL="0">
+              <a:buNone/>
+            </a:pPr>
+            <a:r>
+              <a:rPr lang="en-US" sz="900" dirty="0">
+                <a:solidFill>
+                  <a:srgbClr val="64748B"/>
+                </a:solidFill>
+                <a:latin typeface="Calibri" pitchFamily="34" charset="0"/>
+                <a:ea typeface="Calibri" pitchFamily="34" charset="-122"/>
+                <a:cs typeface="Calibri" pitchFamily="34" charset="-120"/>
+              </a:rPr>
+              <a:t>Appendix D</a:t>
+            </a:r>
+            <a:endParaRPr lang="en-US" sz="900" dirty="0"/>
+          </a:p>
+        </p:txBody>
+      </p:sp>
+    </p:spTree>
+  </p:cSld>
+  <p:clrMapOvr>
+    <a:masterClrMapping/>
+  </p:clrMapOvr>
+</p:sld>
+</file>
+
 <file path=ppt/slides/slide2.xml><?xml version="1.0" encoding="utf-8"?>
 <p:sld xmlns:a="http://schemas.openxmlformats.org/drawingml/2006/main" xmlns:r="http://schemas.openxmlformats.org/officeDocument/2006/relationships" xmlns:p="http://schemas.openxmlformats.org/presentationml/2006/main">
   <p:cSld name="Slide 2">
@@ -8649,6 +15293,1045 @@
                 <a:cs typeface="Calibri" pitchFamily="34" charset="-120"/>
               </a:rPr>
               <a:t>2 / 15</a:t>
+            </a:r>
+            <a:endParaRPr lang="en-US" sz="900" dirty="0"/>
+          </a:p>
+        </p:txBody>
+      </p:sp>
+    </p:spTree>
+  </p:cSld>
+  <p:clrMapOvr>
+    <a:masterClrMapping/>
+  </p:clrMapOvr>
+</p:sld>
+</file>
+
+<file path=ppt/slides/slide20.xml><?xml version="1.0" encoding="utf-8"?>
+<p:sld xmlns:a="http://schemas.openxmlformats.org/drawingml/2006/main" xmlns:r="http://schemas.openxmlformats.org/officeDocument/2006/relationships" xmlns:p="http://schemas.openxmlformats.org/presentationml/2006/main">
+  <p:cSld name="Slide 20">
+    <p:bg>
+      <p:bgPr>
+        <a:solidFill>
+          <a:srgbClr val="FFFFFF"/>
+        </a:solidFill>
+      </p:bgPr>
+    </p:bg>
+    <p:spTree>
+      <p:nvGrpSpPr>
+        <p:cNvPr id="1" name=""/>
+        <p:cNvGrpSpPr/>
+        <p:nvPr/>
+      </p:nvGrpSpPr>
+      <p:grpSpPr>
+        <a:xfrm>
+          <a:off x="0" y="0"/>
+          <a:ext cx="0" cy="0"/>
+          <a:chOff x="0" y="0"/>
+          <a:chExt cx="0" cy="0"/>
+        </a:xfrm>
+      </p:grpSpPr>
+      <p:sp>
+        <p:nvSpPr>
+          <p:cNvPr id="2" name="Text 0"/>
+          <p:cNvSpPr/>
+          <p:nvPr/>
+        </p:nvSpPr>
+        <p:spPr>
+          <a:xfrm>
+            <a:off x="548640" y="256032"/>
+            <a:ext cx="8046720" cy="502920"/>
+          </a:xfrm>
+          <a:prstGeom prst="rect">
+            <a:avLst/>
+          </a:prstGeom>
+          <a:noFill/>
+          <a:ln/>
+        </p:spPr>
+        <p:txBody>
+          <a:bodyPr wrap="square" lIns="0" tIns="0" rIns="0" bIns="0" rtlCol="0" anchor="ctr"/>
+          <a:lstStyle/>
+          <a:p>
+            <a:pPr indent="0" marL="0">
+              <a:buNone/>
+            </a:pPr>
+            <a:r>
+              <a:rPr lang="en-US" sz="2500" b="1" dirty="0">
+                <a:solidFill>
+                  <a:srgbClr val="0F2A44"/>
+                </a:solidFill>
+                <a:latin typeface="Calibri" pitchFamily="34" charset="0"/>
+                <a:ea typeface="Calibri" pitchFamily="34" charset="-122"/>
+                <a:cs typeface="Calibri" pitchFamily="34" charset="-120"/>
+              </a:rPr>
+              <a:t>Annex: graph analysis terms</a:t>
+            </a:r>
+            <a:endParaRPr lang="en-US" sz="2500" dirty="0"/>
+          </a:p>
+        </p:txBody>
+      </p:sp>
+      <p:sp>
+        <p:nvSpPr>
+          <p:cNvPr id="3" name="Shape 1"/>
+          <p:cNvSpPr/>
+          <p:nvPr/>
+        </p:nvSpPr>
+        <p:spPr>
+          <a:xfrm>
+            <a:off x="548640" y="841248"/>
+            <a:ext cx="8046720" cy="13716"/>
+          </a:xfrm>
+          <a:prstGeom prst="rect">
+            <a:avLst/>
+          </a:prstGeom>
+          <a:solidFill>
+            <a:srgbClr val="D8DEE6"/>
+          </a:solidFill>
+          <a:ln w="12700">
+            <a:solidFill>
+              <a:srgbClr val="D8DEE6"/>
+            </a:solidFill>
+            <a:prstDash val="solid"/>
+          </a:ln>
+        </p:spPr>
+      </p:sp>
+      <p:sp>
+        <p:nvSpPr>
+          <p:cNvPr id="4" name="Text 2"/>
+          <p:cNvSpPr/>
+          <p:nvPr/>
+        </p:nvSpPr>
+        <p:spPr>
+          <a:xfrm>
+            <a:off x="548640" y="1024128"/>
+            <a:ext cx="3703320" cy="228600"/>
+          </a:xfrm>
+          <a:prstGeom prst="rect">
+            <a:avLst/>
+          </a:prstGeom>
+          <a:noFill/>
+          <a:ln/>
+        </p:spPr>
+        <p:txBody>
+          <a:bodyPr wrap="square" lIns="0" tIns="0" rIns="0" bIns="0" rtlCol="0" anchor="ctr"/>
+          <a:lstStyle/>
+          <a:p>
+            <a:pPr indent="0" marL="0">
+              <a:buNone/>
+            </a:pPr>
+            <a:r>
+              <a:rPr lang="en-US" sz="1070" b="1" dirty="0">
+                <a:solidFill>
+                  <a:srgbClr val="0F2A44"/>
+                </a:solidFill>
+                <a:latin typeface="Calibri" pitchFamily="34" charset="0"/>
+                <a:ea typeface="Calibri" pitchFamily="34" charset="-122"/>
+                <a:cs typeface="Calibri" pitchFamily="34" charset="-120"/>
+              </a:rPr>
+              <a:t>Directed dependency graph</a:t>
+            </a:r>
+            <a:endParaRPr lang="en-US" sz="1070" dirty="0"/>
+          </a:p>
+        </p:txBody>
+      </p:sp>
+      <p:sp>
+        <p:nvSpPr>
+          <p:cNvPr id="5" name="Text 3"/>
+          <p:cNvSpPr/>
+          <p:nvPr/>
+        </p:nvSpPr>
+        <p:spPr>
+          <a:xfrm>
+            <a:off x="548640" y="1280160"/>
+            <a:ext cx="3703320" cy="384048"/>
+          </a:xfrm>
+          <a:prstGeom prst="rect">
+            <a:avLst/>
+          </a:prstGeom>
+          <a:noFill/>
+          <a:ln/>
+        </p:spPr>
+        <p:txBody>
+          <a:bodyPr wrap="square" lIns="0" tIns="0" rIns="0" bIns="0" rtlCol="0" anchor="ctr">
+            <a:normAutofit/>
+          </a:bodyPr>
+          <a:lstStyle/>
+          <a:p>
+            <a:pPr indent="0" marL="0">
+              <a:buNone/>
+            </a:pPr>
+            <a:r>
+              <a:rPr lang="en-US" sz="880" dirty="0">
+                <a:solidFill>
+                  <a:srgbClr val="1E293B"/>
+                </a:solidFill>
+                <a:latin typeface="Calibri" pitchFamily="34" charset="0"/>
+                <a:ea typeface="Calibri" pitchFamily="34" charset="-122"/>
+                <a:cs typeface="Calibri" pitchFamily="34" charset="-120"/>
+              </a:rPr>
+              <a:t>G = (V, E), where V is the set of detected services and E contains directed calls between services.</a:t>
+            </a:r>
+            <a:endParaRPr lang="en-US" sz="880" dirty="0"/>
+          </a:p>
+        </p:txBody>
+      </p:sp>
+      <p:sp>
+        <p:nvSpPr>
+          <p:cNvPr id="6" name="Shape 4"/>
+          <p:cNvSpPr/>
+          <p:nvPr/>
+        </p:nvSpPr>
+        <p:spPr>
+          <a:xfrm>
+            <a:off x="548640" y="1737360"/>
+            <a:ext cx="3703320" cy="9144"/>
+          </a:xfrm>
+          <a:prstGeom prst="rect">
+            <a:avLst/>
+          </a:prstGeom>
+          <a:solidFill>
+            <a:srgbClr val="D8DEE6"/>
+          </a:solidFill>
+          <a:ln w="12700">
+            <a:solidFill>
+              <a:srgbClr val="D8DEE6"/>
+            </a:solidFill>
+            <a:prstDash val="solid"/>
+          </a:ln>
+        </p:spPr>
+      </p:sp>
+      <p:sp>
+        <p:nvSpPr>
+          <p:cNvPr id="7" name="Text 5"/>
+          <p:cNvSpPr/>
+          <p:nvPr/>
+        </p:nvSpPr>
+        <p:spPr>
+          <a:xfrm>
+            <a:off x="548640" y="1865376"/>
+            <a:ext cx="3703320" cy="228600"/>
+          </a:xfrm>
+          <a:prstGeom prst="rect">
+            <a:avLst/>
+          </a:prstGeom>
+          <a:noFill/>
+          <a:ln/>
+        </p:spPr>
+        <p:txBody>
+          <a:bodyPr wrap="square" lIns="0" tIns="0" rIns="0" bIns="0" rtlCol="0" anchor="ctr"/>
+          <a:lstStyle/>
+          <a:p>
+            <a:pPr indent="0" marL="0">
+              <a:buNone/>
+            </a:pPr>
+            <a:r>
+              <a:rPr lang="en-US" sz="1070" b="1" dirty="0">
+                <a:solidFill>
+                  <a:srgbClr val="0F2A44"/>
+                </a:solidFill>
+                <a:latin typeface="Calibri" pitchFamily="34" charset="0"/>
+                <a:ea typeface="Calibri" pitchFamily="34" charset="-122"/>
+                <a:cs typeface="Calibri" pitchFamily="34" charset="-120"/>
+              </a:rPr>
+              <a:t>Edge weight</a:t>
+            </a:r>
+            <a:endParaRPr lang="en-US" sz="1070" dirty="0"/>
+          </a:p>
+        </p:txBody>
+      </p:sp>
+      <p:sp>
+        <p:nvSpPr>
+          <p:cNvPr id="8" name="Text 6"/>
+          <p:cNvSpPr/>
+          <p:nvPr/>
+        </p:nvSpPr>
+        <p:spPr>
+          <a:xfrm>
+            <a:off x="548640" y="2121408"/>
+            <a:ext cx="3703320" cy="384048"/>
+          </a:xfrm>
+          <a:prstGeom prst="rect">
+            <a:avLst/>
+          </a:prstGeom>
+          <a:noFill/>
+          <a:ln/>
+        </p:spPr>
+        <p:txBody>
+          <a:bodyPr wrap="square" lIns="0" tIns="0" rIns="0" bIns="0" rtlCol="0" anchor="ctr">
+            <a:normAutofit/>
+          </a:bodyPr>
+          <a:lstStyle/>
+          <a:p>
+            <a:pPr indent="0" marL="0">
+              <a:buNone/>
+            </a:pPr>
+            <a:r>
+              <a:rPr lang="en-US" sz="880" dirty="0">
+                <a:solidFill>
+                  <a:srgbClr val="1E293B"/>
+                </a:solidFill>
+                <a:latin typeface="Calibri" pitchFamily="34" charset="0"/>
+                <a:ea typeface="Calibri" pitchFamily="34" charset="-122"/>
+                <a:cs typeface="Calibri" pitchFamily="34" charset="-120"/>
+              </a:rPr>
+              <a:t>The number of distinct source-level call sites from one service to another.</a:t>
+            </a:r>
+            <a:endParaRPr lang="en-US" sz="880" dirty="0"/>
+          </a:p>
+        </p:txBody>
+      </p:sp>
+      <p:sp>
+        <p:nvSpPr>
+          <p:cNvPr id="9" name="Shape 7"/>
+          <p:cNvSpPr/>
+          <p:nvPr/>
+        </p:nvSpPr>
+        <p:spPr>
+          <a:xfrm>
+            <a:off x="548640" y="2578608"/>
+            <a:ext cx="3703320" cy="9144"/>
+          </a:xfrm>
+          <a:prstGeom prst="rect">
+            <a:avLst/>
+          </a:prstGeom>
+          <a:solidFill>
+            <a:srgbClr val="D8DEE6"/>
+          </a:solidFill>
+          <a:ln w="12700">
+            <a:solidFill>
+              <a:srgbClr val="D8DEE6"/>
+            </a:solidFill>
+            <a:prstDash val="solid"/>
+          </a:ln>
+        </p:spPr>
+      </p:sp>
+      <p:sp>
+        <p:nvSpPr>
+          <p:cNvPr id="10" name="Text 8"/>
+          <p:cNvSpPr/>
+          <p:nvPr/>
+        </p:nvSpPr>
+        <p:spPr>
+          <a:xfrm>
+            <a:off x="548640" y="2706624"/>
+            <a:ext cx="3703320" cy="228600"/>
+          </a:xfrm>
+          <a:prstGeom prst="rect">
+            <a:avLst/>
+          </a:prstGeom>
+          <a:noFill/>
+          <a:ln/>
+        </p:spPr>
+        <p:txBody>
+          <a:bodyPr wrap="square" lIns="0" tIns="0" rIns="0" bIns="0" rtlCol="0" anchor="ctr"/>
+          <a:lstStyle/>
+          <a:p>
+            <a:pPr indent="0" marL="0">
+              <a:buNone/>
+            </a:pPr>
+            <a:r>
+              <a:rPr lang="en-US" sz="1070" b="1" dirty="0">
+                <a:solidFill>
+                  <a:srgbClr val="0F2A44"/>
+                </a:solidFill>
+                <a:latin typeface="Calibri" pitchFamily="34" charset="0"/>
+                <a:ea typeface="Calibri" pitchFamily="34" charset="-122"/>
+                <a:cs typeface="Calibri" pitchFamily="34" charset="-120"/>
+              </a:rPr>
+              <a:t>Strongly connected component</a:t>
+            </a:r>
+            <a:endParaRPr lang="en-US" sz="1070" dirty="0"/>
+          </a:p>
+        </p:txBody>
+      </p:sp>
+      <p:sp>
+        <p:nvSpPr>
+          <p:cNvPr id="11" name="Text 9"/>
+          <p:cNvSpPr/>
+          <p:nvPr/>
+        </p:nvSpPr>
+        <p:spPr>
+          <a:xfrm>
+            <a:off x="548640" y="2962656"/>
+            <a:ext cx="3703320" cy="384048"/>
+          </a:xfrm>
+          <a:prstGeom prst="rect">
+            <a:avLst/>
+          </a:prstGeom>
+          <a:noFill/>
+          <a:ln/>
+        </p:spPr>
+        <p:txBody>
+          <a:bodyPr wrap="square" lIns="0" tIns="0" rIns="0" bIns="0" rtlCol="0" anchor="ctr">
+            <a:normAutofit/>
+          </a:bodyPr>
+          <a:lstStyle/>
+          <a:p>
+            <a:pPr indent="0" marL="0">
+              <a:buNone/>
+            </a:pPr>
+            <a:r>
+              <a:rPr lang="en-US" sz="880" dirty="0">
+                <a:solidFill>
+                  <a:srgbClr val="1E293B"/>
+                </a:solidFill>
+                <a:latin typeface="Calibri" pitchFamily="34" charset="0"/>
+                <a:ea typeface="Calibri" pitchFamily="34" charset="-122"/>
+                <a:cs typeface="Calibri" pitchFamily="34" charset="-120"/>
+              </a:rPr>
+              <a:t>A maximal service set where each service can reach every other service through directed paths.</a:t>
+            </a:r>
+            <a:endParaRPr lang="en-US" sz="880" dirty="0"/>
+          </a:p>
+        </p:txBody>
+      </p:sp>
+      <p:sp>
+        <p:nvSpPr>
+          <p:cNvPr id="12" name="Shape 10"/>
+          <p:cNvSpPr/>
+          <p:nvPr/>
+        </p:nvSpPr>
+        <p:spPr>
+          <a:xfrm>
+            <a:off x="548640" y="3419856"/>
+            <a:ext cx="3703320" cy="9144"/>
+          </a:xfrm>
+          <a:prstGeom prst="rect">
+            <a:avLst/>
+          </a:prstGeom>
+          <a:solidFill>
+            <a:srgbClr val="D8DEE6"/>
+          </a:solidFill>
+          <a:ln w="12700">
+            <a:solidFill>
+              <a:srgbClr val="D8DEE6"/>
+            </a:solidFill>
+            <a:prstDash val="solid"/>
+          </a:ln>
+        </p:spPr>
+      </p:sp>
+      <p:sp>
+        <p:nvSpPr>
+          <p:cNvPr id="13" name="Text 11"/>
+          <p:cNvSpPr/>
+          <p:nvPr/>
+        </p:nvSpPr>
+        <p:spPr>
+          <a:xfrm>
+            <a:off x="548640" y="3547872"/>
+            <a:ext cx="3703320" cy="228600"/>
+          </a:xfrm>
+          <a:prstGeom prst="rect">
+            <a:avLst/>
+          </a:prstGeom>
+          <a:noFill/>
+          <a:ln/>
+        </p:spPr>
+        <p:txBody>
+          <a:bodyPr wrap="square" lIns="0" tIns="0" rIns="0" bIns="0" rtlCol="0" anchor="ctr"/>
+          <a:lstStyle/>
+          <a:p>
+            <a:pPr indent="0" marL="0">
+              <a:buNone/>
+            </a:pPr>
+            <a:r>
+              <a:rPr lang="en-US" sz="1070" b="1" dirty="0">
+                <a:solidFill>
+                  <a:srgbClr val="0F2A44"/>
+                </a:solidFill>
+                <a:latin typeface="Calibri" pitchFamily="34" charset="0"/>
+                <a:ea typeface="Calibri" pitchFamily="34" charset="-122"/>
+                <a:cs typeface="Calibri" pitchFamily="34" charset="-120"/>
+              </a:rPr>
+              <a:t>Cycle</a:t>
+            </a:r>
+            <a:endParaRPr lang="en-US" sz="1070" dirty="0"/>
+          </a:p>
+        </p:txBody>
+      </p:sp>
+      <p:sp>
+        <p:nvSpPr>
+          <p:cNvPr id="14" name="Text 12"/>
+          <p:cNvSpPr/>
+          <p:nvPr/>
+        </p:nvSpPr>
+        <p:spPr>
+          <a:xfrm>
+            <a:off x="548640" y="3803904"/>
+            <a:ext cx="3703320" cy="384048"/>
+          </a:xfrm>
+          <a:prstGeom prst="rect">
+            <a:avLst/>
+          </a:prstGeom>
+          <a:noFill/>
+          <a:ln/>
+        </p:spPr>
+        <p:txBody>
+          <a:bodyPr wrap="square" lIns="0" tIns="0" rIns="0" bIns="0" rtlCol="0" anchor="ctr">
+            <a:normAutofit/>
+          </a:bodyPr>
+          <a:lstStyle/>
+          <a:p>
+            <a:pPr indent="0" marL="0">
+              <a:buNone/>
+            </a:pPr>
+            <a:r>
+              <a:rPr lang="en-US" sz="880" dirty="0">
+                <a:solidFill>
+                  <a:srgbClr val="1E293B"/>
+                </a:solidFill>
+                <a:latin typeface="Calibri" pitchFamily="34" charset="0"/>
+                <a:ea typeface="Calibri" pitchFamily="34" charset="-122"/>
+                <a:cs typeface="Calibri" pitchFamily="34" charset="-120"/>
+              </a:rPr>
+              <a:t>An SCC with more than one service; used as evidence for Cyclic Dependency.</a:t>
+            </a:r>
+            <a:endParaRPr lang="en-US" sz="880" dirty="0"/>
+          </a:p>
+        </p:txBody>
+      </p:sp>
+      <p:sp>
+        <p:nvSpPr>
+          <p:cNvPr id="15" name="Shape 13"/>
+          <p:cNvSpPr/>
+          <p:nvPr/>
+        </p:nvSpPr>
+        <p:spPr>
+          <a:xfrm>
+            <a:off x="548640" y="4261104"/>
+            <a:ext cx="3703320" cy="9144"/>
+          </a:xfrm>
+          <a:prstGeom prst="rect">
+            <a:avLst/>
+          </a:prstGeom>
+          <a:solidFill>
+            <a:srgbClr val="D8DEE6"/>
+          </a:solidFill>
+          <a:ln w="12700">
+            <a:solidFill>
+              <a:srgbClr val="D8DEE6"/>
+            </a:solidFill>
+            <a:prstDash val="solid"/>
+          </a:ln>
+        </p:spPr>
+      </p:sp>
+      <p:sp>
+        <p:nvSpPr>
+          <p:cNvPr id="16" name="Text 14"/>
+          <p:cNvSpPr/>
+          <p:nvPr/>
+        </p:nvSpPr>
+        <p:spPr>
+          <a:xfrm>
+            <a:off x="4617720" y="1024128"/>
+            <a:ext cx="3703320" cy="228600"/>
+          </a:xfrm>
+          <a:prstGeom prst="rect">
+            <a:avLst/>
+          </a:prstGeom>
+          <a:noFill/>
+          <a:ln/>
+        </p:spPr>
+        <p:txBody>
+          <a:bodyPr wrap="square" lIns="0" tIns="0" rIns="0" bIns="0" rtlCol="0" anchor="ctr"/>
+          <a:lstStyle/>
+          <a:p>
+            <a:pPr indent="0" marL="0">
+              <a:buNone/>
+            </a:pPr>
+            <a:r>
+              <a:rPr lang="en-US" sz="1070" b="1" dirty="0">
+                <a:solidFill>
+                  <a:srgbClr val="0F2A44"/>
+                </a:solidFill>
+                <a:latin typeface="Calibri" pitchFamily="34" charset="0"/>
+                <a:ea typeface="Calibri" pitchFamily="34" charset="-122"/>
+                <a:cs typeface="Calibri" pitchFamily="34" charset="-120"/>
+              </a:rPr>
+              <a:t>Fan-in / fan-out</a:t>
+            </a:r>
+            <a:endParaRPr lang="en-US" sz="1070" dirty="0"/>
+          </a:p>
+        </p:txBody>
+      </p:sp>
+      <p:sp>
+        <p:nvSpPr>
+          <p:cNvPr id="17" name="Text 15"/>
+          <p:cNvSpPr/>
+          <p:nvPr/>
+        </p:nvSpPr>
+        <p:spPr>
+          <a:xfrm>
+            <a:off x="4617720" y="1280160"/>
+            <a:ext cx="3703320" cy="384048"/>
+          </a:xfrm>
+          <a:prstGeom prst="rect">
+            <a:avLst/>
+          </a:prstGeom>
+          <a:noFill/>
+          <a:ln/>
+        </p:spPr>
+        <p:txBody>
+          <a:bodyPr wrap="square" lIns="0" tIns="0" rIns="0" bIns="0" rtlCol="0" anchor="ctr">
+            <a:normAutofit/>
+          </a:bodyPr>
+          <a:lstStyle/>
+          <a:p>
+            <a:pPr indent="0" marL="0">
+              <a:buNone/>
+            </a:pPr>
+            <a:r>
+              <a:rPr lang="en-US" sz="880" dirty="0">
+                <a:solidFill>
+                  <a:srgbClr val="1E293B"/>
+                </a:solidFill>
+                <a:latin typeface="Calibri" pitchFamily="34" charset="0"/>
+                <a:ea typeface="Calibri" pitchFamily="34" charset="-122"/>
+                <a:cs typeface="Calibri" pitchFamily="34" charset="-120"/>
+              </a:rPr>
+              <a:t>Incoming and outgoing service dependency counts; useful for spotting central services and mediator behaviour.</a:t>
+            </a:r>
+            <a:endParaRPr lang="en-US" sz="880" dirty="0"/>
+          </a:p>
+        </p:txBody>
+      </p:sp>
+      <p:sp>
+        <p:nvSpPr>
+          <p:cNvPr id="18" name="Shape 16"/>
+          <p:cNvSpPr/>
+          <p:nvPr/>
+        </p:nvSpPr>
+        <p:spPr>
+          <a:xfrm>
+            <a:off x="4617720" y="1737360"/>
+            <a:ext cx="3703320" cy="9144"/>
+          </a:xfrm>
+          <a:prstGeom prst="rect">
+            <a:avLst/>
+          </a:prstGeom>
+          <a:solidFill>
+            <a:srgbClr val="D8DEE6"/>
+          </a:solidFill>
+          <a:ln w="12700">
+            <a:solidFill>
+              <a:srgbClr val="D8DEE6"/>
+            </a:solidFill>
+            <a:prstDash val="solid"/>
+          </a:ln>
+        </p:spPr>
+      </p:sp>
+      <p:sp>
+        <p:nvSpPr>
+          <p:cNvPr id="19" name="Text 17"/>
+          <p:cNvSpPr/>
+          <p:nvPr/>
+        </p:nvSpPr>
+        <p:spPr>
+          <a:xfrm>
+            <a:off x="4617720" y="1865376"/>
+            <a:ext cx="3703320" cy="228600"/>
+          </a:xfrm>
+          <a:prstGeom prst="rect">
+            <a:avLst/>
+          </a:prstGeom>
+          <a:noFill/>
+          <a:ln/>
+        </p:spPr>
+        <p:txBody>
+          <a:bodyPr wrap="square" lIns="0" tIns="0" rIns="0" bIns="0" rtlCol="0" anchor="ctr"/>
+          <a:lstStyle/>
+          <a:p>
+            <a:pPr indent="0" marL="0">
+              <a:buNone/>
+            </a:pPr>
+            <a:r>
+              <a:rPr lang="en-US" sz="1070" b="1" dirty="0">
+                <a:solidFill>
+                  <a:srgbClr val="0F2A44"/>
+                </a:solidFill>
+                <a:latin typeface="Calibri" pitchFamily="34" charset="0"/>
+                <a:ea typeface="Calibri" pitchFamily="34" charset="-122"/>
+                <a:cs typeface="Calibri" pitchFamily="34" charset="-120"/>
+              </a:rPr>
+              <a:t>Bidirectional dependency</a:t>
+            </a:r>
+            <a:endParaRPr lang="en-US" sz="1070" dirty="0"/>
+          </a:p>
+        </p:txBody>
+      </p:sp>
+      <p:sp>
+        <p:nvSpPr>
+          <p:cNvPr id="20" name="Text 18"/>
+          <p:cNvSpPr/>
+          <p:nvPr/>
+        </p:nvSpPr>
+        <p:spPr>
+          <a:xfrm>
+            <a:off x="4617720" y="2121408"/>
+            <a:ext cx="3703320" cy="384048"/>
+          </a:xfrm>
+          <a:prstGeom prst="rect">
+            <a:avLst/>
+          </a:prstGeom>
+          <a:noFill/>
+          <a:ln/>
+        </p:spPr>
+        <p:txBody>
+          <a:bodyPr wrap="square" lIns="0" tIns="0" rIns="0" bIns="0" rtlCol="0" anchor="ctr">
+            <a:normAutofit/>
+          </a:bodyPr>
+          <a:lstStyle/>
+          <a:p>
+            <a:pPr indent="0" marL="0">
+              <a:buNone/>
+            </a:pPr>
+            <a:r>
+              <a:rPr lang="en-US" sz="880" dirty="0">
+                <a:solidFill>
+                  <a:srgbClr val="1E293B"/>
+                </a:solidFill>
+                <a:latin typeface="Calibri" pitchFamily="34" charset="0"/>
+                <a:ea typeface="Calibri" pitchFamily="34" charset="-122"/>
+                <a:cs typeface="Calibri" pitchFamily="34" charset="-120"/>
+              </a:rPr>
+              <a:t>A pair A-&gt;B and B-&gt;A; used as evidence for Wrong Cuts and poor service boundaries.</a:t>
+            </a:r>
+            <a:endParaRPr lang="en-US" sz="880" dirty="0"/>
+          </a:p>
+        </p:txBody>
+      </p:sp>
+      <p:sp>
+        <p:nvSpPr>
+          <p:cNvPr id="21" name="Shape 19"/>
+          <p:cNvSpPr/>
+          <p:nvPr/>
+        </p:nvSpPr>
+        <p:spPr>
+          <a:xfrm>
+            <a:off x="4617720" y="2578608"/>
+            <a:ext cx="3703320" cy="9144"/>
+          </a:xfrm>
+          <a:prstGeom prst="rect">
+            <a:avLst/>
+          </a:prstGeom>
+          <a:solidFill>
+            <a:srgbClr val="D8DEE6"/>
+          </a:solidFill>
+          <a:ln w="12700">
+            <a:solidFill>
+              <a:srgbClr val="D8DEE6"/>
+            </a:solidFill>
+            <a:prstDash val="solid"/>
+          </a:ln>
+        </p:spPr>
+      </p:sp>
+      <p:sp>
+        <p:nvSpPr>
+          <p:cNvPr id="22" name="Text 20"/>
+          <p:cNvSpPr/>
+          <p:nvPr/>
+        </p:nvSpPr>
+        <p:spPr>
+          <a:xfrm>
+            <a:off x="4617720" y="2706624"/>
+            <a:ext cx="3703320" cy="228600"/>
+          </a:xfrm>
+          <a:prstGeom prst="rect">
+            <a:avLst/>
+          </a:prstGeom>
+          <a:noFill/>
+          <a:ln/>
+        </p:spPr>
+        <p:txBody>
+          <a:bodyPr wrap="square" lIns="0" tIns="0" rIns="0" bIns="0" rtlCol="0" anchor="ctr"/>
+          <a:lstStyle/>
+          <a:p>
+            <a:pPr indent="0" marL="0">
+              <a:buNone/>
+            </a:pPr>
+            <a:r>
+              <a:rPr lang="en-US" sz="1070" b="1" dirty="0">
+                <a:solidFill>
+                  <a:srgbClr val="0F2A44"/>
+                </a:solidFill>
+                <a:latin typeface="Calibri" pitchFamily="34" charset="0"/>
+                <a:ea typeface="Calibri" pitchFamily="34" charset="-122"/>
+                <a:cs typeface="Calibri" pitchFamily="34" charset="-120"/>
+              </a:rPr>
+              <a:t>Connected ratio</a:t>
+            </a:r>
+            <a:endParaRPr lang="en-US" sz="1070" dirty="0"/>
+          </a:p>
+        </p:txBody>
+      </p:sp>
+      <p:sp>
+        <p:nvSpPr>
+          <p:cNvPr id="23" name="Text 21"/>
+          <p:cNvSpPr/>
+          <p:nvPr/>
+        </p:nvSpPr>
+        <p:spPr>
+          <a:xfrm>
+            <a:off x="4617720" y="2962656"/>
+            <a:ext cx="3703320" cy="384048"/>
+          </a:xfrm>
+          <a:prstGeom prst="rect">
+            <a:avLst/>
+          </a:prstGeom>
+          <a:noFill/>
+          <a:ln/>
+        </p:spPr>
+        <p:txBody>
+          <a:bodyPr wrap="square" lIns="0" tIns="0" rIns="0" bIns="0" rtlCol="0" anchor="ctr">
+            <a:normAutofit/>
+          </a:bodyPr>
+          <a:lstStyle/>
+          <a:p>
+            <a:pPr indent="0" marL="0">
+              <a:buNone/>
+            </a:pPr>
+            <a:r>
+              <a:rPr lang="en-US" sz="880" dirty="0">
+                <a:solidFill>
+                  <a:srgbClr val="1E293B"/>
+                </a:solidFill>
+                <a:latin typeface="Calibri" pitchFamily="34" charset="0"/>
+                <a:ea typeface="Calibri" pitchFamily="34" charset="-122"/>
+                <a:cs typeface="Calibri" pitchFamily="34" charset="-120"/>
+              </a:rPr>
+              <a:t>Fraction of services participating in dependencies; used as part of Distributed Monolith evidence.</a:t>
+            </a:r>
+            <a:endParaRPr lang="en-US" sz="880" dirty="0"/>
+          </a:p>
+        </p:txBody>
+      </p:sp>
+      <p:sp>
+        <p:nvSpPr>
+          <p:cNvPr id="24" name="Shape 22"/>
+          <p:cNvSpPr/>
+          <p:nvPr/>
+        </p:nvSpPr>
+        <p:spPr>
+          <a:xfrm>
+            <a:off x="4617720" y="3419856"/>
+            <a:ext cx="3703320" cy="9144"/>
+          </a:xfrm>
+          <a:prstGeom prst="rect">
+            <a:avLst/>
+          </a:prstGeom>
+          <a:solidFill>
+            <a:srgbClr val="D8DEE6"/>
+          </a:solidFill>
+          <a:ln w="12700">
+            <a:solidFill>
+              <a:srgbClr val="D8DEE6"/>
+            </a:solidFill>
+            <a:prstDash val="solid"/>
+          </a:ln>
+        </p:spPr>
+      </p:sp>
+      <p:sp>
+        <p:nvSpPr>
+          <p:cNvPr id="25" name="Text 23"/>
+          <p:cNvSpPr/>
+          <p:nvPr/>
+        </p:nvSpPr>
+        <p:spPr>
+          <a:xfrm>
+            <a:off x="4617720" y="3547872"/>
+            <a:ext cx="3703320" cy="228600"/>
+          </a:xfrm>
+          <a:prstGeom prst="rect">
+            <a:avLst/>
+          </a:prstGeom>
+          <a:noFill/>
+          <a:ln/>
+        </p:spPr>
+        <p:txBody>
+          <a:bodyPr wrap="square" lIns="0" tIns="0" rIns="0" bIns="0" rtlCol="0" anchor="ctr"/>
+          <a:lstStyle/>
+          <a:p>
+            <a:pPr indent="0" marL="0">
+              <a:buNone/>
+            </a:pPr>
+            <a:r>
+              <a:rPr lang="en-US" sz="1070" b="1" dirty="0">
+                <a:solidFill>
+                  <a:srgbClr val="0F2A44"/>
+                </a:solidFill>
+                <a:latin typeface="Calibri" pitchFamily="34" charset="0"/>
+                <a:ea typeface="Calibri" pitchFamily="34" charset="-122"/>
+                <a:cs typeface="Calibri" pitchFamily="34" charset="-120"/>
+              </a:rPr>
+              <a:t>Betweenness centrality</a:t>
+            </a:r>
+            <a:endParaRPr lang="en-US" sz="1070" dirty="0"/>
+          </a:p>
+        </p:txBody>
+      </p:sp>
+      <p:sp>
+        <p:nvSpPr>
+          <p:cNvPr id="26" name="Text 24"/>
+          <p:cNvSpPr/>
+          <p:nvPr/>
+        </p:nvSpPr>
+        <p:spPr>
+          <a:xfrm>
+            <a:off x="4617720" y="3803904"/>
+            <a:ext cx="3703320" cy="384048"/>
+          </a:xfrm>
+          <a:prstGeom prst="rect">
+            <a:avLst/>
+          </a:prstGeom>
+          <a:noFill/>
+          <a:ln/>
+        </p:spPr>
+        <p:txBody>
+          <a:bodyPr wrap="square" lIns="0" tIns="0" rIns="0" bIns="0" rtlCol="0" anchor="ctr">
+            <a:normAutofit/>
+          </a:bodyPr>
+          <a:lstStyle/>
+          <a:p>
+            <a:pPr indent="0" marL="0">
+              <a:buNone/>
+            </a:pPr>
+            <a:r>
+              <a:rPr lang="en-US" sz="880" dirty="0">
+                <a:solidFill>
+                  <a:srgbClr val="1E293B"/>
+                </a:solidFill>
+                <a:latin typeface="Calibri" pitchFamily="34" charset="0"/>
+                <a:ea typeface="Calibri" pitchFamily="34" charset="-122"/>
+                <a:cs typeface="Calibri" pitchFamily="34" charset="-120"/>
+              </a:rPr>
+              <a:t>How often a service lies on shortest paths between other services; useful for identifying broker-like nodes.</a:t>
+            </a:r>
+            <a:endParaRPr lang="en-US" sz="880" dirty="0"/>
+          </a:p>
+        </p:txBody>
+      </p:sp>
+      <p:sp>
+        <p:nvSpPr>
+          <p:cNvPr id="27" name="Shape 25"/>
+          <p:cNvSpPr/>
+          <p:nvPr/>
+        </p:nvSpPr>
+        <p:spPr>
+          <a:xfrm>
+            <a:off x="4617720" y="4261104"/>
+            <a:ext cx="3703320" cy="9144"/>
+          </a:xfrm>
+          <a:prstGeom prst="rect">
+            <a:avLst/>
+          </a:prstGeom>
+          <a:solidFill>
+            <a:srgbClr val="D8DEE6"/>
+          </a:solidFill>
+          <a:ln w="12700">
+            <a:solidFill>
+              <a:srgbClr val="D8DEE6"/>
+            </a:solidFill>
+            <a:prstDash val="solid"/>
+          </a:ln>
+        </p:spPr>
+      </p:sp>
+      <p:sp>
+        <p:nvSpPr>
+          <p:cNvPr id="28" name="Shape 26"/>
+          <p:cNvSpPr/>
+          <p:nvPr/>
+        </p:nvSpPr>
+        <p:spPr>
+          <a:xfrm>
+            <a:off x="548640" y="4498848"/>
+            <a:ext cx="457200" cy="36576"/>
+          </a:xfrm>
+          <a:prstGeom prst="rect">
+            <a:avLst/>
+          </a:prstGeom>
+          <a:solidFill>
+            <a:srgbClr val="0D9488"/>
+          </a:solidFill>
+          <a:ln w="12700">
+            <a:solidFill>
+              <a:srgbClr val="0D9488"/>
+            </a:solidFill>
+            <a:prstDash val="solid"/>
+          </a:ln>
+        </p:spPr>
+      </p:sp>
+      <p:sp>
+        <p:nvSpPr>
+          <p:cNvPr id="29" name="Text 27"/>
+          <p:cNvSpPr/>
+          <p:nvPr/>
+        </p:nvSpPr>
+        <p:spPr>
+          <a:xfrm>
+            <a:off x="548640" y="4590288"/>
+            <a:ext cx="8046720" cy="237744"/>
+          </a:xfrm>
+          <a:prstGeom prst="rect">
+            <a:avLst/>
+          </a:prstGeom>
+          <a:noFill/>
+          <a:ln/>
+        </p:spPr>
+        <p:txBody>
+          <a:bodyPr wrap="square" lIns="0" tIns="0" rIns="0" bIns="0" rtlCol="0" anchor="ctr"/>
+          <a:lstStyle/>
+          <a:p>
+            <a:pPr indent="0" marL="0">
+              <a:buNone/>
+            </a:pPr>
+            <a:r>
+              <a:rPr lang="en-US" sz="950" i="1" dirty="0">
+                <a:solidFill>
+                  <a:srgbClr val="64748B"/>
+                </a:solidFill>
+                <a:latin typeface="Calibri" pitchFamily="34" charset="0"/>
+                <a:ea typeface="Calibri" pitchFamily="34" charset="-122"/>
+                <a:cs typeface="Calibri" pitchFamily="34" charset="-120"/>
+              </a:rPr>
+              <a:t>Graph algorithms are deterministic over the recovered service dependency graph; uncertainty comes mainly from static call resolution.</a:t>
+            </a:r>
+            <a:endParaRPr lang="en-US" sz="950" dirty="0"/>
+          </a:p>
+        </p:txBody>
+      </p:sp>
+      <p:sp>
+        <p:nvSpPr>
+          <p:cNvPr id="30" name="Text 28"/>
+          <p:cNvSpPr/>
+          <p:nvPr/>
+        </p:nvSpPr>
+        <p:spPr>
+          <a:xfrm>
+            <a:off x="7452360" y="4864608"/>
+            <a:ext cx="1143000" cy="228600"/>
+          </a:xfrm>
+          <a:prstGeom prst="rect">
+            <a:avLst/>
+          </a:prstGeom>
+          <a:noFill/>
+          <a:ln/>
+        </p:spPr>
+        <p:txBody>
+          <a:bodyPr wrap="square" lIns="0" tIns="0" rIns="0" bIns="0" rtlCol="0" anchor="ctr"/>
+          <a:lstStyle/>
+          <a:p>
+            <a:pPr algn="r" indent="0" marL="0">
+              <a:buNone/>
+            </a:pPr>
+            <a:r>
+              <a:rPr lang="en-US" sz="900" dirty="0">
+                <a:solidFill>
+                  <a:srgbClr val="64748B"/>
+                </a:solidFill>
+                <a:latin typeface="Calibri" pitchFamily="34" charset="0"/>
+                <a:ea typeface="Calibri" pitchFamily="34" charset="-122"/>
+                <a:cs typeface="Calibri" pitchFamily="34" charset="-120"/>
+              </a:rPr>
+              <a:t>Appendix E</a:t>
             </a:r>
             <a:endParaRPr lang="en-US" sz="900" dirty="0"/>
           </a:p>
